--- a/files/2025_2_LM/1017_0105.pptx
+++ b/files/2025_2_LM/1017_0105.pptx
@@ -8,7 +8,7 @@
     <p:sldMasterId id="2147487332" r:id="rId4"/>
   </p:sldMasterIdLst>
   <p:notesMasterIdLst>
-    <p:notesMasterId r:id="rId19"/>
+    <p:notesMasterId r:id="rId21"/>
   </p:notesMasterIdLst>
   <p:sldIdLst>
     <p:sldId id="1383" r:id="rId5"/>
@@ -22,9 +22,11 @@
     <p:sldId id="1377" r:id="rId13"/>
     <p:sldId id="1361" r:id="rId14"/>
     <p:sldId id="1378" r:id="rId15"/>
-    <p:sldId id="1379" r:id="rId16"/>
-    <p:sldId id="1381" r:id="rId17"/>
-    <p:sldId id="1357" r:id="rId18"/>
+    <p:sldId id="1384" r:id="rId16"/>
+    <p:sldId id="1385" r:id="rId17"/>
+    <p:sldId id="1379" r:id="rId18"/>
+    <p:sldId id="1381" r:id="rId19"/>
+    <p:sldId id="1357" r:id="rId20"/>
   </p:sldIdLst>
   <p:sldSz cx="9144000" cy="6858000" type="screen4x3"/>
   <p:notesSz cx="6858000" cy="9144000"/>
@@ -282,7 +284,7 @@
               <a:pPr>
                 <a:defRPr/>
               </a:pPr>
-              <a:t>2025/10/17</a:t>
+              <a:t>2026/10/10</a:t>
             </a:fld>
             <a:endParaRPr lang="zh-CN" altLang="en-US"/>
           </a:p>
@@ -1161,7 +1163,7 @@
               <a:pPr>
                 <a:defRPr/>
               </a:pPr>
-              <a:t>2025/10/17</a:t>
+              <a:t>2026/10/10</a:t>
             </a:fld>
             <a:endParaRPr lang="zh-CN" altLang="en-US"/>
           </a:p>
@@ -1419,7 +1421,7 @@
               <a:pPr>
                 <a:defRPr/>
               </a:pPr>
-              <a:t>2025/10/17</a:t>
+              <a:t>2026/10/10</a:t>
             </a:fld>
             <a:endParaRPr lang="zh-CN" altLang="en-US"/>
           </a:p>
@@ -4813,7 +4815,7 @@
               <a:pPr>
                 <a:defRPr/>
               </a:pPr>
-              <a:t>2025/10/17</a:t>
+              <a:t>2026/10/10</a:t>
             </a:fld>
             <a:endParaRPr lang="zh-CN" altLang="en-US"/>
           </a:p>
@@ -5031,7 +5033,7 @@
               <a:pPr>
                 <a:defRPr/>
               </a:pPr>
-              <a:t>2025/10/17</a:t>
+              <a:t>2026/10/10</a:t>
             </a:fld>
             <a:endParaRPr lang="zh-CN" altLang="en-US"/>
           </a:p>
@@ -21191,7 +21193,7 @@
           <a:graphicData uri="http://schemas.openxmlformats.org/presentationml/2006/ole">
             <mc:AlternateContent xmlns:mc="http://schemas.openxmlformats.org/markup-compatibility/2006">
               <mc:Choice xmlns:v="urn:schemas-microsoft-com:vml" Requires="v">
-                <p:oleObj spid="_x0000_s7169" name="Equation" r:id="rId4" imgW="3576867" imgH="2016432" progId="Equation.DSMT4">
+                <p:oleObj spid="_x0000_s7172" name="Equation" r:id="rId4" imgW="3576867" imgH="2016432" progId="Equation.DSMT4">
                   <p:embed/>
                 </p:oleObj>
               </mc:Choice>
@@ -21403,7 +21405,7 @@
           <a:graphicData uri="http://schemas.openxmlformats.org/presentationml/2006/ole">
             <mc:AlternateContent xmlns:mc="http://schemas.openxmlformats.org/markup-compatibility/2006">
               <mc:Choice xmlns:v="urn:schemas-microsoft-com:vml" Requires="v">
-                <p:oleObj spid="_x0000_s7170" name="Equation" r:id="rId6" imgW="596880" imgH="203040" progId="Equation.DSMT4">
+                <p:oleObj spid="_x0000_s7173" name="Equation" r:id="rId6" imgW="596880" imgH="203040" progId="Equation.DSMT4">
                   <p:embed/>
                 </p:oleObj>
               </mc:Choice>
@@ -21472,7 +21474,7 @@
           <a:graphicData uri="http://schemas.openxmlformats.org/presentationml/2006/ole">
             <mc:AlternateContent xmlns:mc="http://schemas.openxmlformats.org/markup-compatibility/2006">
               <mc:Choice xmlns:v="urn:schemas-microsoft-com:vml" Requires="v">
-                <p:oleObj spid="_x0000_s7171" name="Equation" r:id="rId8" imgW="1371600" imgH="787320" progId="Equation.DSMT4">
+                <p:oleObj spid="_x0000_s7174" name="Equation" r:id="rId8" imgW="1371600" imgH="787320" progId="Equation.DSMT4">
                   <p:embed/>
                 </p:oleObj>
               </mc:Choice>
@@ -22378,7 +22380,7 @@
           <a:graphicData uri="http://schemas.openxmlformats.org/presentationml/2006/ole">
             <mc:AlternateContent xmlns:mc="http://schemas.openxmlformats.org/markup-compatibility/2006">
               <mc:Choice xmlns:v="urn:schemas-microsoft-com:vml" Requires="v">
-                <p:oleObj spid="_x0000_s8193" name="Equation" r:id="rId4" imgW="3958135" imgH="1688821" progId="Equation.DSMT4">
+                <p:oleObj spid="_x0000_s8201" name="Equation" r:id="rId4" imgW="3958135" imgH="1688821" progId="Equation.DSMT4">
                   <p:embed/>
                 </p:oleObj>
               </mc:Choice>
@@ -22447,7 +22449,7 @@
           <a:graphicData uri="http://schemas.openxmlformats.org/presentationml/2006/ole">
             <mc:AlternateContent xmlns:mc="http://schemas.openxmlformats.org/markup-compatibility/2006">
               <mc:Choice xmlns:v="urn:schemas-microsoft-com:vml" Requires="v">
-                <p:oleObj spid="_x0000_s8194" name="Equation" r:id="rId6" imgW="1930320" imgH="787320" progId="Equation.DSMT4">
+                <p:oleObj spid="_x0000_s8202" name="Equation" r:id="rId6" imgW="1930320" imgH="787320" progId="Equation.DSMT4">
                   <p:embed/>
                 </p:oleObj>
               </mc:Choice>
@@ -22523,7 +22525,7 @@
           <a:graphicData uri="http://schemas.openxmlformats.org/presentationml/2006/ole">
             <mc:AlternateContent xmlns:mc="http://schemas.openxmlformats.org/markup-compatibility/2006">
               <mc:Choice xmlns:v="urn:schemas-microsoft-com:vml" Requires="v">
-                <p:oleObj spid="_x0000_s8195" name="Equation" r:id="rId8" imgW="3986937" imgH="1688821" progId="Equation.DSMT4">
+                <p:oleObj spid="_x0000_s8203" name="Equation" r:id="rId8" imgW="3986937" imgH="1688821" progId="Equation.DSMT4">
                   <p:embed/>
                 </p:oleObj>
               </mc:Choice>
@@ -22592,7 +22594,7 @@
           <a:graphicData uri="http://schemas.openxmlformats.org/presentationml/2006/ole">
             <mc:AlternateContent xmlns:mc="http://schemas.openxmlformats.org/markup-compatibility/2006">
               <mc:Choice xmlns:v="urn:schemas-microsoft-com:vml" Requires="v">
-                <p:oleObj spid="_x0000_s8196" name="Equation" r:id="rId10" imgW="3795043" imgH="1688821" progId="Equation.DSMT4">
+                <p:oleObj spid="_x0000_s8204" name="Equation" r:id="rId10" imgW="3795043" imgH="1688821" progId="Equation.DSMT4">
                   <p:embed/>
                 </p:oleObj>
               </mc:Choice>
@@ -22699,7 +22701,7 @@
           <a:graphicData uri="http://schemas.openxmlformats.org/presentationml/2006/ole">
             <mc:AlternateContent xmlns:mc="http://schemas.openxmlformats.org/markup-compatibility/2006">
               <mc:Choice xmlns:v="urn:schemas-microsoft-com:vml" Requires="v">
-                <p:oleObj spid="_x0000_s8197" name="Equation" r:id="rId12" imgW="1155600" imgH="393480" progId="Equation.DSMT4">
+                <p:oleObj spid="_x0000_s8205" name="Equation" r:id="rId12" imgW="1155600" imgH="393480" progId="Equation.DSMT4">
                   <p:embed/>
                 </p:oleObj>
               </mc:Choice>
@@ -22775,7 +22777,7 @@
           <a:graphicData uri="http://schemas.openxmlformats.org/presentationml/2006/ole">
             <mc:AlternateContent xmlns:mc="http://schemas.openxmlformats.org/markup-compatibility/2006">
               <mc:Choice xmlns:v="urn:schemas-microsoft-com:vml" Requires="v">
-                <p:oleObj spid="_x0000_s8198" name="Equation" r:id="rId14" imgW="1155600" imgH="393480" progId="Equation.DSMT4">
+                <p:oleObj spid="_x0000_s8206" name="Equation" r:id="rId14" imgW="1155600" imgH="393480" progId="Equation.DSMT4">
                   <p:embed/>
                 </p:oleObj>
               </mc:Choice>
@@ -22851,7 +22853,7 @@
           <a:graphicData uri="http://schemas.openxmlformats.org/presentationml/2006/ole">
             <mc:AlternateContent xmlns:mc="http://schemas.openxmlformats.org/markup-compatibility/2006">
               <mc:Choice xmlns:v="urn:schemas-microsoft-com:vml" Requires="v">
-                <p:oleObj spid="_x0000_s8199" name="Equation" r:id="rId16" imgW="1422360" imgH="393480" progId="Equation.DSMT4">
+                <p:oleObj spid="_x0000_s8207" name="Equation" r:id="rId16" imgW="1422360" imgH="393480" progId="Equation.DSMT4">
                   <p:embed/>
                 </p:oleObj>
               </mc:Choice>
@@ -22927,7 +22929,7 @@
           <a:graphicData uri="http://schemas.openxmlformats.org/presentationml/2006/ole">
             <mc:AlternateContent xmlns:mc="http://schemas.openxmlformats.org/markup-compatibility/2006">
               <mc:Choice xmlns:v="urn:schemas-microsoft-com:vml" Requires="v">
-                <p:oleObj spid="_x0000_s8200" name="Equation" r:id="rId18" imgW="1333440" imgH="406080" progId="Equation.DSMT4">
+                <p:oleObj spid="_x0000_s8208" name="Equation" r:id="rId18" imgW="1333440" imgH="406080" progId="Equation.DSMT4">
                   <p:embed/>
                 </p:oleObj>
               </mc:Choice>
@@ -23478,6 +23480,4301 @@
 </file>
 
 <file path=ppt/slides/slide12.xml><?xml version="1.0" encoding="utf-8"?>
+<p:sld xmlns:a="http://schemas.openxmlformats.org/drawingml/2006/main" xmlns:r="http://schemas.openxmlformats.org/officeDocument/2006/relationships" xmlns:p="http://schemas.openxmlformats.org/presentationml/2006/main">
+  <p:cSld>
+    <p:spTree>
+      <p:nvGrpSpPr>
+        <p:cNvPr id="1" name=""/>
+        <p:cNvGrpSpPr/>
+        <p:nvPr/>
+      </p:nvGrpSpPr>
+      <p:grpSpPr>
+        <a:xfrm>
+          <a:off x="0" y="0"/>
+          <a:ext cx="0" cy="0"/>
+          <a:chOff x="0" y="0"/>
+          <a:chExt cx="0" cy="0"/>
+        </a:xfrm>
+      </p:grpSpPr>
+      <p:sp>
+        <p:nvSpPr>
+          <p:cNvPr id="2" name="Rectangle 30">
+            <a:extLst>
+              <a:ext uri="{FF2B5EF4-FFF2-40B4-BE49-F238E27FC236}">
+                <a16:creationId xmlns:a16="http://schemas.microsoft.com/office/drawing/2014/main" id="{2B5C7358-CBF3-3549-B3A1-796FF4898946}"/>
+              </a:ext>
+            </a:extLst>
+          </p:cNvPr>
+          <p:cNvSpPr>
+            <a:spLocks noChangeArrowheads="1"/>
+          </p:cNvSpPr>
+          <p:nvPr/>
+        </p:nvSpPr>
+        <p:spPr bwMode="auto">
+          <a:xfrm>
+            <a:off x="33209" y="-16506"/>
+            <a:ext cx="7743318" cy="493287"/>
+          </a:xfrm>
+          <a:prstGeom prst="rect">
+            <a:avLst/>
+          </a:prstGeom>
+          <a:noFill/>
+          <a:ln>
+            <a:noFill/>
+          </a:ln>
+        </p:spPr>
+        <p:txBody>
+          <a:bodyPr wrap="square">
+            <a:spAutoFit/>
+          </a:bodyPr>
+          <a:lstStyle>
+            <a:lvl1pPr>
+              <a:defRPr kumimoji="1" sz="2400">
+                <a:solidFill>
+                  <a:schemeClr val="tx1"/>
+                </a:solidFill>
+                <a:latin typeface="Times New Roman" panose="02020603050405020304" pitchFamily="18" charset="0"/>
+                <a:ea typeface="宋体" panose="02010600030101010101" pitchFamily="2" charset="-122"/>
+              </a:defRPr>
+            </a:lvl1pPr>
+            <a:lvl2pPr marL="742950" indent="-285750">
+              <a:defRPr kumimoji="1" sz="2400">
+                <a:solidFill>
+                  <a:schemeClr val="tx1"/>
+                </a:solidFill>
+                <a:latin typeface="Times New Roman" panose="02020603050405020304" pitchFamily="18" charset="0"/>
+                <a:ea typeface="宋体" panose="02010600030101010101" pitchFamily="2" charset="-122"/>
+              </a:defRPr>
+            </a:lvl2pPr>
+            <a:lvl3pPr marL="1143000" indent="-228600">
+              <a:defRPr kumimoji="1" sz="2400">
+                <a:solidFill>
+                  <a:schemeClr val="tx1"/>
+                </a:solidFill>
+                <a:latin typeface="Times New Roman" panose="02020603050405020304" pitchFamily="18" charset="0"/>
+                <a:ea typeface="宋体" panose="02010600030101010101" pitchFamily="2" charset="-122"/>
+              </a:defRPr>
+            </a:lvl3pPr>
+            <a:lvl4pPr marL="1600200" indent="-228600">
+              <a:defRPr kumimoji="1" sz="2400">
+                <a:solidFill>
+                  <a:schemeClr val="tx1"/>
+                </a:solidFill>
+                <a:latin typeface="Times New Roman" panose="02020603050405020304" pitchFamily="18" charset="0"/>
+                <a:ea typeface="宋体" panose="02010600030101010101" pitchFamily="2" charset="-122"/>
+              </a:defRPr>
+            </a:lvl4pPr>
+            <a:lvl5pPr marL="2057400" indent="-228600">
+              <a:defRPr kumimoji="1" sz="2400">
+                <a:solidFill>
+                  <a:schemeClr val="tx1"/>
+                </a:solidFill>
+                <a:latin typeface="Times New Roman" panose="02020603050405020304" pitchFamily="18" charset="0"/>
+                <a:ea typeface="宋体" panose="02010600030101010101" pitchFamily="2" charset="-122"/>
+              </a:defRPr>
+            </a:lvl5pPr>
+            <a:lvl6pPr marL="2514600" indent="-228600" eaLnBrk="0" fontAlgn="base" hangingPunct="0">
+              <a:spcBef>
+                <a:spcPct val="0"/>
+              </a:spcBef>
+              <a:spcAft>
+                <a:spcPct val="0"/>
+              </a:spcAft>
+              <a:defRPr kumimoji="1" sz="2400">
+                <a:solidFill>
+                  <a:schemeClr val="tx1"/>
+                </a:solidFill>
+                <a:latin typeface="Times New Roman" panose="02020603050405020304" pitchFamily="18" charset="0"/>
+                <a:ea typeface="宋体" panose="02010600030101010101" pitchFamily="2" charset="-122"/>
+              </a:defRPr>
+            </a:lvl6pPr>
+            <a:lvl7pPr marL="2971800" indent="-228600" eaLnBrk="0" fontAlgn="base" hangingPunct="0">
+              <a:spcBef>
+                <a:spcPct val="0"/>
+              </a:spcBef>
+              <a:spcAft>
+                <a:spcPct val="0"/>
+              </a:spcAft>
+              <a:defRPr kumimoji="1" sz="2400">
+                <a:solidFill>
+                  <a:schemeClr val="tx1"/>
+                </a:solidFill>
+                <a:latin typeface="Times New Roman" panose="02020603050405020304" pitchFamily="18" charset="0"/>
+                <a:ea typeface="宋体" panose="02010600030101010101" pitchFamily="2" charset="-122"/>
+              </a:defRPr>
+            </a:lvl7pPr>
+            <a:lvl8pPr marL="3429000" indent="-228600" eaLnBrk="0" fontAlgn="base" hangingPunct="0">
+              <a:spcBef>
+                <a:spcPct val="0"/>
+              </a:spcBef>
+              <a:spcAft>
+                <a:spcPct val="0"/>
+              </a:spcAft>
+              <a:defRPr kumimoji="1" sz="2400">
+                <a:solidFill>
+                  <a:schemeClr val="tx1"/>
+                </a:solidFill>
+                <a:latin typeface="Times New Roman" panose="02020603050405020304" pitchFamily="18" charset="0"/>
+                <a:ea typeface="宋体" panose="02010600030101010101" pitchFamily="2" charset="-122"/>
+              </a:defRPr>
+            </a:lvl8pPr>
+            <a:lvl9pPr marL="3886200" indent="-228600" eaLnBrk="0" fontAlgn="base" hangingPunct="0">
+              <a:spcBef>
+                <a:spcPct val="0"/>
+              </a:spcBef>
+              <a:spcAft>
+                <a:spcPct val="0"/>
+              </a:spcAft>
+              <a:defRPr kumimoji="1" sz="2400">
+                <a:solidFill>
+                  <a:schemeClr val="tx1"/>
+                </a:solidFill>
+                <a:latin typeface="Times New Roman" panose="02020603050405020304" pitchFamily="18" charset="0"/>
+                <a:ea typeface="宋体" panose="02010600030101010101" pitchFamily="2" charset="-122"/>
+              </a:defRPr>
+            </a:lvl9pPr>
+          </a:lstStyle>
+          <a:p>
+            <a:pPr marL="0" marR="0" lvl="0" indent="0" algn="l" defTabSz="914400" rtl="0" eaLnBrk="0" fontAlgn="base" latinLnBrk="0" hangingPunct="0">
+              <a:lnSpc>
+                <a:spcPct val="100000"/>
+              </a:lnSpc>
+              <a:spcBef>
+                <a:spcPct val="0"/>
+              </a:spcBef>
+              <a:spcAft>
+                <a:spcPct val="0"/>
+              </a:spcAft>
+              <a:buClrTx/>
+              <a:buSzTx/>
+              <a:buFontTx/>
+              <a:buNone/>
+              <a:tabLst/>
+              <a:defRPr/>
+            </a:pPr>
+            <a:r>
+              <a:rPr kumimoji="1" lang="zh-CN" altLang="en-US" sz="2600" b="1" i="0" u="none" strike="noStrike" kern="0" cap="none" spc="0" normalizeH="0" baseline="0" noProof="0" dirty="0">
+                <a:ln>
+                  <a:noFill/>
+                </a:ln>
+                <a:solidFill>
+                  <a:schemeClr val="bg1"/>
+                </a:solidFill>
+                <a:effectLst/>
+                <a:uLnTx/>
+                <a:uFillTx/>
+                <a:latin typeface="Times New Roman" panose="02020603050405020304" pitchFamily="18" charset="0"/>
+                <a:ea typeface="华文中宋"/>
+                <a:cs typeface="Times New Roman" panose="02020603050405020304" pitchFamily="18" charset="0"/>
+              </a:rPr>
+              <a:t>实践问题</a:t>
+            </a:r>
+            <a:r>
+              <a:rPr kumimoji="1" lang="en-US" altLang="zh-CN" sz="2600" b="1" i="0" u="none" strike="noStrike" kern="0" cap="none" spc="0" normalizeH="0" baseline="0" noProof="0" dirty="0">
+                <a:ln>
+                  <a:noFill/>
+                </a:ln>
+                <a:solidFill>
+                  <a:schemeClr val="bg1"/>
+                </a:solidFill>
+                <a:effectLst/>
+                <a:uLnTx/>
+                <a:uFillTx/>
+                <a:latin typeface="Times New Roman" panose="02020603050405020304" pitchFamily="18" charset="0"/>
+                <a:ea typeface="华文中宋"/>
+                <a:cs typeface="Times New Roman" panose="02020603050405020304" pitchFamily="18" charset="0"/>
+              </a:rPr>
+              <a:t>:  </a:t>
+            </a:r>
+            <a:r>
+              <a:rPr kumimoji="1" lang="zh-CN" altLang="en-US" sz="2600" b="1" i="0" u="none" strike="noStrike" kern="0" cap="none" spc="0" normalizeH="0" baseline="0" noProof="0" dirty="0">
+                <a:ln>
+                  <a:noFill/>
+                </a:ln>
+                <a:solidFill>
+                  <a:schemeClr val="bg1"/>
+                </a:solidFill>
+                <a:effectLst/>
+                <a:uLnTx/>
+                <a:uFillTx/>
+                <a:latin typeface="Times New Roman" panose="02020603050405020304" pitchFamily="18" charset="0"/>
+                <a:ea typeface="华文中宋"/>
+                <a:cs typeface="Times New Roman" panose="02020603050405020304" pitchFamily="18" charset="0"/>
+              </a:rPr>
+              <a:t>利用克拉默</a:t>
+            </a:r>
+            <a:r>
+              <a:rPr kumimoji="1" lang="en-US" altLang="zh-CN" sz="2600" b="1" i="0" u="none" strike="noStrike" kern="0" cap="none" spc="0" normalizeH="0" baseline="0" noProof="0" dirty="0">
+                <a:ln>
+                  <a:noFill/>
+                </a:ln>
+                <a:solidFill>
+                  <a:schemeClr val="bg1"/>
+                </a:solidFill>
+                <a:effectLst/>
+                <a:uLnTx/>
+                <a:uFillTx/>
+                <a:latin typeface="Times New Roman" panose="02020603050405020304" pitchFamily="18" charset="0"/>
+                <a:ea typeface="华文中宋"/>
+                <a:cs typeface="Times New Roman" panose="02020603050405020304" pitchFamily="18" charset="0"/>
+              </a:rPr>
+              <a:t>(Cramer)</a:t>
+            </a:r>
+            <a:r>
+              <a:rPr kumimoji="1" lang="zh-CN" altLang="en-US" sz="2600" b="1" i="0" u="none" strike="noStrike" kern="0" cap="none" spc="0" normalizeH="0" baseline="0" noProof="0" dirty="0">
+                <a:ln>
+                  <a:noFill/>
+                </a:ln>
+                <a:solidFill>
+                  <a:schemeClr val="bg1"/>
+                </a:solidFill>
+                <a:effectLst/>
+                <a:uLnTx/>
+                <a:uFillTx/>
+                <a:latin typeface="Times New Roman" panose="02020603050405020304" pitchFamily="18" charset="0"/>
+                <a:ea typeface="华文中宋"/>
+                <a:cs typeface="Times New Roman" panose="02020603050405020304" pitchFamily="18" charset="0"/>
+              </a:rPr>
+              <a:t>法则求解线性方程组</a:t>
+            </a:r>
+          </a:p>
+        </p:txBody>
+      </p:sp>
+      <p:graphicFrame>
+        <p:nvGraphicFramePr>
+          <p:cNvPr id="3" name="Object 3">
+            <a:extLst>
+              <a:ext uri="{FF2B5EF4-FFF2-40B4-BE49-F238E27FC236}">
+                <a16:creationId xmlns:a16="http://schemas.microsoft.com/office/drawing/2014/main" id="{38E75C30-2E6F-E141-BF9C-8A912FE73BE4}"/>
+              </a:ext>
+            </a:extLst>
+          </p:cNvPr>
+          <p:cNvGraphicFramePr>
+            <a:graphicFrameLocks noChangeAspect="1"/>
+          </p:cNvGraphicFramePr>
+          <p:nvPr>
+            <p:extLst>
+              <p:ext uri="{D42A27DB-BD31-4B8C-83A1-F6EECF244321}">
+                <p14:modId xmlns:p14="http://schemas.microsoft.com/office/powerpoint/2010/main" val="1187615674"/>
+              </p:ext>
+            </p:extLst>
+          </p:nvPr>
+        </p:nvGraphicFramePr>
+        <p:xfrm>
+          <a:off x="643228" y="3125227"/>
+          <a:ext cx="2395537" cy="1635125"/>
+        </p:xfrm>
+        <a:graphic>
+          <a:graphicData uri="http://schemas.openxmlformats.org/presentationml/2006/ole">
+            <mc:AlternateContent xmlns:mc="http://schemas.openxmlformats.org/markup-compatibility/2006">
+              <mc:Choice xmlns:v="urn:schemas-microsoft-com:vml" Requires="v">
+                <p:oleObj spid="_x0000_s11265" name="Equation" r:id="rId3" imgW="1041120" imgH="711000" progId="Equation.DSMT4">
+                  <p:embed/>
+                </p:oleObj>
+              </mc:Choice>
+              <mc:Fallback>
+                <p:oleObj name="Equation" r:id="rId3" imgW="1041120" imgH="711000" progId="Equation.DSMT4">
+                  <p:embed/>
+                  <p:pic>
+                    <p:nvPicPr>
+                      <p:cNvPr id="37" name="Object 3">
+                        <a:extLst>
+                          <a:ext uri="{FF2B5EF4-FFF2-40B4-BE49-F238E27FC236}">
+                            <a16:creationId xmlns:a16="http://schemas.microsoft.com/office/drawing/2014/main" id="{4DA0BB66-A17B-4FB6-8C07-8EA3E94F20A1}"/>
+                          </a:ext>
+                        </a:extLst>
+                      </p:cNvPr>
+                      <p:cNvPicPr>
+                        <a:picLocks noChangeAspect="1" noChangeArrowheads="1"/>
+                      </p:cNvPicPr>
+                      <p:nvPr/>
+                    </p:nvPicPr>
+                    <p:blipFill>
+                      <a:blip r:embed="rId4"/>
+                      <a:srcRect/>
+                      <a:stretch>
+                        <a:fillRect/>
+                      </a:stretch>
+                    </p:blipFill>
+                    <p:spPr bwMode="auto">
+                      <a:xfrm>
+                        <a:off x="643228" y="3125227"/>
+                        <a:ext cx="2395537" cy="1635125"/>
+                      </a:xfrm>
+                      <a:prstGeom prst="rect">
+                        <a:avLst/>
+                      </a:prstGeom>
+                      <a:noFill/>
+                      <a:extLst>
+                        <a:ext uri="{909E8E84-426E-40DD-AFC4-6F175D3DCCD1}">
+                          <a14:hiddenFill xmlns:a14="http://schemas.microsoft.com/office/drawing/2010/main">
+                            <a:solidFill>
+                              <a:srgbClr val="FFFFFF"/>
+                            </a:solidFill>
+                          </a14:hiddenFill>
+                        </a:ext>
+                      </a:extLst>
+                    </p:spPr>
+                  </p:pic>
+                </p:oleObj>
+              </mc:Fallback>
+            </mc:AlternateContent>
+          </a:graphicData>
+        </a:graphic>
+      </p:graphicFrame>
+      <p:graphicFrame>
+        <p:nvGraphicFramePr>
+          <p:cNvPr id="4" name="Object 7">
+            <a:extLst>
+              <a:ext uri="{FF2B5EF4-FFF2-40B4-BE49-F238E27FC236}">
+                <a16:creationId xmlns:a16="http://schemas.microsoft.com/office/drawing/2014/main" id="{BD19D4B4-701E-A84D-99CA-11A3095DE36B}"/>
+              </a:ext>
+            </a:extLst>
+          </p:cNvPr>
+          <p:cNvGraphicFramePr>
+            <a:graphicFrameLocks noChangeAspect="1"/>
+          </p:cNvGraphicFramePr>
+          <p:nvPr>
+            <p:extLst>
+              <p:ext uri="{D42A27DB-BD31-4B8C-83A1-F6EECF244321}">
+                <p14:modId xmlns:p14="http://schemas.microsoft.com/office/powerpoint/2010/main" val="3856584238"/>
+              </p:ext>
+            </p:extLst>
+          </p:nvPr>
+        </p:nvGraphicFramePr>
+        <p:xfrm>
+          <a:off x="6396999" y="3617431"/>
+          <a:ext cx="1138238" cy="466725"/>
+        </p:xfrm>
+        <a:graphic>
+          <a:graphicData uri="http://schemas.openxmlformats.org/presentationml/2006/ole">
+            <mc:AlternateContent xmlns:mc="http://schemas.openxmlformats.org/markup-compatibility/2006">
+              <mc:Choice xmlns:v="urn:schemas-microsoft-com:vml" Requires="v">
+                <p:oleObj spid="_x0000_s11266" name="Equation" r:id="rId5" imgW="495000" imgH="203040" progId="Equation.DSMT4">
+                  <p:embed/>
+                </p:oleObj>
+              </mc:Choice>
+              <mc:Fallback>
+                <p:oleObj name="Equation" r:id="rId5" imgW="495000" imgH="203040" progId="Equation.DSMT4">
+                  <p:embed/>
+                  <p:pic>
+                    <p:nvPicPr>
+                      <p:cNvPr id="80" name="Object 7">
+                        <a:extLst>
+                          <a:ext uri="{FF2B5EF4-FFF2-40B4-BE49-F238E27FC236}">
+                            <a16:creationId xmlns:a16="http://schemas.microsoft.com/office/drawing/2014/main" id="{A6FBB5D6-367B-4BF6-92E0-030885B463FB}"/>
+                          </a:ext>
+                        </a:extLst>
+                      </p:cNvPr>
+                      <p:cNvPicPr>
+                        <a:picLocks noChangeAspect="1" noChangeArrowheads="1"/>
+                      </p:cNvPicPr>
+                      <p:nvPr/>
+                    </p:nvPicPr>
+                    <p:blipFill>
+                      <a:blip r:embed="rId6"/>
+                      <a:srcRect/>
+                      <a:stretch>
+                        <a:fillRect/>
+                      </a:stretch>
+                    </p:blipFill>
+                    <p:spPr bwMode="auto">
+                      <a:xfrm>
+                        <a:off x="6396999" y="3617431"/>
+                        <a:ext cx="1138238" cy="466725"/>
+                      </a:xfrm>
+                      <a:prstGeom prst="rect">
+                        <a:avLst/>
+                      </a:prstGeom>
+                      <a:noFill/>
+                      <a:extLst>
+                        <a:ext uri="{909E8E84-426E-40DD-AFC4-6F175D3DCCD1}">
+                          <a14:hiddenFill xmlns:a14="http://schemas.microsoft.com/office/drawing/2010/main">
+                            <a:solidFill>
+                              <a:srgbClr val="FFFFFF"/>
+                            </a:solidFill>
+                          </a14:hiddenFill>
+                        </a:ext>
+                      </a:extLst>
+                    </p:spPr>
+                  </p:pic>
+                </p:oleObj>
+              </mc:Fallback>
+            </mc:AlternateContent>
+          </a:graphicData>
+        </a:graphic>
+      </p:graphicFrame>
+      <p:graphicFrame>
+        <p:nvGraphicFramePr>
+          <p:cNvPr id="5" name="Object 4">
+            <a:extLst>
+              <a:ext uri="{FF2B5EF4-FFF2-40B4-BE49-F238E27FC236}">
+                <a16:creationId xmlns:a16="http://schemas.microsoft.com/office/drawing/2014/main" id="{B23DDD33-1C38-4C43-8CB6-4EB77F8EA6B7}"/>
+              </a:ext>
+            </a:extLst>
+          </p:cNvPr>
+          <p:cNvGraphicFramePr>
+            <a:graphicFrameLocks noChangeAspect="1"/>
+          </p:cNvGraphicFramePr>
+          <p:nvPr>
+            <p:extLst>
+              <p:ext uri="{D42A27DB-BD31-4B8C-83A1-F6EECF244321}">
+                <p14:modId xmlns:p14="http://schemas.microsoft.com/office/powerpoint/2010/main" val="3572149232"/>
+              </p:ext>
+            </p:extLst>
+          </p:nvPr>
+        </p:nvGraphicFramePr>
+        <p:xfrm>
+          <a:off x="3031812" y="5028734"/>
+          <a:ext cx="1225755" cy="408586"/>
+        </p:xfrm>
+        <a:graphic>
+          <a:graphicData uri="http://schemas.openxmlformats.org/presentationml/2006/ole">
+            <mc:AlternateContent xmlns:mc="http://schemas.openxmlformats.org/markup-compatibility/2006">
+              <mc:Choice xmlns:v="urn:schemas-microsoft-com:vml" Requires="v">
+                <p:oleObj spid="_x0000_s11267" name="Equation" r:id="rId7" imgW="532937" imgH="177646" progId="Equation.DSMT4">
+                  <p:embed/>
+                </p:oleObj>
+              </mc:Choice>
+              <mc:Fallback>
+                <p:oleObj name="Equation" r:id="rId7" imgW="532937" imgH="177646" progId="Equation.DSMT4">
+                  <p:embed/>
+                  <p:pic>
+                    <p:nvPicPr>
+                      <p:cNvPr id="81" name="Object 4">
+                        <a:extLst>
+                          <a:ext uri="{FF2B5EF4-FFF2-40B4-BE49-F238E27FC236}">
+                            <a16:creationId xmlns:a16="http://schemas.microsoft.com/office/drawing/2014/main" id="{5C0B5950-F379-4254-B29D-6490A4E7EEF0}"/>
+                          </a:ext>
+                        </a:extLst>
+                      </p:cNvPr>
+                      <p:cNvPicPr>
+                        <a:picLocks noChangeAspect="1" noChangeArrowheads="1"/>
+                      </p:cNvPicPr>
+                      <p:nvPr/>
+                    </p:nvPicPr>
+                    <p:blipFill>
+                      <a:blip r:embed="rId8">
+                        <a:extLst>
+                          <a:ext uri="{28A0092B-C50C-407E-A947-70E740481C1C}">
+                            <a14:useLocalDpi xmlns:a14="http://schemas.microsoft.com/office/drawing/2010/main" val="0"/>
+                          </a:ext>
+                        </a:extLst>
+                      </a:blip>
+                      <a:srcRect/>
+                      <a:stretch>
+                        <a:fillRect/>
+                      </a:stretch>
+                    </p:blipFill>
+                    <p:spPr bwMode="auto">
+                      <a:xfrm>
+                        <a:off x="3031812" y="5028734"/>
+                        <a:ext cx="1225755" cy="408586"/>
+                      </a:xfrm>
+                      <a:prstGeom prst="rect">
+                        <a:avLst/>
+                      </a:prstGeom>
+                      <a:noFill/>
+                      <a:extLst>
+                        <a:ext uri="{909E8E84-426E-40DD-AFC4-6F175D3DCCD1}">
+                          <a14:hiddenFill xmlns:a14="http://schemas.microsoft.com/office/drawing/2010/main">
+                            <a:solidFill>
+                              <a:srgbClr val="FFFFFF"/>
+                            </a:solidFill>
+                          </a14:hiddenFill>
+                        </a:ext>
+                      </a:extLst>
+                    </p:spPr>
+                  </p:pic>
+                </p:oleObj>
+              </mc:Fallback>
+            </mc:AlternateContent>
+          </a:graphicData>
+        </a:graphic>
+      </p:graphicFrame>
+      <p:sp>
+        <p:nvSpPr>
+          <p:cNvPr id="6" name="文本框 23">
+            <a:extLst>
+              <a:ext uri="{FF2B5EF4-FFF2-40B4-BE49-F238E27FC236}">
+                <a16:creationId xmlns:a16="http://schemas.microsoft.com/office/drawing/2014/main" id="{D7F3B864-FFB1-1448-8AD2-2331F0247ADA}"/>
+              </a:ext>
+            </a:extLst>
+          </p:cNvPr>
+          <p:cNvSpPr txBox="1"/>
+          <p:nvPr/>
+        </p:nvSpPr>
+        <p:spPr>
+          <a:xfrm>
+            <a:off x="272241" y="1397414"/>
+            <a:ext cx="718145" cy="578235"/>
+          </a:xfrm>
+          <a:prstGeom prst="rect">
+            <a:avLst/>
+          </a:prstGeom>
+          <a:noFill/>
+        </p:spPr>
+        <p:txBody>
+          <a:bodyPr wrap="none" lIns="0" tIns="0" rIns="0" bIns="0" rtlCol="0">
+            <a:spAutoFit/>
+          </a:bodyPr>
+          <a:lstStyle/>
+          <a:p>
+            <a:pPr>
+              <a:lnSpc>
+                <a:spcPct val="150000"/>
+              </a:lnSpc>
+            </a:pPr>
+            <a:r>
+              <a:rPr lang="zh-CN" altLang="en-US" sz="2800" dirty="0">
+                <a:cs typeface="+mn-ea"/>
+                <a:sym typeface="+mn-lt"/>
+              </a:rPr>
+              <a:t>📚</a:t>
+            </a:r>
+            <a:r>
+              <a:rPr lang="zh-CN" altLang="en-US" sz="2800" dirty="0">
+                <a:highlight>
+                  <a:srgbClr val="FFC000"/>
+                </a:highlight>
+                <a:cs typeface="+mn-ea"/>
+                <a:sym typeface="+mn-lt"/>
+              </a:rPr>
+              <a:t>例</a:t>
+            </a:r>
+          </a:p>
+        </p:txBody>
+      </p:sp>
+      <p:sp>
+        <p:nvSpPr>
+          <p:cNvPr id="7" name="Rectangle 46">
+            <a:extLst>
+              <a:ext uri="{FF2B5EF4-FFF2-40B4-BE49-F238E27FC236}">
+                <a16:creationId xmlns:a16="http://schemas.microsoft.com/office/drawing/2014/main" id="{5777D5FE-AFCA-8045-98E1-C66BBB3978C2}"/>
+              </a:ext>
+            </a:extLst>
+          </p:cNvPr>
+          <p:cNvSpPr>
+            <a:spLocks noChangeArrowheads="1"/>
+          </p:cNvSpPr>
+          <p:nvPr/>
+        </p:nvSpPr>
+        <p:spPr bwMode="auto">
+          <a:xfrm>
+            <a:off x="272242" y="3538507"/>
+            <a:ext cx="359073" cy="564514"/>
+          </a:xfrm>
+          <a:prstGeom prst="rect">
+            <a:avLst/>
+          </a:prstGeom>
+          <a:noFill/>
+          <a:ln w="9525">
+            <a:noFill/>
+            <a:miter lim="800000"/>
+            <a:headEnd/>
+            <a:tailEnd/>
+          </a:ln>
+          <a:effectLst/>
+        </p:spPr>
+        <p:txBody>
+          <a:bodyPr wrap="none" lIns="0" tIns="0" rIns="0" bIns="0" anchor="t" anchorCtr="0">
+            <a:spAutoFit/>
+          </a:bodyPr>
+          <a:lstStyle/>
+          <a:p>
+            <a:pPr>
+              <a:lnSpc>
+                <a:spcPct val="150000"/>
+              </a:lnSpc>
+            </a:pPr>
+            <a:r>
+              <a:rPr kumimoji="1" lang="zh-CN" altLang="en-US" sz="2800" dirty="0">
+                <a:highlight>
+                  <a:srgbClr val="FFC000"/>
+                </a:highlight>
+                <a:cs typeface="+mn-ea"/>
+                <a:sym typeface="+mn-lt"/>
+              </a:rPr>
+              <a:t>解</a:t>
+            </a:r>
+            <a:endParaRPr kumimoji="1" lang="en-US" altLang="zh-CN" sz="2800" dirty="0">
+              <a:solidFill>
+                <a:srgbClr val="FFC000"/>
+              </a:solidFill>
+              <a:highlight>
+                <a:srgbClr val="FFC000"/>
+              </a:highlight>
+              <a:cs typeface="+mn-ea"/>
+              <a:sym typeface="+mn-lt"/>
+            </a:endParaRPr>
+          </a:p>
+        </p:txBody>
+      </p:sp>
+      <p:grpSp>
+        <p:nvGrpSpPr>
+          <p:cNvPr id="8" name="组合 2">
+            <a:extLst>
+              <a:ext uri="{FF2B5EF4-FFF2-40B4-BE49-F238E27FC236}">
+                <a16:creationId xmlns:a16="http://schemas.microsoft.com/office/drawing/2014/main" id="{D7EC6196-8772-D847-811D-FEEB1491CA0E}"/>
+              </a:ext>
+            </a:extLst>
+          </p:cNvPr>
+          <p:cNvGrpSpPr/>
+          <p:nvPr/>
+        </p:nvGrpSpPr>
+        <p:grpSpPr>
+          <a:xfrm>
+            <a:off x="1508383" y="927811"/>
+            <a:ext cx="6793985" cy="1635300"/>
+            <a:chOff x="2778586" y="946358"/>
+            <a:chExt cx="6793985" cy="1635300"/>
+          </a:xfrm>
+        </p:grpSpPr>
+        <p:graphicFrame>
+          <p:nvGraphicFramePr>
+            <p:cNvPr id="9" name="Object 9">
+              <a:extLst>
+                <a:ext uri="{FF2B5EF4-FFF2-40B4-BE49-F238E27FC236}">
+                  <a16:creationId xmlns:a16="http://schemas.microsoft.com/office/drawing/2014/main" id="{AC9BE899-1A60-9249-9900-F04714FECF7A}"/>
+                </a:ext>
+              </a:extLst>
+            </p:cNvPr>
+            <p:cNvGraphicFramePr>
+              <a:graphicFrameLocks noChangeAspect="1"/>
+            </p:cNvGraphicFramePr>
+            <p:nvPr>
+              <p:extLst>
+                <p:ext uri="{D42A27DB-BD31-4B8C-83A1-F6EECF244321}">
+                  <p14:modId xmlns:p14="http://schemas.microsoft.com/office/powerpoint/2010/main" val="4227730807"/>
+                </p:ext>
+              </p:extLst>
+            </p:nvPr>
+          </p:nvGraphicFramePr>
+          <p:xfrm>
+            <a:off x="5677956" y="946358"/>
+            <a:ext cx="2365596" cy="1635300"/>
+          </p:xfrm>
+          <a:graphic>
+            <a:graphicData uri="http://schemas.openxmlformats.org/presentationml/2006/ole">
+              <mc:AlternateContent xmlns:mc="http://schemas.openxmlformats.org/markup-compatibility/2006">
+                <mc:Choice xmlns:v="urn:schemas-microsoft-com:vml" Requires="v">
+                  <p:oleObj spid="_x0000_s11268" name="Equation" r:id="rId9" imgW="1028520" imgH="711000" progId="Equation.DSMT4">
+                    <p:embed/>
+                  </p:oleObj>
+                </mc:Choice>
+                <mc:Fallback>
+                  <p:oleObj name="Equation" r:id="rId9" imgW="1028520" imgH="711000" progId="Equation.DSMT4">
+                    <p:embed/>
+                    <p:pic>
+                      <p:nvPicPr>
+                        <p:cNvPr id="36" name="Object 9">
+                          <a:extLst>
+                            <a:ext uri="{FF2B5EF4-FFF2-40B4-BE49-F238E27FC236}">
+                              <a16:creationId xmlns:a16="http://schemas.microsoft.com/office/drawing/2014/main" id="{CD2B00C9-C50B-4BAC-8634-2F3863F2668B}"/>
+                            </a:ext>
+                          </a:extLst>
+                        </p:cNvPr>
+                        <p:cNvPicPr>
+                          <a:picLocks noChangeAspect="1" noChangeArrowheads="1"/>
+                        </p:cNvPicPr>
+                        <p:nvPr/>
+                      </p:nvPicPr>
+                      <p:blipFill>
+                        <a:blip r:embed="rId10"/>
+                        <a:srcRect/>
+                        <a:stretch>
+                          <a:fillRect/>
+                        </a:stretch>
+                      </p:blipFill>
+                      <p:spPr bwMode="auto">
+                        <a:xfrm>
+                          <a:off x="5677956" y="946358"/>
+                          <a:ext cx="2365596" cy="1635300"/>
+                        </a:xfrm>
+                        <a:prstGeom prst="rect">
+                          <a:avLst/>
+                        </a:prstGeom>
+                        <a:noFill/>
+                        <a:extLst>
+                          <a:ext uri="{909E8E84-426E-40DD-AFC4-6F175D3DCCD1}">
+                            <a14:hiddenFill xmlns:a14="http://schemas.microsoft.com/office/drawing/2010/main">
+                              <a:solidFill>
+                                <a:srgbClr val="FFFFFF"/>
+                              </a:solidFill>
+                            </a14:hiddenFill>
+                          </a:ext>
+                        </a:extLst>
+                      </p:spPr>
+                    </p:pic>
+                  </p:oleObj>
+                </mc:Fallback>
+              </mc:AlternateContent>
+            </a:graphicData>
+          </a:graphic>
+        </p:graphicFrame>
+        <p:sp>
+          <p:nvSpPr>
+            <p:cNvPr id="10" name="文本框 26">
+              <a:extLst>
+                <a:ext uri="{FF2B5EF4-FFF2-40B4-BE49-F238E27FC236}">
+                  <a16:creationId xmlns:a16="http://schemas.microsoft.com/office/drawing/2014/main" id="{413EB03B-F906-BB4C-9D5D-0FE46F90AA0F}"/>
+                </a:ext>
+              </a:extLst>
+            </p:cNvPr>
+            <p:cNvSpPr txBox="1"/>
+            <p:nvPr/>
+          </p:nvSpPr>
+          <p:spPr>
+            <a:xfrm>
+              <a:off x="2778586" y="1491960"/>
+              <a:ext cx="3317414" cy="523220"/>
+            </a:xfrm>
+            <a:prstGeom prst="rect">
+              <a:avLst/>
+            </a:prstGeom>
+            <a:noFill/>
+          </p:spPr>
+          <p:txBody>
+            <a:bodyPr wrap="square">
+              <a:spAutoFit/>
+            </a:bodyPr>
+            <a:lstStyle/>
+            <a:p>
+              <a:r>
+                <a:rPr lang="el-GR" altLang="zh-CN" sz="2800" i="1" dirty="0">
+                  <a:latin typeface="+mj-lt"/>
+                </a:rPr>
+                <a:t>λ</a:t>
+              </a:r>
+              <a:r>
+                <a:rPr lang="zh-CN" altLang="en-US" sz="2800" dirty="0"/>
+                <a:t>为何值时</a:t>
+              </a:r>
+              <a:r>
+                <a:rPr lang="en-US" altLang="zh-CN" sz="2800" dirty="0"/>
+                <a:t>,  </a:t>
+              </a:r>
+              <a:r>
+                <a:rPr lang="zh-CN" altLang="en-US" sz="2800" dirty="0"/>
+                <a:t>方程组</a:t>
+              </a:r>
+            </a:p>
+          </p:txBody>
+        </p:sp>
+        <p:sp>
+          <p:nvSpPr>
+            <p:cNvPr id="11" name="文本框 27">
+              <a:extLst>
+                <a:ext uri="{FF2B5EF4-FFF2-40B4-BE49-F238E27FC236}">
+                  <a16:creationId xmlns:a16="http://schemas.microsoft.com/office/drawing/2014/main" id="{C421838B-FB66-E04B-89A2-1B9D5DBB6E63}"/>
+                </a:ext>
+              </a:extLst>
+            </p:cNvPr>
+            <p:cNvSpPr txBox="1"/>
+            <p:nvPr/>
+          </p:nvSpPr>
+          <p:spPr>
+            <a:xfrm>
+              <a:off x="7920999" y="1473148"/>
+              <a:ext cx="1651572" cy="523220"/>
+            </a:xfrm>
+            <a:prstGeom prst="rect">
+              <a:avLst/>
+            </a:prstGeom>
+            <a:noFill/>
+          </p:spPr>
+          <p:txBody>
+            <a:bodyPr wrap="square">
+              <a:spAutoFit/>
+            </a:bodyPr>
+            <a:lstStyle/>
+            <a:p>
+              <a:r>
+                <a:rPr lang="zh-CN" altLang="en-US" sz="2800" dirty="0"/>
+                <a:t>有非零解？</a:t>
+              </a:r>
+            </a:p>
+          </p:txBody>
+        </p:sp>
+      </p:grpSp>
+      <p:sp>
+        <p:nvSpPr>
+          <p:cNvPr id="12" name="文本框 30">
+            <a:extLst>
+              <a:ext uri="{FF2B5EF4-FFF2-40B4-BE49-F238E27FC236}">
+                <a16:creationId xmlns:a16="http://schemas.microsoft.com/office/drawing/2014/main" id="{30B3A44D-4938-4844-A23D-D124EA0026CE}"/>
+              </a:ext>
+            </a:extLst>
+          </p:cNvPr>
+          <p:cNvSpPr txBox="1"/>
+          <p:nvPr/>
+        </p:nvSpPr>
+        <p:spPr>
+          <a:xfrm>
+            <a:off x="170329" y="5705703"/>
+            <a:ext cx="4735046" cy="523220"/>
+          </a:xfrm>
+          <a:prstGeom prst="rect">
+            <a:avLst/>
+          </a:prstGeom>
+          <a:noFill/>
+        </p:spPr>
+        <p:txBody>
+          <a:bodyPr wrap="square">
+            <a:spAutoFit/>
+          </a:bodyPr>
+          <a:lstStyle/>
+          <a:p>
+            <a:r>
+              <a:rPr lang="zh-CN" altLang="en-US" sz="2800" dirty="0">
+                <a:latin typeface="+mj-lt"/>
+              </a:rPr>
+              <a:t>故当</a:t>
+            </a:r>
+            <a:r>
+              <a:rPr lang="el-GR" altLang="zh-CN" sz="2800" i="1" dirty="0">
+                <a:latin typeface="+mj-lt"/>
+              </a:rPr>
+              <a:t>λ</a:t>
+            </a:r>
+            <a:r>
+              <a:rPr lang="en-US" altLang="zh-CN" sz="2800" dirty="0">
+                <a:latin typeface="+mj-lt"/>
+              </a:rPr>
+              <a:t>=1</a:t>
+            </a:r>
+            <a:r>
+              <a:rPr lang="zh-CN" altLang="en-US" sz="2800" dirty="0"/>
+              <a:t>时</a:t>
+            </a:r>
+            <a:r>
+              <a:rPr lang="en-US" altLang="zh-CN" sz="2800" dirty="0"/>
+              <a:t>,  </a:t>
+            </a:r>
+            <a:r>
+              <a:rPr lang="zh-CN" altLang="en-US" sz="2800" dirty="0"/>
+              <a:t>方程组有非零解</a:t>
+            </a:r>
+            <a:r>
+              <a:rPr lang="en-US" altLang="zh-CN" sz="2800" dirty="0"/>
+              <a:t>.</a:t>
+            </a:r>
+            <a:endParaRPr lang="zh-CN" altLang="en-US" sz="2800" dirty="0"/>
+          </a:p>
+        </p:txBody>
+      </p:sp>
+      <p:graphicFrame>
+        <p:nvGraphicFramePr>
+          <p:cNvPr id="13" name="Object 7">
+            <a:extLst>
+              <a:ext uri="{FF2B5EF4-FFF2-40B4-BE49-F238E27FC236}">
+                <a16:creationId xmlns:a16="http://schemas.microsoft.com/office/drawing/2014/main" id="{1DEC556B-D292-B849-B298-62069BD0FA54}"/>
+              </a:ext>
+            </a:extLst>
+          </p:cNvPr>
+          <p:cNvGraphicFramePr>
+            <a:graphicFrameLocks noChangeAspect="1"/>
+          </p:cNvGraphicFramePr>
+          <p:nvPr>
+            <p:extLst>
+              <p:ext uri="{D42A27DB-BD31-4B8C-83A1-F6EECF244321}">
+                <p14:modId xmlns:p14="http://schemas.microsoft.com/office/powerpoint/2010/main" val="1364559855"/>
+              </p:ext>
+            </p:extLst>
+          </p:nvPr>
+        </p:nvGraphicFramePr>
+        <p:xfrm>
+          <a:off x="7535238" y="3695034"/>
+          <a:ext cx="554037" cy="407987"/>
+        </p:xfrm>
+        <a:graphic>
+          <a:graphicData uri="http://schemas.openxmlformats.org/presentationml/2006/ole">
+            <mc:AlternateContent xmlns:mc="http://schemas.openxmlformats.org/markup-compatibility/2006">
+              <mc:Choice xmlns:v="urn:schemas-microsoft-com:vml" Requires="v">
+                <p:oleObj spid="_x0000_s11269" name="Equation" r:id="rId11" imgW="241200" imgH="177480" progId="Equation.DSMT4">
+                  <p:embed/>
+                </p:oleObj>
+              </mc:Choice>
+              <mc:Fallback>
+                <p:oleObj name="Equation" r:id="rId11" imgW="241200" imgH="177480" progId="Equation.DSMT4">
+                  <p:embed/>
+                  <p:pic>
+                    <p:nvPicPr>
+                      <p:cNvPr id="32" name="Object 7">
+                        <a:extLst>
+                          <a:ext uri="{FF2B5EF4-FFF2-40B4-BE49-F238E27FC236}">
+                            <a16:creationId xmlns:a16="http://schemas.microsoft.com/office/drawing/2014/main" id="{CC073ACD-9DB2-4437-8F28-10D97C7CEA18}"/>
+                          </a:ext>
+                        </a:extLst>
+                      </p:cNvPr>
+                      <p:cNvPicPr>
+                        <a:picLocks noChangeAspect="1" noChangeArrowheads="1"/>
+                      </p:cNvPicPr>
+                      <p:nvPr/>
+                    </p:nvPicPr>
+                    <p:blipFill>
+                      <a:blip r:embed="rId12"/>
+                      <a:srcRect/>
+                      <a:stretch>
+                        <a:fillRect/>
+                      </a:stretch>
+                    </p:blipFill>
+                    <p:spPr bwMode="auto">
+                      <a:xfrm>
+                        <a:off x="7535238" y="3695034"/>
+                        <a:ext cx="554037" cy="407987"/>
+                      </a:xfrm>
+                      <a:prstGeom prst="rect">
+                        <a:avLst/>
+                      </a:prstGeom>
+                      <a:noFill/>
+                      <a:extLst>
+                        <a:ext uri="{909E8E84-426E-40DD-AFC4-6F175D3DCCD1}">
+                          <a14:hiddenFill xmlns:a14="http://schemas.microsoft.com/office/drawing/2010/main">
+                            <a:solidFill>
+                              <a:srgbClr val="FFFFFF"/>
+                            </a:solidFill>
+                          </a14:hiddenFill>
+                        </a:ext>
+                      </a:extLst>
+                    </p:spPr>
+                  </p:pic>
+                </p:oleObj>
+              </mc:Fallback>
+            </mc:AlternateContent>
+          </a:graphicData>
+        </a:graphic>
+      </p:graphicFrame>
+      <p:graphicFrame>
+        <p:nvGraphicFramePr>
+          <p:cNvPr id="14" name="Object 3">
+            <a:extLst>
+              <a:ext uri="{FF2B5EF4-FFF2-40B4-BE49-F238E27FC236}">
+                <a16:creationId xmlns:a16="http://schemas.microsoft.com/office/drawing/2014/main" id="{78694168-C60C-6241-8FF3-04B201254029}"/>
+              </a:ext>
+            </a:extLst>
+          </p:cNvPr>
+          <p:cNvGraphicFramePr>
+            <a:graphicFrameLocks noChangeAspect="1"/>
+          </p:cNvGraphicFramePr>
+          <p:nvPr>
+            <p:extLst>
+              <p:ext uri="{D42A27DB-BD31-4B8C-83A1-F6EECF244321}">
+                <p14:modId xmlns:p14="http://schemas.microsoft.com/office/powerpoint/2010/main" val="255712660"/>
+              </p:ext>
+            </p:extLst>
+          </p:nvPr>
+        </p:nvGraphicFramePr>
+        <p:xfrm>
+          <a:off x="3007687" y="3636296"/>
+          <a:ext cx="3389313" cy="466725"/>
+        </p:xfrm>
+        <a:graphic>
+          <a:graphicData uri="http://schemas.openxmlformats.org/presentationml/2006/ole">
+            <mc:AlternateContent xmlns:mc="http://schemas.openxmlformats.org/markup-compatibility/2006">
+              <mc:Choice xmlns:v="urn:schemas-microsoft-com:vml" Requires="v">
+                <p:oleObj spid="_x0000_s11270" name="Equation" r:id="rId13" imgW="1473120" imgH="203040" progId="Equation.DSMT4">
+                  <p:embed/>
+                </p:oleObj>
+              </mc:Choice>
+              <mc:Fallback>
+                <p:oleObj name="Equation" r:id="rId13" imgW="1473120" imgH="203040" progId="Equation.DSMT4">
+                  <p:embed/>
+                  <p:pic>
+                    <p:nvPicPr>
+                      <p:cNvPr id="35" name="Object 3">
+                        <a:extLst>
+                          <a:ext uri="{FF2B5EF4-FFF2-40B4-BE49-F238E27FC236}">
+                            <a16:creationId xmlns:a16="http://schemas.microsoft.com/office/drawing/2014/main" id="{0132A178-075B-4CAD-B45F-E1B26EBCD0F9}"/>
+                          </a:ext>
+                        </a:extLst>
+                      </p:cNvPr>
+                      <p:cNvPicPr>
+                        <a:picLocks noChangeAspect="1" noChangeArrowheads="1"/>
+                      </p:cNvPicPr>
+                      <p:nvPr/>
+                    </p:nvPicPr>
+                    <p:blipFill>
+                      <a:blip r:embed="rId14"/>
+                      <a:srcRect/>
+                      <a:stretch>
+                        <a:fillRect/>
+                      </a:stretch>
+                    </p:blipFill>
+                    <p:spPr bwMode="auto">
+                      <a:xfrm>
+                        <a:off x="3007687" y="3636296"/>
+                        <a:ext cx="3389313" cy="466725"/>
+                      </a:xfrm>
+                      <a:prstGeom prst="rect">
+                        <a:avLst/>
+                      </a:prstGeom>
+                      <a:noFill/>
+                      <a:extLst>
+                        <a:ext uri="{909E8E84-426E-40DD-AFC4-6F175D3DCCD1}">
+                          <a14:hiddenFill xmlns:a14="http://schemas.microsoft.com/office/drawing/2010/main">
+                            <a:solidFill>
+                              <a:srgbClr val="FFFFFF"/>
+                            </a:solidFill>
+                          </a14:hiddenFill>
+                        </a:ext>
+                      </a:extLst>
+                    </p:spPr>
+                  </p:pic>
+                </p:oleObj>
+              </mc:Fallback>
+            </mc:AlternateContent>
+          </a:graphicData>
+        </a:graphic>
+      </p:graphicFrame>
+    </p:spTree>
+    <p:extLst>
+      <p:ext uri="{BB962C8B-B14F-4D97-AF65-F5344CB8AC3E}">
+        <p14:creationId xmlns:p14="http://schemas.microsoft.com/office/powerpoint/2010/main" val="1047748058"/>
+      </p:ext>
+    </p:extLst>
+  </p:cSld>
+  <p:clrMapOvr>
+    <a:masterClrMapping/>
+  </p:clrMapOvr>
+  <p:transition spd="slow">
+    <p:split orient="vert"/>
+  </p:transition>
+  <p:timing>
+    <p:tnLst>
+      <p:par>
+        <p:cTn id="1" dur="indefinite" restart="never" nodeType="tmRoot">
+          <p:childTnLst>
+            <p:seq concurrent="1" nextAc="seek">
+              <p:cTn id="2" dur="indefinite" nodeType="mainSeq">
+                <p:childTnLst>
+                  <p:par>
+                    <p:cTn id="3" fill="hold">
+                      <p:stCondLst>
+                        <p:cond delay="indefinite"/>
+                      </p:stCondLst>
+                      <p:childTnLst>
+                        <p:par>
+                          <p:cTn id="4" fill="hold">
+                            <p:stCondLst>
+                              <p:cond delay="0"/>
+                            </p:stCondLst>
+                            <p:childTnLst>
+                              <p:par>
+                                <p:cTn id="5" presetID="22" presetClass="entr" presetSubtype="8" fill="hold" grpId="0" nodeType="clickEffect">
+                                  <p:stCondLst>
+                                    <p:cond delay="0"/>
+                                  </p:stCondLst>
+                                  <p:childTnLst>
+                                    <p:set>
+                                      <p:cBhvr>
+                                        <p:cTn id="6" dur="1" fill="hold">
+                                          <p:stCondLst>
+                                            <p:cond delay="0"/>
+                                          </p:stCondLst>
+                                        </p:cTn>
+                                        <p:tgtEl>
+                                          <p:spTgt spid="6"/>
+                                        </p:tgtEl>
+                                        <p:attrNameLst>
+                                          <p:attrName>style.visibility</p:attrName>
+                                        </p:attrNameLst>
+                                      </p:cBhvr>
+                                      <p:to>
+                                        <p:strVal val="visible"/>
+                                      </p:to>
+                                    </p:set>
+                                    <p:animEffect transition="in" filter="wipe(left)">
+                                      <p:cBhvr>
+                                        <p:cTn id="7" dur="500"/>
+                                        <p:tgtEl>
+                                          <p:spTgt spid="6"/>
+                                        </p:tgtEl>
+                                      </p:cBhvr>
+                                    </p:animEffect>
+                                  </p:childTnLst>
+                                </p:cTn>
+                              </p:par>
+                            </p:childTnLst>
+                          </p:cTn>
+                        </p:par>
+                        <p:par>
+                          <p:cTn id="8" fill="hold">
+                            <p:stCondLst>
+                              <p:cond delay="500"/>
+                            </p:stCondLst>
+                            <p:childTnLst>
+                              <p:par>
+                                <p:cTn id="9" presetID="22" presetClass="entr" presetSubtype="8" fill="hold" nodeType="afterEffect">
+                                  <p:stCondLst>
+                                    <p:cond delay="0"/>
+                                  </p:stCondLst>
+                                  <p:childTnLst>
+                                    <p:set>
+                                      <p:cBhvr>
+                                        <p:cTn id="10" dur="1" fill="hold">
+                                          <p:stCondLst>
+                                            <p:cond delay="0"/>
+                                          </p:stCondLst>
+                                        </p:cTn>
+                                        <p:tgtEl>
+                                          <p:spTgt spid="8"/>
+                                        </p:tgtEl>
+                                        <p:attrNameLst>
+                                          <p:attrName>style.visibility</p:attrName>
+                                        </p:attrNameLst>
+                                      </p:cBhvr>
+                                      <p:to>
+                                        <p:strVal val="visible"/>
+                                      </p:to>
+                                    </p:set>
+                                    <p:animEffect transition="in" filter="wipe(left)">
+                                      <p:cBhvr>
+                                        <p:cTn id="11" dur="500"/>
+                                        <p:tgtEl>
+                                          <p:spTgt spid="8"/>
+                                        </p:tgtEl>
+                                      </p:cBhvr>
+                                    </p:animEffect>
+                                  </p:childTnLst>
+                                </p:cTn>
+                              </p:par>
+                            </p:childTnLst>
+                          </p:cTn>
+                        </p:par>
+                      </p:childTnLst>
+                    </p:cTn>
+                  </p:par>
+                  <p:par>
+                    <p:cTn id="12" fill="hold">
+                      <p:stCondLst>
+                        <p:cond delay="indefinite"/>
+                      </p:stCondLst>
+                      <p:childTnLst>
+                        <p:par>
+                          <p:cTn id="13" fill="hold">
+                            <p:stCondLst>
+                              <p:cond delay="0"/>
+                            </p:stCondLst>
+                            <p:childTnLst>
+                              <p:par>
+                                <p:cTn id="14" presetID="22" presetClass="entr" presetSubtype="8" fill="hold" grpId="0" nodeType="clickEffect">
+                                  <p:stCondLst>
+                                    <p:cond delay="0"/>
+                                  </p:stCondLst>
+                                  <p:childTnLst>
+                                    <p:set>
+                                      <p:cBhvr>
+                                        <p:cTn id="15" dur="1" fill="hold">
+                                          <p:stCondLst>
+                                            <p:cond delay="0"/>
+                                          </p:stCondLst>
+                                        </p:cTn>
+                                        <p:tgtEl>
+                                          <p:spTgt spid="7"/>
+                                        </p:tgtEl>
+                                        <p:attrNameLst>
+                                          <p:attrName>style.visibility</p:attrName>
+                                        </p:attrNameLst>
+                                      </p:cBhvr>
+                                      <p:to>
+                                        <p:strVal val="visible"/>
+                                      </p:to>
+                                    </p:set>
+                                    <p:animEffect transition="in" filter="wipe(left)">
+                                      <p:cBhvr>
+                                        <p:cTn id="16" dur="500"/>
+                                        <p:tgtEl>
+                                          <p:spTgt spid="7"/>
+                                        </p:tgtEl>
+                                      </p:cBhvr>
+                                    </p:animEffect>
+                                  </p:childTnLst>
+                                </p:cTn>
+                              </p:par>
+                            </p:childTnLst>
+                          </p:cTn>
+                        </p:par>
+                        <p:par>
+                          <p:cTn id="17" fill="hold">
+                            <p:stCondLst>
+                              <p:cond delay="500"/>
+                            </p:stCondLst>
+                            <p:childTnLst>
+                              <p:par>
+                                <p:cTn id="18" presetID="22" presetClass="entr" presetSubtype="8" fill="hold" nodeType="afterEffect">
+                                  <p:stCondLst>
+                                    <p:cond delay="0"/>
+                                  </p:stCondLst>
+                                  <p:childTnLst>
+                                    <p:set>
+                                      <p:cBhvr>
+                                        <p:cTn id="19" dur="1" fill="hold">
+                                          <p:stCondLst>
+                                            <p:cond delay="0"/>
+                                          </p:stCondLst>
+                                        </p:cTn>
+                                        <p:tgtEl>
+                                          <p:spTgt spid="3"/>
+                                        </p:tgtEl>
+                                        <p:attrNameLst>
+                                          <p:attrName>style.visibility</p:attrName>
+                                        </p:attrNameLst>
+                                      </p:cBhvr>
+                                      <p:to>
+                                        <p:strVal val="visible"/>
+                                      </p:to>
+                                    </p:set>
+                                    <p:animEffect transition="in" filter="wipe(left)">
+                                      <p:cBhvr>
+                                        <p:cTn id="20" dur="500"/>
+                                        <p:tgtEl>
+                                          <p:spTgt spid="3"/>
+                                        </p:tgtEl>
+                                      </p:cBhvr>
+                                    </p:animEffect>
+                                  </p:childTnLst>
+                                </p:cTn>
+                              </p:par>
+                            </p:childTnLst>
+                          </p:cTn>
+                        </p:par>
+                      </p:childTnLst>
+                    </p:cTn>
+                  </p:par>
+                  <p:par>
+                    <p:cTn id="21" fill="hold">
+                      <p:stCondLst>
+                        <p:cond delay="indefinite"/>
+                      </p:stCondLst>
+                      <p:childTnLst>
+                        <p:par>
+                          <p:cTn id="22" fill="hold">
+                            <p:stCondLst>
+                              <p:cond delay="0"/>
+                            </p:stCondLst>
+                            <p:childTnLst>
+                              <p:par>
+                                <p:cTn id="23" presetID="22" presetClass="entr" presetSubtype="8" fill="hold" nodeType="clickEffect">
+                                  <p:stCondLst>
+                                    <p:cond delay="0"/>
+                                  </p:stCondLst>
+                                  <p:childTnLst>
+                                    <p:set>
+                                      <p:cBhvr>
+                                        <p:cTn id="24" dur="1" fill="hold">
+                                          <p:stCondLst>
+                                            <p:cond delay="0"/>
+                                          </p:stCondLst>
+                                        </p:cTn>
+                                        <p:tgtEl>
+                                          <p:spTgt spid="14"/>
+                                        </p:tgtEl>
+                                        <p:attrNameLst>
+                                          <p:attrName>style.visibility</p:attrName>
+                                        </p:attrNameLst>
+                                      </p:cBhvr>
+                                      <p:to>
+                                        <p:strVal val="visible"/>
+                                      </p:to>
+                                    </p:set>
+                                    <p:animEffect transition="in" filter="wipe(left)">
+                                      <p:cBhvr>
+                                        <p:cTn id="25" dur="500"/>
+                                        <p:tgtEl>
+                                          <p:spTgt spid="14"/>
+                                        </p:tgtEl>
+                                      </p:cBhvr>
+                                    </p:animEffect>
+                                  </p:childTnLst>
+                                </p:cTn>
+                              </p:par>
+                            </p:childTnLst>
+                          </p:cTn>
+                        </p:par>
+                      </p:childTnLst>
+                    </p:cTn>
+                  </p:par>
+                  <p:par>
+                    <p:cTn id="26" fill="hold">
+                      <p:stCondLst>
+                        <p:cond delay="indefinite"/>
+                      </p:stCondLst>
+                      <p:childTnLst>
+                        <p:par>
+                          <p:cTn id="27" fill="hold">
+                            <p:stCondLst>
+                              <p:cond delay="0"/>
+                            </p:stCondLst>
+                            <p:childTnLst>
+                              <p:par>
+                                <p:cTn id="28" presetID="22" presetClass="entr" presetSubtype="8" fill="hold" nodeType="clickEffect">
+                                  <p:stCondLst>
+                                    <p:cond delay="0"/>
+                                  </p:stCondLst>
+                                  <p:childTnLst>
+                                    <p:set>
+                                      <p:cBhvr>
+                                        <p:cTn id="29" dur="1" fill="hold">
+                                          <p:stCondLst>
+                                            <p:cond delay="0"/>
+                                          </p:stCondLst>
+                                        </p:cTn>
+                                        <p:tgtEl>
+                                          <p:spTgt spid="4"/>
+                                        </p:tgtEl>
+                                        <p:attrNameLst>
+                                          <p:attrName>style.visibility</p:attrName>
+                                        </p:attrNameLst>
+                                      </p:cBhvr>
+                                      <p:to>
+                                        <p:strVal val="visible"/>
+                                      </p:to>
+                                    </p:set>
+                                    <p:animEffect transition="in" filter="wipe(left)">
+                                      <p:cBhvr>
+                                        <p:cTn id="30" dur="500"/>
+                                        <p:tgtEl>
+                                          <p:spTgt spid="4"/>
+                                        </p:tgtEl>
+                                      </p:cBhvr>
+                                    </p:animEffect>
+                                  </p:childTnLst>
+                                </p:cTn>
+                              </p:par>
+                            </p:childTnLst>
+                          </p:cTn>
+                        </p:par>
+                      </p:childTnLst>
+                    </p:cTn>
+                  </p:par>
+                  <p:par>
+                    <p:cTn id="31" fill="hold">
+                      <p:stCondLst>
+                        <p:cond delay="indefinite"/>
+                      </p:stCondLst>
+                      <p:childTnLst>
+                        <p:par>
+                          <p:cTn id="32" fill="hold">
+                            <p:stCondLst>
+                              <p:cond delay="0"/>
+                            </p:stCondLst>
+                            <p:childTnLst>
+                              <p:par>
+                                <p:cTn id="33" presetID="22" presetClass="entr" presetSubtype="8" fill="hold" nodeType="clickEffect">
+                                  <p:stCondLst>
+                                    <p:cond delay="0"/>
+                                  </p:stCondLst>
+                                  <p:childTnLst>
+                                    <p:set>
+                                      <p:cBhvr>
+                                        <p:cTn id="34" dur="1" fill="hold">
+                                          <p:stCondLst>
+                                            <p:cond delay="0"/>
+                                          </p:stCondLst>
+                                        </p:cTn>
+                                        <p:tgtEl>
+                                          <p:spTgt spid="13"/>
+                                        </p:tgtEl>
+                                        <p:attrNameLst>
+                                          <p:attrName>style.visibility</p:attrName>
+                                        </p:attrNameLst>
+                                      </p:cBhvr>
+                                      <p:to>
+                                        <p:strVal val="visible"/>
+                                      </p:to>
+                                    </p:set>
+                                    <p:animEffect transition="in" filter="wipe(left)">
+                                      <p:cBhvr>
+                                        <p:cTn id="35" dur="500"/>
+                                        <p:tgtEl>
+                                          <p:spTgt spid="13"/>
+                                        </p:tgtEl>
+                                      </p:cBhvr>
+                                    </p:animEffect>
+                                  </p:childTnLst>
+                                </p:cTn>
+                              </p:par>
+                            </p:childTnLst>
+                          </p:cTn>
+                        </p:par>
+                      </p:childTnLst>
+                    </p:cTn>
+                  </p:par>
+                  <p:par>
+                    <p:cTn id="36" fill="hold">
+                      <p:stCondLst>
+                        <p:cond delay="indefinite"/>
+                      </p:stCondLst>
+                      <p:childTnLst>
+                        <p:par>
+                          <p:cTn id="37" fill="hold">
+                            <p:stCondLst>
+                              <p:cond delay="0"/>
+                            </p:stCondLst>
+                            <p:childTnLst>
+                              <p:par>
+                                <p:cTn id="38" presetID="22" presetClass="entr" presetSubtype="8" fill="hold" nodeType="clickEffect">
+                                  <p:stCondLst>
+                                    <p:cond delay="0"/>
+                                  </p:stCondLst>
+                                  <p:childTnLst>
+                                    <p:set>
+                                      <p:cBhvr>
+                                        <p:cTn id="39" dur="1" fill="hold">
+                                          <p:stCondLst>
+                                            <p:cond delay="0"/>
+                                          </p:stCondLst>
+                                        </p:cTn>
+                                        <p:tgtEl>
+                                          <p:spTgt spid="5"/>
+                                        </p:tgtEl>
+                                        <p:attrNameLst>
+                                          <p:attrName>style.visibility</p:attrName>
+                                        </p:attrNameLst>
+                                      </p:cBhvr>
+                                      <p:to>
+                                        <p:strVal val="visible"/>
+                                      </p:to>
+                                    </p:set>
+                                    <p:animEffect transition="in" filter="wipe(left)">
+                                      <p:cBhvr>
+                                        <p:cTn id="40" dur="500"/>
+                                        <p:tgtEl>
+                                          <p:spTgt spid="5"/>
+                                        </p:tgtEl>
+                                      </p:cBhvr>
+                                    </p:animEffect>
+                                  </p:childTnLst>
+                                </p:cTn>
+                              </p:par>
+                            </p:childTnLst>
+                          </p:cTn>
+                        </p:par>
+                      </p:childTnLst>
+                    </p:cTn>
+                  </p:par>
+                  <p:par>
+                    <p:cTn id="41" fill="hold">
+                      <p:stCondLst>
+                        <p:cond delay="indefinite"/>
+                      </p:stCondLst>
+                      <p:childTnLst>
+                        <p:par>
+                          <p:cTn id="42" fill="hold">
+                            <p:stCondLst>
+                              <p:cond delay="0"/>
+                            </p:stCondLst>
+                            <p:childTnLst>
+                              <p:par>
+                                <p:cTn id="43" presetID="22" presetClass="entr" presetSubtype="8" fill="hold" grpId="0" nodeType="clickEffect">
+                                  <p:stCondLst>
+                                    <p:cond delay="0"/>
+                                  </p:stCondLst>
+                                  <p:childTnLst>
+                                    <p:set>
+                                      <p:cBhvr>
+                                        <p:cTn id="44" dur="1" fill="hold">
+                                          <p:stCondLst>
+                                            <p:cond delay="0"/>
+                                          </p:stCondLst>
+                                        </p:cTn>
+                                        <p:tgtEl>
+                                          <p:spTgt spid="12"/>
+                                        </p:tgtEl>
+                                        <p:attrNameLst>
+                                          <p:attrName>style.visibility</p:attrName>
+                                        </p:attrNameLst>
+                                      </p:cBhvr>
+                                      <p:to>
+                                        <p:strVal val="visible"/>
+                                      </p:to>
+                                    </p:set>
+                                    <p:animEffect transition="in" filter="wipe(left)">
+                                      <p:cBhvr>
+                                        <p:cTn id="45" dur="500"/>
+                                        <p:tgtEl>
+                                          <p:spTgt spid="12"/>
+                                        </p:tgtEl>
+                                      </p:cBhvr>
+                                    </p:animEffect>
+                                  </p:childTnLst>
+                                </p:cTn>
+                              </p:par>
+                            </p:childTnLst>
+                          </p:cTn>
+                        </p:par>
+                      </p:childTnLst>
+                    </p:cTn>
+                  </p:par>
+                </p:childTnLst>
+              </p:cTn>
+              <p:prevCondLst>
+                <p:cond evt="onPrev" delay="0">
+                  <p:tgtEl>
+                    <p:sldTgt/>
+                  </p:tgtEl>
+                </p:cond>
+              </p:prevCondLst>
+              <p:nextCondLst>
+                <p:cond evt="onNext" delay="0">
+                  <p:tgtEl>
+                    <p:sldTgt/>
+                  </p:tgtEl>
+                </p:cond>
+              </p:nextCondLst>
+            </p:seq>
+          </p:childTnLst>
+        </p:cTn>
+      </p:par>
+    </p:tnLst>
+    <p:bldLst>
+      <p:bldP spid="6" grpId="0"/>
+      <p:bldP spid="7" grpId="0"/>
+      <p:bldP spid="12" grpId="0"/>
+    </p:bldLst>
+  </p:timing>
+</p:sld>
+</file>
+
+<file path=ppt/slides/slide13.xml><?xml version="1.0" encoding="utf-8"?>
+<p:sld xmlns:a="http://schemas.openxmlformats.org/drawingml/2006/main" xmlns:r="http://schemas.openxmlformats.org/officeDocument/2006/relationships" xmlns:p="http://schemas.openxmlformats.org/presentationml/2006/main">
+  <p:cSld>
+    <p:spTree>
+      <p:nvGrpSpPr>
+        <p:cNvPr id="1" name=""/>
+        <p:cNvGrpSpPr/>
+        <p:nvPr/>
+      </p:nvGrpSpPr>
+      <p:grpSpPr>
+        <a:xfrm>
+          <a:off x="0" y="0"/>
+          <a:ext cx="0" cy="0"/>
+          <a:chOff x="0" y="0"/>
+          <a:chExt cx="0" cy="0"/>
+        </a:xfrm>
+      </p:grpSpPr>
+      <p:sp>
+        <p:nvSpPr>
+          <p:cNvPr id="2" name="Rectangle 30">
+            <a:extLst>
+              <a:ext uri="{FF2B5EF4-FFF2-40B4-BE49-F238E27FC236}">
+                <a16:creationId xmlns:a16="http://schemas.microsoft.com/office/drawing/2014/main" id="{7C28463F-DBF8-EB4E-86BA-BFC7019D4918}"/>
+              </a:ext>
+            </a:extLst>
+          </p:cNvPr>
+          <p:cNvSpPr>
+            <a:spLocks noChangeArrowheads="1"/>
+          </p:cNvSpPr>
+          <p:nvPr/>
+        </p:nvSpPr>
+        <p:spPr bwMode="auto">
+          <a:xfrm>
+            <a:off x="33209" y="-16506"/>
+            <a:ext cx="7743318" cy="493287"/>
+          </a:xfrm>
+          <a:prstGeom prst="rect">
+            <a:avLst/>
+          </a:prstGeom>
+          <a:noFill/>
+          <a:ln>
+            <a:noFill/>
+          </a:ln>
+        </p:spPr>
+        <p:txBody>
+          <a:bodyPr wrap="square">
+            <a:spAutoFit/>
+          </a:bodyPr>
+          <a:lstStyle>
+            <a:lvl1pPr>
+              <a:defRPr kumimoji="1" sz="2400">
+                <a:solidFill>
+                  <a:schemeClr val="tx1"/>
+                </a:solidFill>
+                <a:latin typeface="Times New Roman" panose="02020603050405020304" pitchFamily="18" charset="0"/>
+                <a:ea typeface="宋体" panose="02010600030101010101" pitchFamily="2" charset="-122"/>
+              </a:defRPr>
+            </a:lvl1pPr>
+            <a:lvl2pPr marL="742950" indent="-285750">
+              <a:defRPr kumimoji="1" sz="2400">
+                <a:solidFill>
+                  <a:schemeClr val="tx1"/>
+                </a:solidFill>
+                <a:latin typeface="Times New Roman" panose="02020603050405020304" pitchFamily="18" charset="0"/>
+                <a:ea typeface="宋体" panose="02010600030101010101" pitchFamily="2" charset="-122"/>
+              </a:defRPr>
+            </a:lvl2pPr>
+            <a:lvl3pPr marL="1143000" indent="-228600">
+              <a:defRPr kumimoji="1" sz="2400">
+                <a:solidFill>
+                  <a:schemeClr val="tx1"/>
+                </a:solidFill>
+                <a:latin typeface="Times New Roman" panose="02020603050405020304" pitchFamily="18" charset="0"/>
+                <a:ea typeface="宋体" panose="02010600030101010101" pitchFamily="2" charset="-122"/>
+              </a:defRPr>
+            </a:lvl3pPr>
+            <a:lvl4pPr marL="1600200" indent="-228600">
+              <a:defRPr kumimoji="1" sz="2400">
+                <a:solidFill>
+                  <a:schemeClr val="tx1"/>
+                </a:solidFill>
+                <a:latin typeface="Times New Roman" panose="02020603050405020304" pitchFamily="18" charset="0"/>
+                <a:ea typeface="宋体" panose="02010600030101010101" pitchFamily="2" charset="-122"/>
+              </a:defRPr>
+            </a:lvl4pPr>
+            <a:lvl5pPr marL="2057400" indent="-228600">
+              <a:defRPr kumimoji="1" sz="2400">
+                <a:solidFill>
+                  <a:schemeClr val="tx1"/>
+                </a:solidFill>
+                <a:latin typeface="Times New Roman" panose="02020603050405020304" pitchFamily="18" charset="0"/>
+                <a:ea typeface="宋体" panose="02010600030101010101" pitchFamily="2" charset="-122"/>
+              </a:defRPr>
+            </a:lvl5pPr>
+            <a:lvl6pPr marL="2514600" indent="-228600" eaLnBrk="0" fontAlgn="base" hangingPunct="0">
+              <a:spcBef>
+                <a:spcPct val="0"/>
+              </a:spcBef>
+              <a:spcAft>
+                <a:spcPct val="0"/>
+              </a:spcAft>
+              <a:defRPr kumimoji="1" sz="2400">
+                <a:solidFill>
+                  <a:schemeClr val="tx1"/>
+                </a:solidFill>
+                <a:latin typeface="Times New Roman" panose="02020603050405020304" pitchFamily="18" charset="0"/>
+                <a:ea typeface="宋体" panose="02010600030101010101" pitchFamily="2" charset="-122"/>
+              </a:defRPr>
+            </a:lvl6pPr>
+            <a:lvl7pPr marL="2971800" indent="-228600" eaLnBrk="0" fontAlgn="base" hangingPunct="0">
+              <a:spcBef>
+                <a:spcPct val="0"/>
+              </a:spcBef>
+              <a:spcAft>
+                <a:spcPct val="0"/>
+              </a:spcAft>
+              <a:defRPr kumimoji="1" sz="2400">
+                <a:solidFill>
+                  <a:schemeClr val="tx1"/>
+                </a:solidFill>
+                <a:latin typeface="Times New Roman" panose="02020603050405020304" pitchFamily="18" charset="0"/>
+                <a:ea typeface="宋体" panose="02010600030101010101" pitchFamily="2" charset="-122"/>
+              </a:defRPr>
+            </a:lvl7pPr>
+            <a:lvl8pPr marL="3429000" indent="-228600" eaLnBrk="0" fontAlgn="base" hangingPunct="0">
+              <a:spcBef>
+                <a:spcPct val="0"/>
+              </a:spcBef>
+              <a:spcAft>
+                <a:spcPct val="0"/>
+              </a:spcAft>
+              <a:defRPr kumimoji="1" sz="2400">
+                <a:solidFill>
+                  <a:schemeClr val="tx1"/>
+                </a:solidFill>
+                <a:latin typeface="Times New Roman" panose="02020603050405020304" pitchFamily="18" charset="0"/>
+                <a:ea typeface="宋体" panose="02010600030101010101" pitchFamily="2" charset="-122"/>
+              </a:defRPr>
+            </a:lvl8pPr>
+            <a:lvl9pPr marL="3886200" indent="-228600" eaLnBrk="0" fontAlgn="base" hangingPunct="0">
+              <a:spcBef>
+                <a:spcPct val="0"/>
+              </a:spcBef>
+              <a:spcAft>
+                <a:spcPct val="0"/>
+              </a:spcAft>
+              <a:defRPr kumimoji="1" sz="2400">
+                <a:solidFill>
+                  <a:schemeClr val="tx1"/>
+                </a:solidFill>
+                <a:latin typeface="Times New Roman" panose="02020603050405020304" pitchFamily="18" charset="0"/>
+                <a:ea typeface="宋体" panose="02010600030101010101" pitchFamily="2" charset="-122"/>
+              </a:defRPr>
+            </a:lvl9pPr>
+          </a:lstStyle>
+          <a:p>
+            <a:pPr marL="0" marR="0" lvl="0" indent="0" algn="l" defTabSz="914400" rtl="0" eaLnBrk="0" fontAlgn="base" latinLnBrk="0" hangingPunct="0">
+              <a:lnSpc>
+                <a:spcPct val="100000"/>
+              </a:lnSpc>
+              <a:spcBef>
+                <a:spcPct val="0"/>
+              </a:spcBef>
+              <a:spcAft>
+                <a:spcPct val="0"/>
+              </a:spcAft>
+              <a:buClrTx/>
+              <a:buSzTx/>
+              <a:buFontTx/>
+              <a:buNone/>
+              <a:tabLst/>
+              <a:defRPr/>
+            </a:pPr>
+            <a:r>
+              <a:rPr kumimoji="1" lang="zh-CN" altLang="en-US" sz="2600" b="1" i="0" u="none" strike="noStrike" kern="0" cap="none" spc="0" normalizeH="0" baseline="0" noProof="0" dirty="0">
+                <a:ln>
+                  <a:noFill/>
+                </a:ln>
+                <a:solidFill>
+                  <a:schemeClr val="bg1"/>
+                </a:solidFill>
+                <a:effectLst/>
+                <a:uLnTx/>
+                <a:uFillTx/>
+                <a:latin typeface="Times New Roman" panose="02020603050405020304" pitchFamily="18" charset="0"/>
+                <a:ea typeface="华文中宋"/>
+                <a:cs typeface="Times New Roman" panose="02020603050405020304" pitchFamily="18" charset="0"/>
+              </a:rPr>
+              <a:t>实践问题</a:t>
+            </a:r>
+            <a:r>
+              <a:rPr kumimoji="1" lang="en-US" altLang="zh-CN" sz="2600" b="1" i="0" u="none" strike="noStrike" kern="0" cap="none" spc="0" normalizeH="0" baseline="0" noProof="0" dirty="0">
+                <a:ln>
+                  <a:noFill/>
+                </a:ln>
+                <a:solidFill>
+                  <a:schemeClr val="bg1"/>
+                </a:solidFill>
+                <a:effectLst/>
+                <a:uLnTx/>
+                <a:uFillTx/>
+                <a:latin typeface="Times New Roman" panose="02020603050405020304" pitchFamily="18" charset="0"/>
+                <a:ea typeface="华文中宋"/>
+                <a:cs typeface="Times New Roman" panose="02020603050405020304" pitchFamily="18" charset="0"/>
+              </a:rPr>
+              <a:t>:  </a:t>
+            </a:r>
+            <a:r>
+              <a:rPr kumimoji="1" lang="zh-CN" altLang="en-US" sz="2600" b="1" i="0" u="none" strike="noStrike" kern="0" cap="none" spc="0" normalizeH="0" baseline="0" noProof="0" dirty="0">
+                <a:ln>
+                  <a:noFill/>
+                </a:ln>
+                <a:solidFill>
+                  <a:schemeClr val="bg1"/>
+                </a:solidFill>
+                <a:effectLst/>
+                <a:uLnTx/>
+                <a:uFillTx/>
+                <a:latin typeface="Times New Roman" panose="02020603050405020304" pitchFamily="18" charset="0"/>
+                <a:ea typeface="华文中宋"/>
+                <a:cs typeface="Times New Roman" panose="02020603050405020304" pitchFamily="18" charset="0"/>
+              </a:rPr>
+              <a:t>利用克拉默</a:t>
+            </a:r>
+            <a:r>
+              <a:rPr kumimoji="1" lang="en-US" altLang="zh-CN" sz="2600" b="1" i="0" u="none" strike="noStrike" kern="0" cap="none" spc="0" normalizeH="0" baseline="0" noProof="0" dirty="0">
+                <a:ln>
+                  <a:noFill/>
+                </a:ln>
+                <a:solidFill>
+                  <a:schemeClr val="bg1"/>
+                </a:solidFill>
+                <a:effectLst/>
+                <a:uLnTx/>
+                <a:uFillTx/>
+                <a:latin typeface="Times New Roman" panose="02020603050405020304" pitchFamily="18" charset="0"/>
+                <a:ea typeface="华文中宋"/>
+                <a:cs typeface="Times New Roman" panose="02020603050405020304" pitchFamily="18" charset="0"/>
+              </a:rPr>
+              <a:t>(Cramer)</a:t>
+            </a:r>
+            <a:r>
+              <a:rPr kumimoji="1" lang="zh-CN" altLang="en-US" sz="2600" b="1" i="0" u="none" strike="noStrike" kern="0" cap="none" spc="0" normalizeH="0" baseline="0" noProof="0" dirty="0">
+                <a:ln>
+                  <a:noFill/>
+                </a:ln>
+                <a:solidFill>
+                  <a:schemeClr val="bg1"/>
+                </a:solidFill>
+                <a:effectLst/>
+                <a:uLnTx/>
+                <a:uFillTx/>
+                <a:latin typeface="Times New Roman" panose="02020603050405020304" pitchFamily="18" charset="0"/>
+                <a:ea typeface="华文中宋"/>
+                <a:cs typeface="Times New Roman" panose="02020603050405020304" pitchFamily="18" charset="0"/>
+              </a:rPr>
+              <a:t>法则求解线性方程组</a:t>
+            </a:r>
+          </a:p>
+        </p:txBody>
+      </p:sp>
+      <p:sp>
+        <p:nvSpPr>
+          <p:cNvPr id="3" name="灯片编号占位符 7">
+            <a:extLst>
+              <a:ext uri="{FF2B5EF4-FFF2-40B4-BE49-F238E27FC236}">
+                <a16:creationId xmlns:a16="http://schemas.microsoft.com/office/drawing/2014/main" id="{C7F3FD78-AA9B-E241-8EA2-D54556A75DE1}"/>
+              </a:ext>
+            </a:extLst>
+          </p:cNvPr>
+          <p:cNvSpPr txBox="1">
+            <a:spLocks/>
+          </p:cNvSpPr>
+          <p:nvPr/>
+        </p:nvSpPr>
+        <p:spPr bwMode="auto">
+          <a:xfrm>
+            <a:off x="8750064" y="6210684"/>
+            <a:ext cx="574464" cy="349702"/>
+          </a:xfrm>
+          <a:prstGeom prst="rect">
+            <a:avLst/>
+          </a:prstGeom>
+          <a:noFill/>
+          <a:ln>
+            <a:noFill/>
+          </a:ln>
+          <a:effectLst/>
+        </p:spPr>
+        <p:txBody>
+          <a:bodyPr vert="horz" wrap="square" lIns="91440" tIns="45720" rIns="91440" bIns="45720" numCol="1" anchor="b" anchorCtr="0" compatLnSpc="1">
+            <a:prstTxWarp prst="textNoShape">
+              <a:avLst/>
+            </a:prstTxWarp>
+          </a:bodyPr>
+          <a:lstStyle>
+            <a:defPPr>
+              <a:defRPr lang="zh-CN"/>
+            </a:defPPr>
+            <a:lvl1pPr algn="l" rtl="0" eaLnBrk="0" fontAlgn="auto" hangingPunct="0">
+              <a:spcBef>
+                <a:spcPts val="0"/>
+              </a:spcBef>
+              <a:spcAft>
+                <a:spcPts val="0"/>
+              </a:spcAft>
+              <a:defRPr kumimoji="1" sz="1200" kern="1200" dirty="0">
+                <a:solidFill>
+                  <a:srgbClr val="000000"/>
+                </a:solidFill>
+                <a:latin typeface="+mn-lt"/>
+                <a:ea typeface="+mn-ea"/>
+                <a:cs typeface="+mn-cs"/>
+              </a:defRPr>
+            </a:lvl1pPr>
+            <a:lvl2pPr marL="457200" algn="l" rtl="0" eaLnBrk="0" fontAlgn="base" hangingPunct="0">
+              <a:spcBef>
+                <a:spcPct val="0"/>
+              </a:spcBef>
+              <a:spcAft>
+                <a:spcPct val="0"/>
+              </a:spcAft>
+              <a:defRPr kumimoji="1" sz="2800" kern="1200">
+                <a:solidFill>
+                  <a:schemeClr val="tx2"/>
+                </a:solidFill>
+                <a:latin typeface="Times New Roman" panose="02020603050405020304" pitchFamily="18" charset="0"/>
+                <a:ea typeface="宋体" panose="02010600030101010101" pitchFamily="2" charset="-122"/>
+                <a:cs typeface="+mn-cs"/>
+              </a:defRPr>
+            </a:lvl2pPr>
+            <a:lvl3pPr marL="914400" algn="l" rtl="0" eaLnBrk="0" fontAlgn="base" hangingPunct="0">
+              <a:spcBef>
+                <a:spcPct val="0"/>
+              </a:spcBef>
+              <a:spcAft>
+                <a:spcPct val="0"/>
+              </a:spcAft>
+              <a:defRPr kumimoji="1" sz="2800" kern="1200">
+                <a:solidFill>
+                  <a:schemeClr val="tx2"/>
+                </a:solidFill>
+                <a:latin typeface="Times New Roman" panose="02020603050405020304" pitchFamily="18" charset="0"/>
+                <a:ea typeface="宋体" panose="02010600030101010101" pitchFamily="2" charset="-122"/>
+                <a:cs typeface="+mn-cs"/>
+              </a:defRPr>
+            </a:lvl3pPr>
+            <a:lvl4pPr marL="1371600" algn="l" rtl="0" eaLnBrk="0" fontAlgn="base" hangingPunct="0">
+              <a:spcBef>
+                <a:spcPct val="0"/>
+              </a:spcBef>
+              <a:spcAft>
+                <a:spcPct val="0"/>
+              </a:spcAft>
+              <a:defRPr kumimoji="1" sz="2800" kern="1200">
+                <a:solidFill>
+                  <a:schemeClr val="tx2"/>
+                </a:solidFill>
+                <a:latin typeface="Times New Roman" panose="02020603050405020304" pitchFamily="18" charset="0"/>
+                <a:ea typeface="宋体" panose="02010600030101010101" pitchFamily="2" charset="-122"/>
+                <a:cs typeface="+mn-cs"/>
+              </a:defRPr>
+            </a:lvl4pPr>
+            <a:lvl5pPr marL="1828800" algn="l" rtl="0" eaLnBrk="0" fontAlgn="base" hangingPunct="0">
+              <a:spcBef>
+                <a:spcPct val="0"/>
+              </a:spcBef>
+              <a:spcAft>
+                <a:spcPct val="0"/>
+              </a:spcAft>
+              <a:defRPr kumimoji="1" sz="2800" kern="1200">
+                <a:solidFill>
+                  <a:schemeClr val="tx2"/>
+                </a:solidFill>
+                <a:latin typeface="Times New Roman" panose="02020603050405020304" pitchFamily="18" charset="0"/>
+                <a:ea typeface="宋体" panose="02010600030101010101" pitchFamily="2" charset="-122"/>
+                <a:cs typeface="+mn-cs"/>
+              </a:defRPr>
+            </a:lvl5pPr>
+            <a:lvl6pPr marL="2286000" algn="l" defTabSz="914400" rtl="0" eaLnBrk="1" latinLnBrk="0" hangingPunct="1">
+              <a:defRPr kumimoji="1" sz="2800" kern="1200">
+                <a:solidFill>
+                  <a:schemeClr val="tx2"/>
+                </a:solidFill>
+                <a:latin typeface="Times New Roman" panose="02020603050405020304" pitchFamily="18" charset="0"/>
+                <a:ea typeface="宋体" panose="02010600030101010101" pitchFamily="2" charset="-122"/>
+                <a:cs typeface="+mn-cs"/>
+              </a:defRPr>
+            </a:lvl6pPr>
+            <a:lvl7pPr marL="2743200" algn="l" defTabSz="914400" rtl="0" eaLnBrk="1" latinLnBrk="0" hangingPunct="1">
+              <a:defRPr kumimoji="1" sz="2800" kern="1200">
+                <a:solidFill>
+                  <a:schemeClr val="tx2"/>
+                </a:solidFill>
+                <a:latin typeface="Times New Roman" panose="02020603050405020304" pitchFamily="18" charset="0"/>
+                <a:ea typeface="宋体" panose="02010600030101010101" pitchFamily="2" charset="-122"/>
+                <a:cs typeface="+mn-cs"/>
+              </a:defRPr>
+            </a:lvl7pPr>
+            <a:lvl8pPr marL="3200400" algn="l" defTabSz="914400" rtl="0" eaLnBrk="1" latinLnBrk="0" hangingPunct="1">
+              <a:defRPr kumimoji="1" sz="2800" kern="1200">
+                <a:solidFill>
+                  <a:schemeClr val="tx2"/>
+                </a:solidFill>
+                <a:latin typeface="Times New Roman" panose="02020603050405020304" pitchFamily="18" charset="0"/>
+                <a:ea typeface="宋体" panose="02010600030101010101" pitchFamily="2" charset="-122"/>
+                <a:cs typeface="+mn-cs"/>
+              </a:defRPr>
+            </a:lvl8pPr>
+            <a:lvl9pPr marL="3657600" algn="l" defTabSz="914400" rtl="0" eaLnBrk="1" latinLnBrk="0" hangingPunct="1">
+              <a:defRPr kumimoji="1" sz="2800" kern="1200">
+                <a:solidFill>
+                  <a:schemeClr val="tx2"/>
+                </a:solidFill>
+                <a:latin typeface="Times New Roman" panose="02020603050405020304" pitchFamily="18" charset="0"/>
+                <a:ea typeface="宋体" panose="02010600030101010101" pitchFamily="2" charset="-122"/>
+                <a:cs typeface="+mn-cs"/>
+              </a:defRPr>
+            </a:lvl9pPr>
+          </a:lstStyle>
+          <a:p>
+            <a:fld id="{252E7140-E4F4-49D5-9AFB-3467FF007A05}" type="slidenum">
+              <a:rPr lang="zh-CN" altLang="en-US" smtClean="0">
+                <a:cs typeface="+mn-ea"/>
+                <a:sym typeface="+mn-lt"/>
+              </a:rPr>
+              <a:pPr/>
+              <a:t>13</a:t>
+            </a:fld>
+            <a:endParaRPr lang="zh-CN" altLang="en-US">
+              <a:cs typeface="+mn-ea"/>
+              <a:sym typeface="+mn-lt"/>
+            </a:endParaRPr>
+          </a:p>
+        </p:txBody>
+      </p:sp>
+      <p:graphicFrame>
+        <p:nvGraphicFramePr>
+          <p:cNvPr id="4" name="Object 6">
+            <a:extLst>
+              <a:ext uri="{FF2B5EF4-FFF2-40B4-BE49-F238E27FC236}">
+                <a16:creationId xmlns:a16="http://schemas.microsoft.com/office/drawing/2014/main" id="{963AE2A0-8DA7-6F42-8CBD-630BD9F79FBD}"/>
+              </a:ext>
+            </a:extLst>
+          </p:cNvPr>
+          <p:cNvGraphicFramePr>
+            <a:graphicFrameLocks noChangeAspect="1"/>
+          </p:cNvGraphicFramePr>
+          <p:nvPr>
+            <p:extLst>
+              <p:ext uri="{D42A27DB-BD31-4B8C-83A1-F6EECF244321}">
+                <p14:modId xmlns:p14="http://schemas.microsoft.com/office/powerpoint/2010/main" val="1566441981"/>
+              </p:ext>
+            </p:extLst>
+          </p:nvPr>
+        </p:nvGraphicFramePr>
+        <p:xfrm>
+          <a:off x="348697" y="4215755"/>
+          <a:ext cx="2286000" cy="1422400"/>
+        </p:xfrm>
+        <a:graphic>
+          <a:graphicData uri="http://schemas.openxmlformats.org/presentationml/2006/ole">
+            <mc:AlternateContent xmlns:mc="http://schemas.openxmlformats.org/markup-compatibility/2006">
+              <mc:Choice xmlns:v="urn:schemas-microsoft-com:vml" Requires="v">
+                <p:oleObj spid="_x0000_s12289" name="Equation" r:id="rId3" imgW="1143000" imgH="711000" progId="Equation.DSMT4">
+                  <p:embed/>
+                </p:oleObj>
+              </mc:Choice>
+              <mc:Fallback>
+                <p:oleObj name="Equation" r:id="rId3" imgW="1143000" imgH="711000" progId="Equation.DSMT4">
+                  <p:embed/>
+                  <p:pic>
+                    <p:nvPicPr>
+                      <p:cNvPr id="29" name="Object 6">
+                        <a:extLst>
+                          <a:ext uri="{FF2B5EF4-FFF2-40B4-BE49-F238E27FC236}">
+                            <a16:creationId xmlns:a16="http://schemas.microsoft.com/office/drawing/2014/main" id="{74F297C5-DE91-4B2C-90E8-33E306D574F9}"/>
+                          </a:ext>
+                        </a:extLst>
+                      </p:cNvPr>
+                      <p:cNvPicPr>
+                        <a:picLocks noChangeAspect="1" noChangeArrowheads="1"/>
+                      </p:cNvPicPr>
+                      <p:nvPr/>
+                    </p:nvPicPr>
+                    <p:blipFill>
+                      <a:blip r:embed="rId4"/>
+                      <a:srcRect/>
+                      <a:stretch>
+                        <a:fillRect/>
+                      </a:stretch>
+                    </p:blipFill>
+                    <p:spPr bwMode="auto">
+                      <a:xfrm>
+                        <a:off x="348697" y="4215755"/>
+                        <a:ext cx="2286000" cy="1422400"/>
+                      </a:xfrm>
+                      <a:prstGeom prst="rect">
+                        <a:avLst/>
+                      </a:prstGeom>
+                      <a:noFill/>
+                      <a:extLst>
+                        <a:ext uri="{909E8E84-426E-40DD-AFC4-6F175D3DCCD1}">
+                          <a14:hiddenFill xmlns:a14="http://schemas.microsoft.com/office/drawing/2010/main">
+                            <a:solidFill>
+                              <a:srgbClr val="FFFFFF"/>
+                            </a:solidFill>
+                          </a14:hiddenFill>
+                        </a:ext>
+                      </a:extLst>
+                    </p:spPr>
+                  </p:pic>
+                </p:oleObj>
+              </mc:Fallback>
+            </mc:AlternateContent>
+          </a:graphicData>
+        </a:graphic>
+      </p:graphicFrame>
+      <p:graphicFrame>
+        <p:nvGraphicFramePr>
+          <p:cNvPr id="5" name="Object 6">
+            <a:extLst>
+              <a:ext uri="{FF2B5EF4-FFF2-40B4-BE49-F238E27FC236}">
+                <a16:creationId xmlns:a16="http://schemas.microsoft.com/office/drawing/2014/main" id="{5DD2EC32-B3A4-9C4E-BE02-1BEB88F91531}"/>
+              </a:ext>
+            </a:extLst>
+          </p:cNvPr>
+          <p:cNvGraphicFramePr>
+            <a:graphicFrameLocks noChangeAspect="1"/>
+          </p:cNvGraphicFramePr>
+          <p:nvPr>
+            <p:extLst>
+              <p:ext uri="{D42A27DB-BD31-4B8C-83A1-F6EECF244321}">
+                <p14:modId xmlns:p14="http://schemas.microsoft.com/office/powerpoint/2010/main" val="4126778230"/>
+              </p:ext>
+            </p:extLst>
+          </p:nvPr>
+        </p:nvGraphicFramePr>
+        <p:xfrm>
+          <a:off x="3057130" y="4205524"/>
+          <a:ext cx="2159000" cy="1422400"/>
+        </p:xfrm>
+        <a:graphic>
+          <a:graphicData uri="http://schemas.openxmlformats.org/presentationml/2006/ole">
+            <mc:AlternateContent xmlns:mc="http://schemas.openxmlformats.org/markup-compatibility/2006">
+              <mc:Choice xmlns:v="urn:schemas-microsoft-com:vml" Requires="v">
+                <p:oleObj spid="_x0000_s12290" name="Equation" r:id="rId5" imgW="1079280" imgH="711000" progId="Equation.DSMT4">
+                  <p:embed/>
+                </p:oleObj>
+              </mc:Choice>
+              <mc:Fallback>
+                <p:oleObj name="Equation" r:id="rId5" imgW="1079280" imgH="711000" progId="Equation.DSMT4">
+                  <p:embed/>
+                  <p:pic>
+                    <p:nvPicPr>
+                      <p:cNvPr id="30" name="Object 6">
+                        <a:extLst>
+                          <a:ext uri="{FF2B5EF4-FFF2-40B4-BE49-F238E27FC236}">
+                            <a16:creationId xmlns:a16="http://schemas.microsoft.com/office/drawing/2014/main" id="{867CCA4D-A614-46AC-B9B1-6C43B5AC26D8}"/>
+                          </a:ext>
+                        </a:extLst>
+                      </p:cNvPr>
+                      <p:cNvPicPr>
+                        <a:picLocks noChangeAspect="1" noChangeArrowheads="1"/>
+                      </p:cNvPicPr>
+                      <p:nvPr/>
+                    </p:nvPicPr>
+                    <p:blipFill>
+                      <a:blip r:embed="rId6"/>
+                      <a:srcRect/>
+                      <a:stretch>
+                        <a:fillRect/>
+                      </a:stretch>
+                    </p:blipFill>
+                    <p:spPr bwMode="auto">
+                      <a:xfrm>
+                        <a:off x="3057130" y="4205524"/>
+                        <a:ext cx="2159000" cy="1422400"/>
+                      </a:xfrm>
+                      <a:prstGeom prst="rect">
+                        <a:avLst/>
+                      </a:prstGeom>
+                      <a:noFill/>
+                      <a:extLst>
+                        <a:ext uri="{909E8E84-426E-40DD-AFC4-6F175D3DCCD1}">
+                          <a14:hiddenFill xmlns:a14="http://schemas.microsoft.com/office/drawing/2010/main">
+                            <a:solidFill>
+                              <a:srgbClr val="FFFFFF"/>
+                            </a:solidFill>
+                          </a14:hiddenFill>
+                        </a:ext>
+                      </a:extLst>
+                    </p:spPr>
+                  </p:pic>
+                </p:oleObj>
+              </mc:Fallback>
+            </mc:AlternateContent>
+          </a:graphicData>
+        </a:graphic>
+      </p:graphicFrame>
+      <p:graphicFrame>
+        <p:nvGraphicFramePr>
+          <p:cNvPr id="6" name="Object 6">
+            <a:extLst>
+              <a:ext uri="{FF2B5EF4-FFF2-40B4-BE49-F238E27FC236}">
+                <a16:creationId xmlns:a16="http://schemas.microsoft.com/office/drawing/2014/main" id="{B745875A-A5EF-124D-8CFD-F2B2A31A7132}"/>
+              </a:ext>
+            </a:extLst>
+          </p:cNvPr>
+          <p:cNvGraphicFramePr>
+            <a:graphicFrameLocks noChangeAspect="1"/>
+          </p:cNvGraphicFramePr>
+          <p:nvPr>
+            <p:extLst>
+              <p:ext uri="{D42A27DB-BD31-4B8C-83A1-F6EECF244321}">
+                <p14:modId xmlns:p14="http://schemas.microsoft.com/office/powerpoint/2010/main" val="4142309105"/>
+              </p:ext>
+            </p:extLst>
+          </p:nvPr>
+        </p:nvGraphicFramePr>
+        <p:xfrm>
+          <a:off x="5737497" y="4205524"/>
+          <a:ext cx="2286000" cy="1422400"/>
+        </p:xfrm>
+        <a:graphic>
+          <a:graphicData uri="http://schemas.openxmlformats.org/presentationml/2006/ole">
+            <mc:AlternateContent xmlns:mc="http://schemas.openxmlformats.org/markup-compatibility/2006">
+              <mc:Choice xmlns:v="urn:schemas-microsoft-com:vml" Requires="v">
+                <p:oleObj spid="_x0000_s12291" name="Equation" r:id="rId7" imgW="1143000" imgH="711000" progId="Equation.DSMT4">
+                  <p:embed/>
+                </p:oleObj>
+              </mc:Choice>
+              <mc:Fallback>
+                <p:oleObj name="Equation" r:id="rId7" imgW="1143000" imgH="711000" progId="Equation.DSMT4">
+                  <p:embed/>
+                  <p:pic>
+                    <p:nvPicPr>
+                      <p:cNvPr id="31" name="Object 6">
+                        <a:extLst>
+                          <a:ext uri="{FF2B5EF4-FFF2-40B4-BE49-F238E27FC236}">
+                            <a16:creationId xmlns:a16="http://schemas.microsoft.com/office/drawing/2014/main" id="{EA59319F-9E1F-46A0-9314-E5EF4555FE37}"/>
+                          </a:ext>
+                        </a:extLst>
+                      </p:cNvPr>
+                      <p:cNvPicPr>
+                        <a:picLocks noChangeAspect="1" noChangeArrowheads="1"/>
+                      </p:cNvPicPr>
+                      <p:nvPr/>
+                    </p:nvPicPr>
+                    <p:blipFill>
+                      <a:blip r:embed="rId8"/>
+                      <a:srcRect/>
+                      <a:stretch>
+                        <a:fillRect/>
+                      </a:stretch>
+                    </p:blipFill>
+                    <p:spPr bwMode="auto">
+                      <a:xfrm>
+                        <a:off x="5737497" y="4205524"/>
+                        <a:ext cx="2286000" cy="1422400"/>
+                      </a:xfrm>
+                      <a:prstGeom prst="rect">
+                        <a:avLst/>
+                      </a:prstGeom>
+                      <a:noFill/>
+                      <a:extLst>
+                        <a:ext uri="{909E8E84-426E-40DD-AFC4-6F175D3DCCD1}">
+                          <a14:hiddenFill xmlns:a14="http://schemas.microsoft.com/office/drawing/2010/main">
+                            <a:solidFill>
+                              <a:srgbClr val="FFFFFF"/>
+                            </a:solidFill>
+                          </a14:hiddenFill>
+                        </a:ext>
+                      </a:extLst>
+                    </p:spPr>
+                  </p:pic>
+                </p:oleObj>
+              </mc:Fallback>
+            </mc:AlternateContent>
+          </a:graphicData>
+        </a:graphic>
+      </p:graphicFrame>
+      <p:graphicFrame>
+        <p:nvGraphicFramePr>
+          <p:cNvPr id="7" name="Object 6">
+            <a:extLst>
+              <a:ext uri="{FF2B5EF4-FFF2-40B4-BE49-F238E27FC236}">
+                <a16:creationId xmlns:a16="http://schemas.microsoft.com/office/drawing/2014/main" id="{66963035-33E7-1848-80FE-CCE54DCEA9D2}"/>
+              </a:ext>
+            </a:extLst>
+          </p:cNvPr>
+          <p:cNvGraphicFramePr>
+            <a:graphicFrameLocks noChangeAspect="1"/>
+          </p:cNvGraphicFramePr>
+          <p:nvPr>
+            <p:extLst>
+              <p:ext uri="{D42A27DB-BD31-4B8C-83A1-F6EECF244321}">
+                <p14:modId xmlns:p14="http://schemas.microsoft.com/office/powerpoint/2010/main" val="942390175"/>
+              </p:ext>
+            </p:extLst>
+          </p:nvPr>
+        </p:nvGraphicFramePr>
+        <p:xfrm>
+          <a:off x="683286" y="5590029"/>
+          <a:ext cx="1498600" cy="787400"/>
+        </p:xfrm>
+        <a:graphic>
+          <a:graphicData uri="http://schemas.openxmlformats.org/presentationml/2006/ole">
+            <mc:AlternateContent xmlns:mc="http://schemas.openxmlformats.org/markup-compatibility/2006">
+              <mc:Choice xmlns:v="urn:schemas-microsoft-com:vml" Requires="v">
+                <p:oleObj spid="_x0000_s12292" name="Equation" r:id="rId9" imgW="749160" imgH="393480" progId="Equation.DSMT4">
+                  <p:embed/>
+                </p:oleObj>
+              </mc:Choice>
+              <mc:Fallback>
+                <p:oleObj name="Equation" r:id="rId9" imgW="749160" imgH="393480" progId="Equation.DSMT4">
+                  <p:embed/>
+                  <p:pic>
+                    <p:nvPicPr>
+                      <p:cNvPr id="33" name="Object 6">
+                        <a:extLst>
+                          <a:ext uri="{FF2B5EF4-FFF2-40B4-BE49-F238E27FC236}">
+                            <a16:creationId xmlns:a16="http://schemas.microsoft.com/office/drawing/2014/main" id="{554C0D24-E26E-48AC-B643-48C40D64E82E}"/>
+                          </a:ext>
+                        </a:extLst>
+                      </p:cNvPr>
+                      <p:cNvPicPr>
+                        <a:picLocks noChangeAspect="1" noChangeArrowheads="1"/>
+                      </p:cNvPicPr>
+                      <p:nvPr/>
+                    </p:nvPicPr>
+                    <p:blipFill>
+                      <a:blip r:embed="rId10"/>
+                      <a:srcRect/>
+                      <a:stretch>
+                        <a:fillRect/>
+                      </a:stretch>
+                    </p:blipFill>
+                    <p:spPr bwMode="auto">
+                      <a:xfrm>
+                        <a:off x="683286" y="5590029"/>
+                        <a:ext cx="1498600" cy="787400"/>
+                      </a:xfrm>
+                      <a:prstGeom prst="rect">
+                        <a:avLst/>
+                      </a:prstGeom>
+                      <a:noFill/>
+                      <a:extLst>
+                        <a:ext uri="{909E8E84-426E-40DD-AFC4-6F175D3DCCD1}">
+                          <a14:hiddenFill xmlns:a14="http://schemas.microsoft.com/office/drawing/2010/main">
+                            <a:solidFill>
+                              <a:srgbClr val="FFFFFF"/>
+                            </a:solidFill>
+                          </a14:hiddenFill>
+                        </a:ext>
+                      </a:extLst>
+                    </p:spPr>
+                  </p:pic>
+                </p:oleObj>
+              </mc:Fallback>
+            </mc:AlternateContent>
+          </a:graphicData>
+        </a:graphic>
+      </p:graphicFrame>
+      <p:sp>
+        <p:nvSpPr>
+          <p:cNvPr id="8" name="文本框 25">
+            <a:extLst>
+              <a:ext uri="{FF2B5EF4-FFF2-40B4-BE49-F238E27FC236}">
+                <a16:creationId xmlns:a16="http://schemas.microsoft.com/office/drawing/2014/main" id="{E690658A-F7BF-0941-A0B1-FB7936B9E8F9}"/>
+              </a:ext>
+            </a:extLst>
+          </p:cNvPr>
+          <p:cNvSpPr txBox="1"/>
+          <p:nvPr/>
+        </p:nvSpPr>
+        <p:spPr>
+          <a:xfrm>
+            <a:off x="339379" y="927638"/>
+            <a:ext cx="718145" cy="578235"/>
+          </a:xfrm>
+          <a:prstGeom prst="rect">
+            <a:avLst/>
+          </a:prstGeom>
+          <a:noFill/>
+        </p:spPr>
+        <p:txBody>
+          <a:bodyPr wrap="none" lIns="0" tIns="0" rIns="0" bIns="0" rtlCol="0">
+            <a:spAutoFit/>
+          </a:bodyPr>
+          <a:lstStyle/>
+          <a:p>
+            <a:pPr>
+              <a:lnSpc>
+                <a:spcPct val="150000"/>
+              </a:lnSpc>
+            </a:pPr>
+            <a:r>
+              <a:rPr lang="zh-CN" altLang="en-US" sz="2800" dirty="0">
+                <a:cs typeface="+mn-ea"/>
+                <a:sym typeface="+mn-lt"/>
+              </a:rPr>
+              <a:t>📚</a:t>
+            </a:r>
+            <a:r>
+              <a:rPr lang="zh-CN" altLang="en-US" sz="2800" dirty="0">
+                <a:highlight>
+                  <a:srgbClr val="FFC000"/>
+                </a:highlight>
+                <a:cs typeface="+mn-ea"/>
+                <a:sym typeface="+mn-lt"/>
+              </a:rPr>
+              <a:t>例</a:t>
+            </a:r>
+          </a:p>
+        </p:txBody>
+      </p:sp>
+      <p:sp>
+        <p:nvSpPr>
+          <p:cNvPr id="9" name="Rectangle 46">
+            <a:extLst>
+              <a:ext uri="{FF2B5EF4-FFF2-40B4-BE49-F238E27FC236}">
+                <a16:creationId xmlns:a16="http://schemas.microsoft.com/office/drawing/2014/main" id="{DD27695A-DD80-0347-8B6E-CA905189E75E}"/>
+              </a:ext>
+            </a:extLst>
+          </p:cNvPr>
+          <p:cNvSpPr>
+            <a:spLocks noChangeArrowheads="1"/>
+          </p:cNvSpPr>
+          <p:nvPr/>
+        </p:nvSpPr>
+        <p:spPr bwMode="auto">
+          <a:xfrm>
+            <a:off x="348698" y="2618786"/>
+            <a:ext cx="359073" cy="564514"/>
+          </a:xfrm>
+          <a:prstGeom prst="rect">
+            <a:avLst/>
+          </a:prstGeom>
+          <a:noFill/>
+          <a:ln w="9525">
+            <a:noFill/>
+            <a:miter lim="800000"/>
+            <a:headEnd/>
+            <a:tailEnd/>
+          </a:ln>
+          <a:effectLst/>
+        </p:spPr>
+        <p:txBody>
+          <a:bodyPr wrap="none" lIns="0" tIns="0" rIns="0" bIns="0" anchor="t" anchorCtr="0">
+            <a:spAutoFit/>
+          </a:bodyPr>
+          <a:lstStyle/>
+          <a:p>
+            <a:pPr>
+              <a:lnSpc>
+                <a:spcPct val="150000"/>
+              </a:lnSpc>
+            </a:pPr>
+            <a:r>
+              <a:rPr kumimoji="1" lang="zh-CN" altLang="en-US" sz="2800" dirty="0">
+                <a:highlight>
+                  <a:srgbClr val="FFC000"/>
+                </a:highlight>
+                <a:cs typeface="+mn-ea"/>
+                <a:sym typeface="+mn-lt"/>
+              </a:rPr>
+              <a:t>解</a:t>
+            </a:r>
+            <a:endParaRPr kumimoji="1" lang="en-US" altLang="zh-CN" sz="2800" dirty="0">
+              <a:solidFill>
+                <a:srgbClr val="FFC000"/>
+              </a:solidFill>
+              <a:highlight>
+                <a:srgbClr val="FFC000"/>
+              </a:highlight>
+              <a:cs typeface="+mn-ea"/>
+              <a:sym typeface="+mn-lt"/>
+            </a:endParaRPr>
+          </a:p>
+        </p:txBody>
+      </p:sp>
+      <p:grpSp>
+        <p:nvGrpSpPr>
+          <p:cNvPr id="10" name="组合 5">
+            <a:extLst>
+              <a:ext uri="{FF2B5EF4-FFF2-40B4-BE49-F238E27FC236}">
+                <a16:creationId xmlns:a16="http://schemas.microsoft.com/office/drawing/2014/main" id="{3222D98B-02DE-3A42-AF8C-1C554574F783}"/>
+              </a:ext>
+            </a:extLst>
+          </p:cNvPr>
+          <p:cNvGrpSpPr/>
+          <p:nvPr/>
+        </p:nvGrpSpPr>
+        <p:grpSpPr>
+          <a:xfrm>
+            <a:off x="1630422" y="476672"/>
+            <a:ext cx="4458115" cy="1635300"/>
+            <a:chOff x="2765945" y="761133"/>
+            <a:chExt cx="4458115" cy="1635300"/>
+          </a:xfrm>
+        </p:grpSpPr>
+        <p:graphicFrame>
+          <p:nvGraphicFramePr>
+            <p:cNvPr id="11" name="Object 6">
+              <a:extLst>
+                <a:ext uri="{FF2B5EF4-FFF2-40B4-BE49-F238E27FC236}">
+                  <a16:creationId xmlns:a16="http://schemas.microsoft.com/office/drawing/2014/main" id="{62DFE7DA-2BA7-0848-81EE-5E12D45D6C64}"/>
+                </a:ext>
+              </a:extLst>
+            </p:cNvPr>
+            <p:cNvGraphicFramePr>
+              <a:graphicFrameLocks noChangeAspect="1"/>
+            </p:cNvGraphicFramePr>
+            <p:nvPr>
+              <p:extLst>
+                <p:ext uri="{D42A27DB-BD31-4B8C-83A1-F6EECF244321}">
+                  <p14:modId xmlns:p14="http://schemas.microsoft.com/office/powerpoint/2010/main" val="1118506456"/>
+                </p:ext>
+              </p:extLst>
+            </p:nvPr>
+          </p:nvGraphicFramePr>
+          <p:xfrm>
+            <a:off x="4186956" y="761133"/>
+            <a:ext cx="3037104" cy="1635300"/>
+          </p:xfrm>
+          <a:graphic>
+            <a:graphicData uri="http://schemas.openxmlformats.org/presentationml/2006/ole">
+              <mc:AlternateContent xmlns:mc="http://schemas.openxmlformats.org/markup-compatibility/2006">
+                <mc:Choice xmlns:v="urn:schemas-microsoft-com:vml" Requires="v">
+                  <p:oleObj spid="_x0000_s12293" name="Equation" r:id="rId11" imgW="1320480" imgH="711000" progId="Equation.DSMT4">
+                    <p:embed/>
+                  </p:oleObj>
+                </mc:Choice>
+                <mc:Fallback>
+                  <p:oleObj name="Equation" r:id="rId11" imgW="1320480" imgH="711000" progId="Equation.DSMT4">
+                    <p:embed/>
+                    <p:pic>
+                      <p:nvPicPr>
+                        <p:cNvPr id="25" name="Object 6">
+                          <a:extLst>
+                            <a:ext uri="{FF2B5EF4-FFF2-40B4-BE49-F238E27FC236}">
+                              <a16:creationId xmlns:a16="http://schemas.microsoft.com/office/drawing/2014/main" id="{1845537A-105A-4CBA-9FFA-65254B1C85F0}"/>
+                            </a:ext>
+                          </a:extLst>
+                        </p:cNvPr>
+                        <p:cNvPicPr>
+                          <a:picLocks noChangeAspect="1" noChangeArrowheads="1"/>
+                        </p:cNvPicPr>
+                        <p:nvPr/>
+                      </p:nvPicPr>
+                      <p:blipFill>
+                        <a:blip r:embed="rId12"/>
+                        <a:srcRect/>
+                        <a:stretch>
+                          <a:fillRect/>
+                        </a:stretch>
+                      </p:blipFill>
+                      <p:spPr bwMode="auto">
+                        <a:xfrm>
+                          <a:off x="4186956" y="761133"/>
+                          <a:ext cx="3037104" cy="1635300"/>
+                        </a:xfrm>
+                        <a:prstGeom prst="rect">
+                          <a:avLst/>
+                        </a:prstGeom>
+                        <a:noFill/>
+                        <a:extLst>
+                          <a:ext uri="{909E8E84-426E-40DD-AFC4-6F175D3DCCD1}">
+                            <a14:hiddenFill xmlns:a14="http://schemas.microsoft.com/office/drawing/2010/main">
+                              <a:solidFill>
+                                <a:srgbClr val="FFFFFF"/>
+                              </a:solidFill>
+                            </a14:hiddenFill>
+                          </a:ext>
+                        </a:extLst>
+                      </p:spPr>
+                    </p:pic>
+                  </p:oleObj>
+                </mc:Fallback>
+              </mc:AlternateContent>
+            </a:graphicData>
+          </a:graphic>
+        </p:graphicFrame>
+        <p:sp>
+          <p:nvSpPr>
+            <p:cNvPr id="12" name="文本框 33">
+              <a:extLst>
+                <a:ext uri="{FF2B5EF4-FFF2-40B4-BE49-F238E27FC236}">
+                  <a16:creationId xmlns:a16="http://schemas.microsoft.com/office/drawing/2014/main" id="{0B9A7AF9-7C9E-CE49-807D-A6EA0104F9A5}"/>
+                </a:ext>
+              </a:extLst>
+            </p:cNvPr>
+            <p:cNvSpPr txBox="1"/>
+            <p:nvPr/>
+          </p:nvSpPr>
+          <p:spPr>
+            <a:xfrm>
+              <a:off x="2765945" y="1311732"/>
+              <a:ext cx="1651572" cy="523220"/>
+            </a:xfrm>
+            <a:prstGeom prst="rect">
+              <a:avLst/>
+            </a:prstGeom>
+            <a:noFill/>
+          </p:spPr>
+          <p:txBody>
+            <a:bodyPr wrap="square">
+              <a:spAutoFit/>
+            </a:bodyPr>
+            <a:lstStyle/>
+            <a:p>
+              <a:r>
+                <a:rPr lang="zh-CN" altLang="en-US" sz="2800" dirty="0"/>
+                <a:t>解方程组</a:t>
+              </a:r>
+            </a:p>
+          </p:txBody>
+        </p:sp>
+      </p:grpSp>
+      <p:grpSp>
+        <p:nvGrpSpPr>
+          <p:cNvPr id="13" name="组合 6">
+            <a:extLst>
+              <a:ext uri="{FF2B5EF4-FFF2-40B4-BE49-F238E27FC236}">
+                <a16:creationId xmlns:a16="http://schemas.microsoft.com/office/drawing/2014/main" id="{24993C65-186D-B947-865D-64797ABAE20F}"/>
+              </a:ext>
+            </a:extLst>
+          </p:cNvPr>
+          <p:cNvGrpSpPr/>
+          <p:nvPr/>
+        </p:nvGrpSpPr>
+        <p:grpSpPr>
+          <a:xfrm>
+            <a:off x="683286" y="2299047"/>
+            <a:ext cx="3772614" cy="1422400"/>
+            <a:chOff x="2115990" y="2606975"/>
+            <a:chExt cx="3772614" cy="1422400"/>
+          </a:xfrm>
+        </p:grpSpPr>
+        <p:graphicFrame>
+          <p:nvGraphicFramePr>
+            <p:cNvPr id="14" name="Object 6">
+              <a:extLst>
+                <a:ext uri="{FF2B5EF4-FFF2-40B4-BE49-F238E27FC236}">
+                  <a16:creationId xmlns:a16="http://schemas.microsoft.com/office/drawing/2014/main" id="{65C53CA0-3477-2D41-B856-053CF33D5FC7}"/>
+                </a:ext>
+              </a:extLst>
+            </p:cNvPr>
+            <p:cNvGraphicFramePr>
+              <a:graphicFrameLocks noChangeAspect="1"/>
+            </p:cNvGraphicFramePr>
+            <p:nvPr>
+              <p:extLst>
+                <p:ext uri="{D42A27DB-BD31-4B8C-83A1-F6EECF244321}">
+                  <p14:modId xmlns:p14="http://schemas.microsoft.com/office/powerpoint/2010/main" val="2806527834"/>
+                </p:ext>
+              </p:extLst>
+            </p:nvPr>
+          </p:nvGraphicFramePr>
+          <p:xfrm>
+            <a:off x="3985192" y="2606975"/>
+            <a:ext cx="1903412" cy="1422400"/>
+          </p:xfrm>
+          <a:graphic>
+            <a:graphicData uri="http://schemas.openxmlformats.org/presentationml/2006/ole">
+              <mc:AlternateContent xmlns:mc="http://schemas.openxmlformats.org/markup-compatibility/2006">
+                <mc:Choice xmlns:v="urn:schemas-microsoft-com:vml" Requires="v">
+                  <p:oleObj spid="_x0000_s12294" name="Equation" r:id="rId13" imgW="952200" imgH="711000" progId="Equation.DSMT4">
+                    <p:embed/>
+                  </p:oleObj>
+                </mc:Choice>
+                <mc:Fallback>
+                  <p:oleObj name="Equation" r:id="rId13" imgW="952200" imgH="711000" progId="Equation.DSMT4">
+                    <p:embed/>
+                    <p:pic>
+                      <p:nvPicPr>
+                        <p:cNvPr id="27" name="Object 6">
+                          <a:extLst>
+                            <a:ext uri="{FF2B5EF4-FFF2-40B4-BE49-F238E27FC236}">
+                              <a16:creationId xmlns:a16="http://schemas.microsoft.com/office/drawing/2014/main" id="{BC94CD95-9207-4E55-B0F3-73664AA49B94}"/>
+                            </a:ext>
+                          </a:extLst>
+                        </p:cNvPr>
+                        <p:cNvPicPr>
+                          <a:picLocks noChangeAspect="1" noChangeArrowheads="1"/>
+                        </p:cNvPicPr>
+                        <p:nvPr/>
+                      </p:nvPicPr>
+                      <p:blipFill>
+                        <a:blip r:embed="rId14"/>
+                        <a:srcRect/>
+                        <a:stretch>
+                          <a:fillRect/>
+                        </a:stretch>
+                      </p:blipFill>
+                      <p:spPr bwMode="auto">
+                        <a:xfrm>
+                          <a:off x="3985192" y="2606975"/>
+                          <a:ext cx="1903412" cy="1422400"/>
+                        </a:xfrm>
+                        <a:prstGeom prst="rect">
+                          <a:avLst/>
+                        </a:prstGeom>
+                        <a:noFill/>
+                        <a:extLst>
+                          <a:ext uri="{909E8E84-426E-40DD-AFC4-6F175D3DCCD1}">
+                            <a14:hiddenFill xmlns:a14="http://schemas.microsoft.com/office/drawing/2010/main">
+                              <a:solidFill>
+                                <a:srgbClr val="FFFFFF"/>
+                              </a:solidFill>
+                            </a14:hiddenFill>
+                          </a:ext>
+                        </a:extLst>
+                      </p:spPr>
+                    </p:pic>
+                  </p:oleObj>
+                </mc:Fallback>
+              </mc:AlternateContent>
+            </a:graphicData>
+          </a:graphic>
+        </p:graphicFrame>
+        <p:sp>
+          <p:nvSpPr>
+            <p:cNvPr id="15" name="文本框 34">
+              <a:extLst>
+                <a:ext uri="{FF2B5EF4-FFF2-40B4-BE49-F238E27FC236}">
+                  <a16:creationId xmlns:a16="http://schemas.microsoft.com/office/drawing/2014/main" id="{25B3AE11-9CFD-5949-99CF-7E275BDD0A1C}"/>
+                </a:ext>
+              </a:extLst>
+            </p:cNvPr>
+            <p:cNvSpPr txBox="1"/>
+            <p:nvPr/>
+          </p:nvSpPr>
+          <p:spPr>
+            <a:xfrm>
+              <a:off x="2115990" y="3018098"/>
+              <a:ext cx="2301527" cy="523220"/>
+            </a:xfrm>
+            <a:prstGeom prst="rect">
+              <a:avLst/>
+            </a:prstGeom>
+            <a:noFill/>
+          </p:spPr>
+          <p:txBody>
+            <a:bodyPr wrap="square">
+              <a:spAutoFit/>
+            </a:bodyPr>
+            <a:lstStyle/>
+            <a:p>
+              <a:r>
+                <a:rPr lang="zh-CN" altLang="en-US" sz="2800" dirty="0"/>
+                <a:t>系数行列式</a:t>
+              </a:r>
+            </a:p>
+          </p:txBody>
+        </p:sp>
+      </p:grpSp>
+      <p:sp>
+        <p:nvSpPr>
+          <p:cNvPr id="16" name="文本框 35">
+            <a:extLst>
+              <a:ext uri="{FF2B5EF4-FFF2-40B4-BE49-F238E27FC236}">
+                <a16:creationId xmlns:a16="http://schemas.microsoft.com/office/drawing/2014/main" id="{3E36795E-3514-D746-857F-1D88E9CCD7A9}"/>
+              </a:ext>
+            </a:extLst>
+          </p:cNvPr>
+          <p:cNvSpPr txBox="1"/>
+          <p:nvPr/>
+        </p:nvSpPr>
+        <p:spPr>
+          <a:xfrm>
+            <a:off x="339379" y="3721447"/>
+            <a:ext cx="6130902" cy="523220"/>
+          </a:xfrm>
+          <a:prstGeom prst="rect">
+            <a:avLst/>
+          </a:prstGeom>
+          <a:noFill/>
+        </p:spPr>
+        <p:txBody>
+          <a:bodyPr wrap="square">
+            <a:spAutoFit/>
+          </a:bodyPr>
+          <a:lstStyle/>
+          <a:p>
+            <a:r>
+              <a:rPr lang="zh-CN" altLang="en-US" sz="2800" dirty="0"/>
+              <a:t>根据克莱姆法则知方程组有唯一解</a:t>
+            </a:r>
+          </a:p>
+        </p:txBody>
+      </p:sp>
+      <p:sp>
+        <p:nvSpPr>
+          <p:cNvPr id="17" name="文本框 36">
+            <a:extLst>
+              <a:ext uri="{FF2B5EF4-FFF2-40B4-BE49-F238E27FC236}">
+                <a16:creationId xmlns:a16="http://schemas.microsoft.com/office/drawing/2014/main" id="{EEA7AF47-FD78-E848-A536-B7AE888EADD5}"/>
+              </a:ext>
+            </a:extLst>
+          </p:cNvPr>
+          <p:cNvSpPr txBox="1"/>
+          <p:nvPr/>
+        </p:nvSpPr>
+        <p:spPr>
+          <a:xfrm>
+            <a:off x="211303" y="5714092"/>
+            <a:ext cx="633860" cy="523220"/>
+          </a:xfrm>
+          <a:prstGeom prst="rect">
+            <a:avLst/>
+          </a:prstGeom>
+          <a:noFill/>
+        </p:spPr>
+        <p:txBody>
+          <a:bodyPr wrap="square">
+            <a:spAutoFit/>
+          </a:bodyPr>
+          <a:lstStyle/>
+          <a:p>
+            <a:r>
+              <a:rPr lang="zh-CN" altLang="en-US" sz="2800" dirty="0"/>
+              <a:t>故</a:t>
+            </a:r>
+          </a:p>
+        </p:txBody>
+      </p:sp>
+      <p:graphicFrame>
+        <p:nvGraphicFramePr>
+          <p:cNvPr id="18" name="Object 6">
+            <a:extLst>
+              <a:ext uri="{FF2B5EF4-FFF2-40B4-BE49-F238E27FC236}">
+                <a16:creationId xmlns:a16="http://schemas.microsoft.com/office/drawing/2014/main" id="{838755EA-1B08-ED43-8A3A-5D882B67B07D}"/>
+              </a:ext>
+            </a:extLst>
+          </p:cNvPr>
+          <p:cNvGraphicFramePr>
+            <a:graphicFrameLocks noChangeAspect="1"/>
+          </p:cNvGraphicFramePr>
+          <p:nvPr>
+            <p:extLst>
+              <p:ext uri="{D42A27DB-BD31-4B8C-83A1-F6EECF244321}">
+                <p14:modId xmlns:p14="http://schemas.microsoft.com/office/powerpoint/2010/main" val="3403695348"/>
+              </p:ext>
+            </p:extLst>
+          </p:nvPr>
+        </p:nvGraphicFramePr>
+        <p:xfrm>
+          <a:off x="4395534" y="2794358"/>
+          <a:ext cx="482600" cy="330200"/>
+        </p:xfrm>
+        <a:graphic>
+          <a:graphicData uri="http://schemas.openxmlformats.org/presentationml/2006/ole">
+            <mc:AlternateContent xmlns:mc="http://schemas.openxmlformats.org/markup-compatibility/2006">
+              <mc:Choice xmlns:v="urn:schemas-microsoft-com:vml" Requires="v">
+                <p:oleObj spid="_x0000_s12295" name="Equation" r:id="rId15" imgW="241200" imgH="164880" progId="Equation.DSMT4">
+                  <p:embed/>
+                </p:oleObj>
+              </mc:Choice>
+              <mc:Fallback>
+                <p:oleObj name="Equation" r:id="rId15" imgW="241200" imgH="164880" progId="Equation.DSMT4">
+                  <p:embed/>
+                  <p:pic>
+                    <p:nvPicPr>
+                      <p:cNvPr id="45" name="Object 6">
+                        <a:extLst>
+                          <a:ext uri="{FF2B5EF4-FFF2-40B4-BE49-F238E27FC236}">
+                            <a16:creationId xmlns:a16="http://schemas.microsoft.com/office/drawing/2014/main" id="{E426399D-7653-406E-B1CF-038A1B935C5E}"/>
+                          </a:ext>
+                        </a:extLst>
+                      </p:cNvPr>
+                      <p:cNvPicPr>
+                        <a:picLocks noChangeAspect="1" noChangeArrowheads="1"/>
+                      </p:cNvPicPr>
+                      <p:nvPr/>
+                    </p:nvPicPr>
+                    <p:blipFill>
+                      <a:blip r:embed="rId16"/>
+                      <a:srcRect/>
+                      <a:stretch>
+                        <a:fillRect/>
+                      </a:stretch>
+                    </p:blipFill>
+                    <p:spPr bwMode="auto">
+                      <a:xfrm>
+                        <a:off x="4395534" y="2794358"/>
+                        <a:ext cx="482600" cy="330200"/>
+                      </a:xfrm>
+                      <a:prstGeom prst="rect">
+                        <a:avLst/>
+                      </a:prstGeom>
+                      <a:noFill/>
+                      <a:extLst>
+                        <a:ext uri="{909E8E84-426E-40DD-AFC4-6F175D3DCCD1}">
+                          <a14:hiddenFill xmlns:a14="http://schemas.microsoft.com/office/drawing/2010/main">
+                            <a:solidFill>
+                              <a:srgbClr val="FFFFFF"/>
+                            </a:solidFill>
+                          </a14:hiddenFill>
+                        </a:ext>
+                      </a:extLst>
+                    </p:spPr>
+                  </p:pic>
+                </p:oleObj>
+              </mc:Fallback>
+            </mc:AlternateContent>
+          </a:graphicData>
+        </a:graphic>
+      </p:graphicFrame>
+      <p:graphicFrame>
+        <p:nvGraphicFramePr>
+          <p:cNvPr id="19" name="Object 6">
+            <a:extLst>
+              <a:ext uri="{FF2B5EF4-FFF2-40B4-BE49-F238E27FC236}">
+                <a16:creationId xmlns:a16="http://schemas.microsoft.com/office/drawing/2014/main" id="{6E346DE7-3C6D-D749-81C4-AC469724670E}"/>
+              </a:ext>
+            </a:extLst>
+          </p:cNvPr>
+          <p:cNvGraphicFramePr>
+            <a:graphicFrameLocks noChangeAspect="1"/>
+          </p:cNvGraphicFramePr>
+          <p:nvPr>
+            <p:extLst>
+              <p:ext uri="{D42A27DB-BD31-4B8C-83A1-F6EECF244321}">
+                <p14:modId xmlns:p14="http://schemas.microsoft.com/office/powerpoint/2010/main" val="4108847494"/>
+              </p:ext>
+            </p:extLst>
+          </p:nvPr>
+        </p:nvGraphicFramePr>
+        <p:xfrm>
+          <a:off x="4899297" y="2794358"/>
+          <a:ext cx="558800" cy="406400"/>
+        </p:xfrm>
+        <a:graphic>
+          <a:graphicData uri="http://schemas.openxmlformats.org/presentationml/2006/ole">
+            <mc:AlternateContent xmlns:mc="http://schemas.openxmlformats.org/markup-compatibility/2006">
+              <mc:Choice xmlns:v="urn:schemas-microsoft-com:vml" Requires="v">
+                <p:oleObj spid="_x0000_s12296" name="Equation" r:id="rId17" imgW="279360" imgH="203040" progId="Equation.DSMT4">
+                  <p:embed/>
+                </p:oleObj>
+              </mc:Choice>
+              <mc:Fallback>
+                <p:oleObj name="Equation" r:id="rId17" imgW="279360" imgH="203040" progId="Equation.DSMT4">
+                  <p:embed/>
+                  <p:pic>
+                    <p:nvPicPr>
+                      <p:cNvPr id="46" name="Object 6">
+                        <a:extLst>
+                          <a:ext uri="{FF2B5EF4-FFF2-40B4-BE49-F238E27FC236}">
+                            <a16:creationId xmlns:a16="http://schemas.microsoft.com/office/drawing/2014/main" id="{D939E8E2-741F-41ED-BA3A-108AD7BE4329}"/>
+                          </a:ext>
+                        </a:extLst>
+                      </p:cNvPr>
+                      <p:cNvPicPr>
+                        <a:picLocks noChangeAspect="1" noChangeArrowheads="1"/>
+                      </p:cNvPicPr>
+                      <p:nvPr/>
+                    </p:nvPicPr>
+                    <p:blipFill>
+                      <a:blip r:embed="rId18"/>
+                      <a:srcRect/>
+                      <a:stretch>
+                        <a:fillRect/>
+                      </a:stretch>
+                    </p:blipFill>
+                    <p:spPr bwMode="auto">
+                      <a:xfrm>
+                        <a:off x="4899297" y="2794358"/>
+                        <a:ext cx="558800" cy="406400"/>
+                      </a:xfrm>
+                      <a:prstGeom prst="rect">
+                        <a:avLst/>
+                      </a:prstGeom>
+                      <a:noFill/>
+                      <a:extLst>
+                        <a:ext uri="{909E8E84-426E-40DD-AFC4-6F175D3DCCD1}">
+                          <a14:hiddenFill xmlns:a14="http://schemas.microsoft.com/office/drawing/2010/main">
+                            <a:solidFill>
+                              <a:srgbClr val="FFFFFF"/>
+                            </a:solidFill>
+                          </a14:hiddenFill>
+                        </a:ext>
+                      </a:extLst>
+                    </p:spPr>
+                  </p:pic>
+                </p:oleObj>
+              </mc:Fallback>
+            </mc:AlternateContent>
+          </a:graphicData>
+        </a:graphic>
+      </p:graphicFrame>
+      <p:graphicFrame>
+        <p:nvGraphicFramePr>
+          <p:cNvPr id="20" name="Object 6">
+            <a:extLst>
+              <a:ext uri="{FF2B5EF4-FFF2-40B4-BE49-F238E27FC236}">
+                <a16:creationId xmlns:a16="http://schemas.microsoft.com/office/drawing/2014/main" id="{C000FFC7-C467-C848-BDF6-527C4CBC9277}"/>
+              </a:ext>
+            </a:extLst>
+          </p:cNvPr>
+          <p:cNvGraphicFramePr>
+            <a:graphicFrameLocks noChangeAspect="1"/>
+          </p:cNvGraphicFramePr>
+          <p:nvPr>
+            <p:extLst>
+              <p:ext uri="{D42A27DB-BD31-4B8C-83A1-F6EECF244321}">
+                <p14:modId xmlns:p14="http://schemas.microsoft.com/office/powerpoint/2010/main" val="56959797"/>
+              </p:ext>
+            </p:extLst>
+          </p:nvPr>
+        </p:nvGraphicFramePr>
+        <p:xfrm>
+          <a:off x="2582915" y="4724819"/>
+          <a:ext cx="558800" cy="406400"/>
+        </p:xfrm>
+        <a:graphic>
+          <a:graphicData uri="http://schemas.openxmlformats.org/presentationml/2006/ole">
+            <mc:AlternateContent xmlns:mc="http://schemas.openxmlformats.org/markup-compatibility/2006">
+              <mc:Choice xmlns:v="urn:schemas-microsoft-com:vml" Requires="v">
+                <p:oleObj spid="_x0000_s12297" name="Equation" r:id="rId19" imgW="279360" imgH="203040" progId="Equation.DSMT4">
+                  <p:embed/>
+                </p:oleObj>
+              </mc:Choice>
+              <mc:Fallback>
+                <p:oleObj name="Equation" r:id="rId19" imgW="279360" imgH="203040" progId="Equation.DSMT4">
+                  <p:embed/>
+                  <p:pic>
+                    <p:nvPicPr>
+                      <p:cNvPr id="47" name="Object 6">
+                        <a:extLst>
+                          <a:ext uri="{FF2B5EF4-FFF2-40B4-BE49-F238E27FC236}">
+                            <a16:creationId xmlns:a16="http://schemas.microsoft.com/office/drawing/2014/main" id="{22A3446B-8661-495E-953D-B9F6B1722A8A}"/>
+                          </a:ext>
+                        </a:extLst>
+                      </p:cNvPr>
+                      <p:cNvPicPr>
+                        <a:picLocks noChangeAspect="1" noChangeArrowheads="1"/>
+                      </p:cNvPicPr>
+                      <p:nvPr/>
+                    </p:nvPicPr>
+                    <p:blipFill>
+                      <a:blip r:embed="rId20"/>
+                      <a:srcRect/>
+                      <a:stretch>
+                        <a:fillRect/>
+                      </a:stretch>
+                    </p:blipFill>
+                    <p:spPr bwMode="auto">
+                      <a:xfrm>
+                        <a:off x="2582915" y="4724819"/>
+                        <a:ext cx="558800" cy="406400"/>
+                      </a:xfrm>
+                      <a:prstGeom prst="rect">
+                        <a:avLst/>
+                      </a:prstGeom>
+                      <a:noFill/>
+                      <a:extLst>
+                        <a:ext uri="{909E8E84-426E-40DD-AFC4-6F175D3DCCD1}">
+                          <a14:hiddenFill xmlns:a14="http://schemas.microsoft.com/office/drawing/2010/main">
+                            <a:solidFill>
+                              <a:srgbClr val="FFFFFF"/>
+                            </a:solidFill>
+                          </a14:hiddenFill>
+                        </a:ext>
+                      </a:extLst>
+                    </p:spPr>
+                  </p:pic>
+                </p:oleObj>
+              </mc:Fallback>
+            </mc:AlternateContent>
+          </a:graphicData>
+        </a:graphic>
+      </p:graphicFrame>
+      <p:graphicFrame>
+        <p:nvGraphicFramePr>
+          <p:cNvPr id="21" name="Object 6">
+            <a:extLst>
+              <a:ext uri="{FF2B5EF4-FFF2-40B4-BE49-F238E27FC236}">
+                <a16:creationId xmlns:a16="http://schemas.microsoft.com/office/drawing/2014/main" id="{D1A36BB0-8C7A-924A-898B-7C9A83FF0AFB}"/>
+              </a:ext>
+            </a:extLst>
+          </p:cNvPr>
+          <p:cNvGraphicFramePr>
+            <a:graphicFrameLocks noChangeAspect="1"/>
+          </p:cNvGraphicFramePr>
+          <p:nvPr>
+            <p:extLst>
+              <p:ext uri="{D42A27DB-BD31-4B8C-83A1-F6EECF244321}">
+                <p14:modId xmlns:p14="http://schemas.microsoft.com/office/powerpoint/2010/main" val="1983656212"/>
+              </p:ext>
+            </p:extLst>
+          </p:nvPr>
+        </p:nvGraphicFramePr>
+        <p:xfrm>
+          <a:off x="5178697" y="4713524"/>
+          <a:ext cx="558800" cy="406400"/>
+        </p:xfrm>
+        <a:graphic>
+          <a:graphicData uri="http://schemas.openxmlformats.org/presentationml/2006/ole">
+            <mc:AlternateContent xmlns:mc="http://schemas.openxmlformats.org/markup-compatibility/2006">
+              <mc:Choice xmlns:v="urn:schemas-microsoft-com:vml" Requires="v">
+                <p:oleObj spid="_x0000_s12298" name="Equation" r:id="rId21" imgW="279360" imgH="203040" progId="Equation.DSMT4">
+                  <p:embed/>
+                </p:oleObj>
+              </mc:Choice>
+              <mc:Fallback>
+                <p:oleObj name="Equation" r:id="rId21" imgW="279360" imgH="203040" progId="Equation.DSMT4">
+                  <p:embed/>
+                  <p:pic>
+                    <p:nvPicPr>
+                      <p:cNvPr id="48" name="Object 6">
+                        <a:extLst>
+                          <a:ext uri="{FF2B5EF4-FFF2-40B4-BE49-F238E27FC236}">
+                            <a16:creationId xmlns:a16="http://schemas.microsoft.com/office/drawing/2014/main" id="{83597B51-EAAC-4665-9FF9-2FDBA95D81B5}"/>
+                          </a:ext>
+                        </a:extLst>
+                      </p:cNvPr>
+                      <p:cNvPicPr>
+                        <a:picLocks noChangeAspect="1" noChangeArrowheads="1"/>
+                      </p:cNvPicPr>
+                      <p:nvPr/>
+                    </p:nvPicPr>
+                    <p:blipFill>
+                      <a:blip r:embed="rId22"/>
+                      <a:srcRect/>
+                      <a:stretch>
+                        <a:fillRect/>
+                      </a:stretch>
+                    </p:blipFill>
+                    <p:spPr bwMode="auto">
+                      <a:xfrm>
+                        <a:off x="5178697" y="4713524"/>
+                        <a:ext cx="558800" cy="406400"/>
+                      </a:xfrm>
+                      <a:prstGeom prst="rect">
+                        <a:avLst/>
+                      </a:prstGeom>
+                      <a:noFill/>
+                      <a:extLst>
+                        <a:ext uri="{909E8E84-426E-40DD-AFC4-6F175D3DCCD1}">
+                          <a14:hiddenFill xmlns:a14="http://schemas.microsoft.com/office/drawing/2010/main">
+                            <a:solidFill>
+                              <a:srgbClr val="FFFFFF"/>
+                            </a:solidFill>
+                          </a14:hiddenFill>
+                        </a:ext>
+                      </a:extLst>
+                    </p:spPr>
+                  </p:pic>
+                </p:oleObj>
+              </mc:Fallback>
+            </mc:AlternateContent>
+          </a:graphicData>
+        </a:graphic>
+      </p:graphicFrame>
+      <p:graphicFrame>
+        <p:nvGraphicFramePr>
+          <p:cNvPr id="22" name="Object 6">
+            <a:extLst>
+              <a:ext uri="{FF2B5EF4-FFF2-40B4-BE49-F238E27FC236}">
+                <a16:creationId xmlns:a16="http://schemas.microsoft.com/office/drawing/2014/main" id="{E4181532-7DB6-A443-95A0-AD4CBB7D6C2F}"/>
+              </a:ext>
+            </a:extLst>
+          </p:cNvPr>
+          <p:cNvGraphicFramePr>
+            <a:graphicFrameLocks noChangeAspect="1"/>
+          </p:cNvGraphicFramePr>
+          <p:nvPr>
+            <p:extLst>
+              <p:ext uri="{D42A27DB-BD31-4B8C-83A1-F6EECF244321}">
+                <p14:modId xmlns:p14="http://schemas.microsoft.com/office/powerpoint/2010/main" val="1142645427"/>
+              </p:ext>
+            </p:extLst>
+          </p:nvPr>
+        </p:nvGraphicFramePr>
+        <p:xfrm>
+          <a:off x="8023497" y="4713524"/>
+          <a:ext cx="711200" cy="406400"/>
+        </p:xfrm>
+        <a:graphic>
+          <a:graphicData uri="http://schemas.openxmlformats.org/presentationml/2006/ole">
+            <mc:AlternateContent xmlns:mc="http://schemas.openxmlformats.org/markup-compatibility/2006">
+              <mc:Choice xmlns:v="urn:schemas-microsoft-com:vml" Requires="v">
+                <p:oleObj spid="_x0000_s12299" name="Equation" r:id="rId23" imgW="355320" imgH="203040" progId="Equation.DSMT4">
+                  <p:embed/>
+                </p:oleObj>
+              </mc:Choice>
+              <mc:Fallback>
+                <p:oleObj name="Equation" r:id="rId23" imgW="355320" imgH="203040" progId="Equation.DSMT4">
+                  <p:embed/>
+                  <p:pic>
+                    <p:nvPicPr>
+                      <p:cNvPr id="49" name="Object 6">
+                        <a:extLst>
+                          <a:ext uri="{FF2B5EF4-FFF2-40B4-BE49-F238E27FC236}">
+                            <a16:creationId xmlns:a16="http://schemas.microsoft.com/office/drawing/2014/main" id="{75CDAC97-AED4-45FD-9B5A-932DC2CE2B90}"/>
+                          </a:ext>
+                        </a:extLst>
+                      </p:cNvPr>
+                      <p:cNvPicPr>
+                        <a:picLocks noChangeAspect="1" noChangeArrowheads="1"/>
+                      </p:cNvPicPr>
+                      <p:nvPr/>
+                    </p:nvPicPr>
+                    <p:blipFill>
+                      <a:blip r:embed="rId24"/>
+                      <a:srcRect/>
+                      <a:stretch>
+                        <a:fillRect/>
+                      </a:stretch>
+                    </p:blipFill>
+                    <p:spPr bwMode="auto">
+                      <a:xfrm>
+                        <a:off x="8023497" y="4713524"/>
+                        <a:ext cx="711200" cy="406400"/>
+                      </a:xfrm>
+                      <a:prstGeom prst="rect">
+                        <a:avLst/>
+                      </a:prstGeom>
+                      <a:noFill/>
+                      <a:extLst>
+                        <a:ext uri="{909E8E84-426E-40DD-AFC4-6F175D3DCCD1}">
+                          <a14:hiddenFill xmlns:a14="http://schemas.microsoft.com/office/drawing/2010/main">
+                            <a:solidFill>
+                              <a:srgbClr val="FFFFFF"/>
+                            </a:solidFill>
+                          </a14:hiddenFill>
+                        </a:ext>
+                      </a:extLst>
+                    </p:spPr>
+                  </p:pic>
+                </p:oleObj>
+              </mc:Fallback>
+            </mc:AlternateContent>
+          </a:graphicData>
+        </a:graphic>
+      </p:graphicFrame>
+      <p:graphicFrame>
+        <p:nvGraphicFramePr>
+          <p:cNvPr id="23" name="Object 6">
+            <a:extLst>
+              <a:ext uri="{FF2B5EF4-FFF2-40B4-BE49-F238E27FC236}">
+                <a16:creationId xmlns:a16="http://schemas.microsoft.com/office/drawing/2014/main" id="{C9083C55-AC4A-9F4F-AB1E-89D6CBB13D5F}"/>
+              </a:ext>
+            </a:extLst>
+          </p:cNvPr>
+          <p:cNvGraphicFramePr>
+            <a:graphicFrameLocks noChangeAspect="1"/>
+          </p:cNvGraphicFramePr>
+          <p:nvPr>
+            <p:extLst>
+              <p:ext uri="{D42A27DB-BD31-4B8C-83A1-F6EECF244321}">
+                <p14:modId xmlns:p14="http://schemas.microsoft.com/office/powerpoint/2010/main" val="2940180435"/>
+              </p:ext>
+            </p:extLst>
+          </p:nvPr>
+        </p:nvGraphicFramePr>
+        <p:xfrm>
+          <a:off x="2181886" y="5590029"/>
+          <a:ext cx="1473200" cy="787400"/>
+        </p:xfrm>
+        <a:graphic>
+          <a:graphicData uri="http://schemas.openxmlformats.org/presentationml/2006/ole">
+            <mc:AlternateContent xmlns:mc="http://schemas.openxmlformats.org/markup-compatibility/2006">
+              <mc:Choice xmlns:v="urn:schemas-microsoft-com:vml" Requires="v">
+                <p:oleObj spid="_x0000_s12300" name="Equation" r:id="rId25" imgW="736560" imgH="393480" progId="Equation.DSMT4">
+                  <p:embed/>
+                </p:oleObj>
+              </mc:Choice>
+              <mc:Fallback>
+                <p:oleObj name="Equation" r:id="rId25" imgW="736560" imgH="393480" progId="Equation.DSMT4">
+                  <p:embed/>
+                  <p:pic>
+                    <p:nvPicPr>
+                      <p:cNvPr id="50" name="Object 6">
+                        <a:extLst>
+                          <a:ext uri="{FF2B5EF4-FFF2-40B4-BE49-F238E27FC236}">
+                            <a16:creationId xmlns:a16="http://schemas.microsoft.com/office/drawing/2014/main" id="{0F876CF2-D182-4D26-985E-EAE4C15EA61C}"/>
+                          </a:ext>
+                        </a:extLst>
+                      </p:cNvPr>
+                      <p:cNvPicPr>
+                        <a:picLocks noChangeAspect="1" noChangeArrowheads="1"/>
+                      </p:cNvPicPr>
+                      <p:nvPr/>
+                    </p:nvPicPr>
+                    <p:blipFill>
+                      <a:blip r:embed="rId26"/>
+                      <a:srcRect/>
+                      <a:stretch>
+                        <a:fillRect/>
+                      </a:stretch>
+                    </p:blipFill>
+                    <p:spPr bwMode="auto">
+                      <a:xfrm>
+                        <a:off x="2181886" y="5590029"/>
+                        <a:ext cx="1473200" cy="787400"/>
+                      </a:xfrm>
+                      <a:prstGeom prst="rect">
+                        <a:avLst/>
+                      </a:prstGeom>
+                      <a:noFill/>
+                      <a:extLst>
+                        <a:ext uri="{909E8E84-426E-40DD-AFC4-6F175D3DCCD1}">
+                          <a14:hiddenFill xmlns:a14="http://schemas.microsoft.com/office/drawing/2010/main">
+                            <a:solidFill>
+                              <a:srgbClr val="FFFFFF"/>
+                            </a:solidFill>
+                          </a14:hiddenFill>
+                        </a:ext>
+                      </a:extLst>
+                    </p:spPr>
+                  </p:pic>
+                </p:oleObj>
+              </mc:Fallback>
+            </mc:AlternateContent>
+          </a:graphicData>
+        </a:graphic>
+      </p:graphicFrame>
+      <p:graphicFrame>
+        <p:nvGraphicFramePr>
+          <p:cNvPr id="24" name="Object 6">
+            <a:extLst>
+              <a:ext uri="{FF2B5EF4-FFF2-40B4-BE49-F238E27FC236}">
+                <a16:creationId xmlns:a16="http://schemas.microsoft.com/office/drawing/2014/main" id="{3D2E49FB-39FB-764E-99D2-111AAA69666A}"/>
+              </a:ext>
+            </a:extLst>
+          </p:cNvPr>
+          <p:cNvGraphicFramePr>
+            <a:graphicFrameLocks noChangeAspect="1"/>
+          </p:cNvGraphicFramePr>
+          <p:nvPr>
+            <p:extLst>
+              <p:ext uri="{D42A27DB-BD31-4B8C-83A1-F6EECF244321}">
+                <p14:modId xmlns:p14="http://schemas.microsoft.com/office/powerpoint/2010/main" val="1830569146"/>
+              </p:ext>
+            </p:extLst>
+          </p:nvPr>
+        </p:nvGraphicFramePr>
+        <p:xfrm>
+          <a:off x="3655086" y="5589240"/>
+          <a:ext cx="1600200" cy="787400"/>
+        </p:xfrm>
+        <a:graphic>
+          <a:graphicData uri="http://schemas.openxmlformats.org/presentationml/2006/ole">
+            <mc:AlternateContent xmlns:mc="http://schemas.openxmlformats.org/markup-compatibility/2006">
+              <mc:Choice xmlns:v="urn:schemas-microsoft-com:vml" Requires="v">
+                <p:oleObj spid="_x0000_s12301" name="Equation" r:id="rId27" imgW="799920" imgH="393480" progId="Equation.DSMT4">
+                  <p:embed/>
+                </p:oleObj>
+              </mc:Choice>
+              <mc:Fallback>
+                <p:oleObj name="Equation" r:id="rId27" imgW="799920" imgH="393480" progId="Equation.DSMT4">
+                  <p:embed/>
+                  <p:pic>
+                    <p:nvPicPr>
+                      <p:cNvPr id="51" name="Object 6">
+                        <a:extLst>
+                          <a:ext uri="{FF2B5EF4-FFF2-40B4-BE49-F238E27FC236}">
+                            <a16:creationId xmlns:a16="http://schemas.microsoft.com/office/drawing/2014/main" id="{13642222-ABD8-4774-AF27-77E7870DA953}"/>
+                          </a:ext>
+                        </a:extLst>
+                      </p:cNvPr>
+                      <p:cNvPicPr>
+                        <a:picLocks noChangeAspect="1" noChangeArrowheads="1"/>
+                      </p:cNvPicPr>
+                      <p:nvPr/>
+                    </p:nvPicPr>
+                    <p:blipFill>
+                      <a:blip r:embed="rId28"/>
+                      <a:srcRect/>
+                      <a:stretch>
+                        <a:fillRect/>
+                      </a:stretch>
+                    </p:blipFill>
+                    <p:spPr bwMode="auto">
+                      <a:xfrm>
+                        <a:off x="3655086" y="5589240"/>
+                        <a:ext cx="1600200" cy="787400"/>
+                      </a:xfrm>
+                      <a:prstGeom prst="rect">
+                        <a:avLst/>
+                      </a:prstGeom>
+                      <a:noFill/>
+                      <a:extLst>
+                        <a:ext uri="{909E8E84-426E-40DD-AFC4-6F175D3DCCD1}">
+                          <a14:hiddenFill xmlns:a14="http://schemas.microsoft.com/office/drawing/2010/main">
+                            <a:solidFill>
+                              <a:srgbClr val="FFFFFF"/>
+                            </a:solidFill>
+                          </a14:hiddenFill>
+                        </a:ext>
+                      </a:extLst>
+                    </p:spPr>
+                  </p:pic>
+                </p:oleObj>
+              </mc:Fallback>
+            </mc:AlternateContent>
+          </a:graphicData>
+        </a:graphic>
+      </p:graphicFrame>
+    </p:spTree>
+    <p:extLst>
+      <p:ext uri="{BB962C8B-B14F-4D97-AF65-F5344CB8AC3E}">
+        <p14:creationId xmlns:p14="http://schemas.microsoft.com/office/powerpoint/2010/main" val="3928198655"/>
+      </p:ext>
+    </p:extLst>
+  </p:cSld>
+  <p:clrMapOvr>
+    <a:masterClrMapping/>
+  </p:clrMapOvr>
+  <p:transition spd="slow">
+    <p:split orient="vert"/>
+  </p:transition>
+  <p:timing>
+    <p:tnLst>
+      <p:par>
+        <p:cTn id="1" dur="indefinite" restart="never" nodeType="tmRoot">
+          <p:childTnLst>
+            <p:seq concurrent="1" nextAc="seek">
+              <p:cTn id="2" dur="indefinite" nodeType="mainSeq">
+                <p:childTnLst>
+                  <p:par>
+                    <p:cTn id="3" fill="hold">
+                      <p:stCondLst>
+                        <p:cond delay="indefinite"/>
+                      </p:stCondLst>
+                      <p:childTnLst>
+                        <p:par>
+                          <p:cTn id="4" fill="hold">
+                            <p:stCondLst>
+                              <p:cond delay="0"/>
+                            </p:stCondLst>
+                            <p:childTnLst>
+                              <p:par>
+                                <p:cTn id="5" presetID="22" presetClass="entr" presetSubtype="8" fill="hold" grpId="0" nodeType="clickEffect">
+                                  <p:stCondLst>
+                                    <p:cond delay="0"/>
+                                  </p:stCondLst>
+                                  <p:childTnLst>
+                                    <p:set>
+                                      <p:cBhvr>
+                                        <p:cTn id="6" dur="1" fill="hold">
+                                          <p:stCondLst>
+                                            <p:cond delay="0"/>
+                                          </p:stCondLst>
+                                        </p:cTn>
+                                        <p:tgtEl>
+                                          <p:spTgt spid="8"/>
+                                        </p:tgtEl>
+                                        <p:attrNameLst>
+                                          <p:attrName>style.visibility</p:attrName>
+                                        </p:attrNameLst>
+                                      </p:cBhvr>
+                                      <p:to>
+                                        <p:strVal val="visible"/>
+                                      </p:to>
+                                    </p:set>
+                                    <p:animEffect transition="in" filter="wipe(left)">
+                                      <p:cBhvr>
+                                        <p:cTn id="7" dur="500"/>
+                                        <p:tgtEl>
+                                          <p:spTgt spid="8"/>
+                                        </p:tgtEl>
+                                      </p:cBhvr>
+                                    </p:animEffect>
+                                  </p:childTnLst>
+                                </p:cTn>
+                              </p:par>
+                            </p:childTnLst>
+                          </p:cTn>
+                        </p:par>
+                        <p:par>
+                          <p:cTn id="8" fill="hold">
+                            <p:stCondLst>
+                              <p:cond delay="500"/>
+                            </p:stCondLst>
+                            <p:childTnLst>
+                              <p:par>
+                                <p:cTn id="9" presetID="22" presetClass="entr" presetSubtype="8" fill="hold" nodeType="afterEffect">
+                                  <p:stCondLst>
+                                    <p:cond delay="0"/>
+                                  </p:stCondLst>
+                                  <p:childTnLst>
+                                    <p:set>
+                                      <p:cBhvr>
+                                        <p:cTn id="10" dur="1" fill="hold">
+                                          <p:stCondLst>
+                                            <p:cond delay="0"/>
+                                          </p:stCondLst>
+                                        </p:cTn>
+                                        <p:tgtEl>
+                                          <p:spTgt spid="10"/>
+                                        </p:tgtEl>
+                                        <p:attrNameLst>
+                                          <p:attrName>style.visibility</p:attrName>
+                                        </p:attrNameLst>
+                                      </p:cBhvr>
+                                      <p:to>
+                                        <p:strVal val="visible"/>
+                                      </p:to>
+                                    </p:set>
+                                    <p:animEffect transition="in" filter="wipe(left)">
+                                      <p:cBhvr>
+                                        <p:cTn id="11" dur="500"/>
+                                        <p:tgtEl>
+                                          <p:spTgt spid="10"/>
+                                        </p:tgtEl>
+                                      </p:cBhvr>
+                                    </p:animEffect>
+                                  </p:childTnLst>
+                                </p:cTn>
+                              </p:par>
+                            </p:childTnLst>
+                          </p:cTn>
+                        </p:par>
+                      </p:childTnLst>
+                    </p:cTn>
+                  </p:par>
+                  <p:par>
+                    <p:cTn id="12" fill="hold">
+                      <p:stCondLst>
+                        <p:cond delay="indefinite"/>
+                      </p:stCondLst>
+                      <p:childTnLst>
+                        <p:par>
+                          <p:cTn id="13" fill="hold">
+                            <p:stCondLst>
+                              <p:cond delay="0"/>
+                            </p:stCondLst>
+                            <p:childTnLst>
+                              <p:par>
+                                <p:cTn id="14" presetID="22" presetClass="entr" presetSubtype="8" fill="hold" grpId="0" nodeType="clickEffect">
+                                  <p:stCondLst>
+                                    <p:cond delay="0"/>
+                                  </p:stCondLst>
+                                  <p:childTnLst>
+                                    <p:set>
+                                      <p:cBhvr>
+                                        <p:cTn id="15" dur="1" fill="hold">
+                                          <p:stCondLst>
+                                            <p:cond delay="0"/>
+                                          </p:stCondLst>
+                                        </p:cTn>
+                                        <p:tgtEl>
+                                          <p:spTgt spid="9"/>
+                                        </p:tgtEl>
+                                        <p:attrNameLst>
+                                          <p:attrName>style.visibility</p:attrName>
+                                        </p:attrNameLst>
+                                      </p:cBhvr>
+                                      <p:to>
+                                        <p:strVal val="visible"/>
+                                      </p:to>
+                                    </p:set>
+                                    <p:animEffect transition="in" filter="wipe(left)">
+                                      <p:cBhvr>
+                                        <p:cTn id="16" dur="500"/>
+                                        <p:tgtEl>
+                                          <p:spTgt spid="9"/>
+                                        </p:tgtEl>
+                                      </p:cBhvr>
+                                    </p:animEffect>
+                                  </p:childTnLst>
+                                </p:cTn>
+                              </p:par>
+                            </p:childTnLst>
+                          </p:cTn>
+                        </p:par>
+                        <p:par>
+                          <p:cTn id="17" fill="hold">
+                            <p:stCondLst>
+                              <p:cond delay="500"/>
+                            </p:stCondLst>
+                            <p:childTnLst>
+                              <p:par>
+                                <p:cTn id="18" presetID="22" presetClass="entr" presetSubtype="8" fill="hold" nodeType="afterEffect">
+                                  <p:stCondLst>
+                                    <p:cond delay="0"/>
+                                  </p:stCondLst>
+                                  <p:childTnLst>
+                                    <p:set>
+                                      <p:cBhvr>
+                                        <p:cTn id="19" dur="1" fill="hold">
+                                          <p:stCondLst>
+                                            <p:cond delay="0"/>
+                                          </p:stCondLst>
+                                        </p:cTn>
+                                        <p:tgtEl>
+                                          <p:spTgt spid="13"/>
+                                        </p:tgtEl>
+                                        <p:attrNameLst>
+                                          <p:attrName>style.visibility</p:attrName>
+                                        </p:attrNameLst>
+                                      </p:cBhvr>
+                                      <p:to>
+                                        <p:strVal val="visible"/>
+                                      </p:to>
+                                    </p:set>
+                                    <p:animEffect transition="in" filter="wipe(left)">
+                                      <p:cBhvr>
+                                        <p:cTn id="20" dur="500"/>
+                                        <p:tgtEl>
+                                          <p:spTgt spid="13"/>
+                                        </p:tgtEl>
+                                      </p:cBhvr>
+                                    </p:animEffect>
+                                  </p:childTnLst>
+                                </p:cTn>
+                              </p:par>
+                            </p:childTnLst>
+                          </p:cTn>
+                        </p:par>
+                      </p:childTnLst>
+                    </p:cTn>
+                  </p:par>
+                  <p:par>
+                    <p:cTn id="21" fill="hold">
+                      <p:stCondLst>
+                        <p:cond delay="indefinite"/>
+                      </p:stCondLst>
+                      <p:childTnLst>
+                        <p:par>
+                          <p:cTn id="22" fill="hold">
+                            <p:stCondLst>
+                              <p:cond delay="0"/>
+                            </p:stCondLst>
+                            <p:childTnLst>
+                              <p:par>
+                                <p:cTn id="23" presetID="22" presetClass="entr" presetSubtype="8" fill="hold" nodeType="clickEffect">
+                                  <p:stCondLst>
+                                    <p:cond delay="0"/>
+                                  </p:stCondLst>
+                                  <p:childTnLst>
+                                    <p:set>
+                                      <p:cBhvr>
+                                        <p:cTn id="24" dur="1" fill="hold">
+                                          <p:stCondLst>
+                                            <p:cond delay="0"/>
+                                          </p:stCondLst>
+                                        </p:cTn>
+                                        <p:tgtEl>
+                                          <p:spTgt spid="18"/>
+                                        </p:tgtEl>
+                                        <p:attrNameLst>
+                                          <p:attrName>style.visibility</p:attrName>
+                                        </p:attrNameLst>
+                                      </p:cBhvr>
+                                      <p:to>
+                                        <p:strVal val="visible"/>
+                                      </p:to>
+                                    </p:set>
+                                    <p:animEffect transition="in" filter="wipe(left)">
+                                      <p:cBhvr>
+                                        <p:cTn id="25" dur="500"/>
+                                        <p:tgtEl>
+                                          <p:spTgt spid="18"/>
+                                        </p:tgtEl>
+                                      </p:cBhvr>
+                                    </p:animEffect>
+                                  </p:childTnLst>
+                                </p:cTn>
+                              </p:par>
+                            </p:childTnLst>
+                          </p:cTn>
+                        </p:par>
+                      </p:childTnLst>
+                    </p:cTn>
+                  </p:par>
+                  <p:par>
+                    <p:cTn id="26" fill="hold">
+                      <p:stCondLst>
+                        <p:cond delay="indefinite"/>
+                      </p:stCondLst>
+                      <p:childTnLst>
+                        <p:par>
+                          <p:cTn id="27" fill="hold">
+                            <p:stCondLst>
+                              <p:cond delay="0"/>
+                            </p:stCondLst>
+                            <p:childTnLst>
+                              <p:par>
+                                <p:cTn id="28" presetID="22" presetClass="entr" presetSubtype="8" fill="hold" nodeType="clickEffect">
+                                  <p:stCondLst>
+                                    <p:cond delay="0"/>
+                                  </p:stCondLst>
+                                  <p:childTnLst>
+                                    <p:set>
+                                      <p:cBhvr>
+                                        <p:cTn id="29" dur="1" fill="hold">
+                                          <p:stCondLst>
+                                            <p:cond delay="0"/>
+                                          </p:stCondLst>
+                                        </p:cTn>
+                                        <p:tgtEl>
+                                          <p:spTgt spid="19"/>
+                                        </p:tgtEl>
+                                        <p:attrNameLst>
+                                          <p:attrName>style.visibility</p:attrName>
+                                        </p:attrNameLst>
+                                      </p:cBhvr>
+                                      <p:to>
+                                        <p:strVal val="visible"/>
+                                      </p:to>
+                                    </p:set>
+                                    <p:animEffect transition="in" filter="wipe(left)">
+                                      <p:cBhvr>
+                                        <p:cTn id="30" dur="500"/>
+                                        <p:tgtEl>
+                                          <p:spTgt spid="19"/>
+                                        </p:tgtEl>
+                                      </p:cBhvr>
+                                    </p:animEffect>
+                                  </p:childTnLst>
+                                </p:cTn>
+                              </p:par>
+                            </p:childTnLst>
+                          </p:cTn>
+                        </p:par>
+                      </p:childTnLst>
+                    </p:cTn>
+                  </p:par>
+                  <p:par>
+                    <p:cTn id="31" fill="hold">
+                      <p:stCondLst>
+                        <p:cond delay="indefinite"/>
+                      </p:stCondLst>
+                      <p:childTnLst>
+                        <p:par>
+                          <p:cTn id="32" fill="hold">
+                            <p:stCondLst>
+                              <p:cond delay="0"/>
+                            </p:stCondLst>
+                            <p:childTnLst>
+                              <p:par>
+                                <p:cTn id="33" presetID="22" presetClass="entr" presetSubtype="8" fill="hold" grpId="0" nodeType="clickEffect">
+                                  <p:stCondLst>
+                                    <p:cond delay="0"/>
+                                  </p:stCondLst>
+                                  <p:childTnLst>
+                                    <p:set>
+                                      <p:cBhvr>
+                                        <p:cTn id="34" dur="1" fill="hold">
+                                          <p:stCondLst>
+                                            <p:cond delay="0"/>
+                                          </p:stCondLst>
+                                        </p:cTn>
+                                        <p:tgtEl>
+                                          <p:spTgt spid="16"/>
+                                        </p:tgtEl>
+                                        <p:attrNameLst>
+                                          <p:attrName>style.visibility</p:attrName>
+                                        </p:attrNameLst>
+                                      </p:cBhvr>
+                                      <p:to>
+                                        <p:strVal val="visible"/>
+                                      </p:to>
+                                    </p:set>
+                                    <p:animEffect transition="in" filter="wipe(left)">
+                                      <p:cBhvr>
+                                        <p:cTn id="35" dur="500"/>
+                                        <p:tgtEl>
+                                          <p:spTgt spid="16"/>
+                                        </p:tgtEl>
+                                      </p:cBhvr>
+                                    </p:animEffect>
+                                  </p:childTnLst>
+                                </p:cTn>
+                              </p:par>
+                            </p:childTnLst>
+                          </p:cTn>
+                        </p:par>
+                      </p:childTnLst>
+                    </p:cTn>
+                  </p:par>
+                  <p:par>
+                    <p:cTn id="36" fill="hold">
+                      <p:stCondLst>
+                        <p:cond delay="indefinite"/>
+                      </p:stCondLst>
+                      <p:childTnLst>
+                        <p:par>
+                          <p:cTn id="37" fill="hold">
+                            <p:stCondLst>
+                              <p:cond delay="0"/>
+                            </p:stCondLst>
+                            <p:childTnLst>
+                              <p:par>
+                                <p:cTn id="38" presetID="22" presetClass="entr" presetSubtype="8" fill="hold" nodeType="clickEffect">
+                                  <p:stCondLst>
+                                    <p:cond delay="0"/>
+                                  </p:stCondLst>
+                                  <p:childTnLst>
+                                    <p:set>
+                                      <p:cBhvr>
+                                        <p:cTn id="39" dur="1" fill="hold">
+                                          <p:stCondLst>
+                                            <p:cond delay="0"/>
+                                          </p:stCondLst>
+                                        </p:cTn>
+                                        <p:tgtEl>
+                                          <p:spTgt spid="4"/>
+                                        </p:tgtEl>
+                                        <p:attrNameLst>
+                                          <p:attrName>style.visibility</p:attrName>
+                                        </p:attrNameLst>
+                                      </p:cBhvr>
+                                      <p:to>
+                                        <p:strVal val="visible"/>
+                                      </p:to>
+                                    </p:set>
+                                    <p:animEffect transition="in" filter="wipe(left)">
+                                      <p:cBhvr>
+                                        <p:cTn id="40" dur="500"/>
+                                        <p:tgtEl>
+                                          <p:spTgt spid="4"/>
+                                        </p:tgtEl>
+                                      </p:cBhvr>
+                                    </p:animEffect>
+                                  </p:childTnLst>
+                                </p:cTn>
+                              </p:par>
+                            </p:childTnLst>
+                          </p:cTn>
+                        </p:par>
+                      </p:childTnLst>
+                    </p:cTn>
+                  </p:par>
+                  <p:par>
+                    <p:cTn id="41" fill="hold">
+                      <p:stCondLst>
+                        <p:cond delay="indefinite"/>
+                      </p:stCondLst>
+                      <p:childTnLst>
+                        <p:par>
+                          <p:cTn id="42" fill="hold">
+                            <p:stCondLst>
+                              <p:cond delay="0"/>
+                            </p:stCondLst>
+                            <p:childTnLst>
+                              <p:par>
+                                <p:cTn id="43" presetID="22" presetClass="entr" presetSubtype="8" fill="hold" nodeType="clickEffect">
+                                  <p:stCondLst>
+                                    <p:cond delay="0"/>
+                                  </p:stCondLst>
+                                  <p:childTnLst>
+                                    <p:set>
+                                      <p:cBhvr>
+                                        <p:cTn id="44" dur="1" fill="hold">
+                                          <p:stCondLst>
+                                            <p:cond delay="0"/>
+                                          </p:stCondLst>
+                                        </p:cTn>
+                                        <p:tgtEl>
+                                          <p:spTgt spid="20"/>
+                                        </p:tgtEl>
+                                        <p:attrNameLst>
+                                          <p:attrName>style.visibility</p:attrName>
+                                        </p:attrNameLst>
+                                      </p:cBhvr>
+                                      <p:to>
+                                        <p:strVal val="visible"/>
+                                      </p:to>
+                                    </p:set>
+                                    <p:animEffect transition="in" filter="wipe(left)">
+                                      <p:cBhvr>
+                                        <p:cTn id="45" dur="500"/>
+                                        <p:tgtEl>
+                                          <p:spTgt spid="20"/>
+                                        </p:tgtEl>
+                                      </p:cBhvr>
+                                    </p:animEffect>
+                                  </p:childTnLst>
+                                </p:cTn>
+                              </p:par>
+                            </p:childTnLst>
+                          </p:cTn>
+                        </p:par>
+                      </p:childTnLst>
+                    </p:cTn>
+                  </p:par>
+                  <p:par>
+                    <p:cTn id="46" fill="hold">
+                      <p:stCondLst>
+                        <p:cond delay="indefinite"/>
+                      </p:stCondLst>
+                      <p:childTnLst>
+                        <p:par>
+                          <p:cTn id="47" fill="hold">
+                            <p:stCondLst>
+                              <p:cond delay="0"/>
+                            </p:stCondLst>
+                            <p:childTnLst>
+                              <p:par>
+                                <p:cTn id="48" presetID="22" presetClass="entr" presetSubtype="8" fill="hold" nodeType="clickEffect">
+                                  <p:stCondLst>
+                                    <p:cond delay="0"/>
+                                  </p:stCondLst>
+                                  <p:childTnLst>
+                                    <p:set>
+                                      <p:cBhvr>
+                                        <p:cTn id="49" dur="1" fill="hold">
+                                          <p:stCondLst>
+                                            <p:cond delay="0"/>
+                                          </p:stCondLst>
+                                        </p:cTn>
+                                        <p:tgtEl>
+                                          <p:spTgt spid="5"/>
+                                        </p:tgtEl>
+                                        <p:attrNameLst>
+                                          <p:attrName>style.visibility</p:attrName>
+                                        </p:attrNameLst>
+                                      </p:cBhvr>
+                                      <p:to>
+                                        <p:strVal val="visible"/>
+                                      </p:to>
+                                    </p:set>
+                                    <p:animEffect transition="in" filter="wipe(left)">
+                                      <p:cBhvr>
+                                        <p:cTn id="50" dur="500"/>
+                                        <p:tgtEl>
+                                          <p:spTgt spid="5"/>
+                                        </p:tgtEl>
+                                      </p:cBhvr>
+                                    </p:animEffect>
+                                  </p:childTnLst>
+                                </p:cTn>
+                              </p:par>
+                            </p:childTnLst>
+                          </p:cTn>
+                        </p:par>
+                      </p:childTnLst>
+                    </p:cTn>
+                  </p:par>
+                  <p:par>
+                    <p:cTn id="51" fill="hold">
+                      <p:stCondLst>
+                        <p:cond delay="indefinite"/>
+                      </p:stCondLst>
+                      <p:childTnLst>
+                        <p:par>
+                          <p:cTn id="52" fill="hold">
+                            <p:stCondLst>
+                              <p:cond delay="0"/>
+                            </p:stCondLst>
+                            <p:childTnLst>
+                              <p:par>
+                                <p:cTn id="53" presetID="22" presetClass="entr" presetSubtype="8" fill="hold" nodeType="clickEffect">
+                                  <p:stCondLst>
+                                    <p:cond delay="0"/>
+                                  </p:stCondLst>
+                                  <p:childTnLst>
+                                    <p:set>
+                                      <p:cBhvr>
+                                        <p:cTn id="54" dur="1" fill="hold">
+                                          <p:stCondLst>
+                                            <p:cond delay="0"/>
+                                          </p:stCondLst>
+                                        </p:cTn>
+                                        <p:tgtEl>
+                                          <p:spTgt spid="21"/>
+                                        </p:tgtEl>
+                                        <p:attrNameLst>
+                                          <p:attrName>style.visibility</p:attrName>
+                                        </p:attrNameLst>
+                                      </p:cBhvr>
+                                      <p:to>
+                                        <p:strVal val="visible"/>
+                                      </p:to>
+                                    </p:set>
+                                    <p:animEffect transition="in" filter="wipe(left)">
+                                      <p:cBhvr>
+                                        <p:cTn id="55" dur="500"/>
+                                        <p:tgtEl>
+                                          <p:spTgt spid="21"/>
+                                        </p:tgtEl>
+                                      </p:cBhvr>
+                                    </p:animEffect>
+                                  </p:childTnLst>
+                                </p:cTn>
+                              </p:par>
+                            </p:childTnLst>
+                          </p:cTn>
+                        </p:par>
+                      </p:childTnLst>
+                    </p:cTn>
+                  </p:par>
+                  <p:par>
+                    <p:cTn id="56" fill="hold">
+                      <p:stCondLst>
+                        <p:cond delay="indefinite"/>
+                      </p:stCondLst>
+                      <p:childTnLst>
+                        <p:par>
+                          <p:cTn id="57" fill="hold">
+                            <p:stCondLst>
+                              <p:cond delay="0"/>
+                            </p:stCondLst>
+                            <p:childTnLst>
+                              <p:par>
+                                <p:cTn id="58" presetID="22" presetClass="entr" presetSubtype="8" fill="hold" nodeType="clickEffect">
+                                  <p:stCondLst>
+                                    <p:cond delay="0"/>
+                                  </p:stCondLst>
+                                  <p:childTnLst>
+                                    <p:set>
+                                      <p:cBhvr>
+                                        <p:cTn id="59" dur="1" fill="hold">
+                                          <p:stCondLst>
+                                            <p:cond delay="0"/>
+                                          </p:stCondLst>
+                                        </p:cTn>
+                                        <p:tgtEl>
+                                          <p:spTgt spid="6"/>
+                                        </p:tgtEl>
+                                        <p:attrNameLst>
+                                          <p:attrName>style.visibility</p:attrName>
+                                        </p:attrNameLst>
+                                      </p:cBhvr>
+                                      <p:to>
+                                        <p:strVal val="visible"/>
+                                      </p:to>
+                                    </p:set>
+                                    <p:animEffect transition="in" filter="wipe(left)">
+                                      <p:cBhvr>
+                                        <p:cTn id="60" dur="500"/>
+                                        <p:tgtEl>
+                                          <p:spTgt spid="6"/>
+                                        </p:tgtEl>
+                                      </p:cBhvr>
+                                    </p:animEffect>
+                                  </p:childTnLst>
+                                </p:cTn>
+                              </p:par>
+                            </p:childTnLst>
+                          </p:cTn>
+                        </p:par>
+                      </p:childTnLst>
+                    </p:cTn>
+                  </p:par>
+                  <p:par>
+                    <p:cTn id="61" fill="hold">
+                      <p:stCondLst>
+                        <p:cond delay="indefinite"/>
+                      </p:stCondLst>
+                      <p:childTnLst>
+                        <p:par>
+                          <p:cTn id="62" fill="hold">
+                            <p:stCondLst>
+                              <p:cond delay="0"/>
+                            </p:stCondLst>
+                            <p:childTnLst>
+                              <p:par>
+                                <p:cTn id="63" presetID="22" presetClass="entr" presetSubtype="8" fill="hold" nodeType="clickEffect">
+                                  <p:stCondLst>
+                                    <p:cond delay="0"/>
+                                  </p:stCondLst>
+                                  <p:childTnLst>
+                                    <p:set>
+                                      <p:cBhvr>
+                                        <p:cTn id="64" dur="1" fill="hold">
+                                          <p:stCondLst>
+                                            <p:cond delay="0"/>
+                                          </p:stCondLst>
+                                        </p:cTn>
+                                        <p:tgtEl>
+                                          <p:spTgt spid="22"/>
+                                        </p:tgtEl>
+                                        <p:attrNameLst>
+                                          <p:attrName>style.visibility</p:attrName>
+                                        </p:attrNameLst>
+                                      </p:cBhvr>
+                                      <p:to>
+                                        <p:strVal val="visible"/>
+                                      </p:to>
+                                    </p:set>
+                                    <p:animEffect transition="in" filter="wipe(left)">
+                                      <p:cBhvr>
+                                        <p:cTn id="65" dur="500"/>
+                                        <p:tgtEl>
+                                          <p:spTgt spid="22"/>
+                                        </p:tgtEl>
+                                      </p:cBhvr>
+                                    </p:animEffect>
+                                  </p:childTnLst>
+                                </p:cTn>
+                              </p:par>
+                            </p:childTnLst>
+                          </p:cTn>
+                        </p:par>
+                      </p:childTnLst>
+                    </p:cTn>
+                  </p:par>
+                  <p:par>
+                    <p:cTn id="66" fill="hold">
+                      <p:stCondLst>
+                        <p:cond delay="indefinite"/>
+                      </p:stCondLst>
+                      <p:childTnLst>
+                        <p:par>
+                          <p:cTn id="67" fill="hold">
+                            <p:stCondLst>
+                              <p:cond delay="0"/>
+                            </p:stCondLst>
+                            <p:childTnLst>
+                              <p:par>
+                                <p:cTn id="68" presetID="22" presetClass="entr" presetSubtype="8" fill="hold" grpId="0" nodeType="clickEffect">
+                                  <p:stCondLst>
+                                    <p:cond delay="0"/>
+                                  </p:stCondLst>
+                                  <p:childTnLst>
+                                    <p:set>
+                                      <p:cBhvr>
+                                        <p:cTn id="69" dur="1" fill="hold">
+                                          <p:stCondLst>
+                                            <p:cond delay="0"/>
+                                          </p:stCondLst>
+                                        </p:cTn>
+                                        <p:tgtEl>
+                                          <p:spTgt spid="17"/>
+                                        </p:tgtEl>
+                                        <p:attrNameLst>
+                                          <p:attrName>style.visibility</p:attrName>
+                                        </p:attrNameLst>
+                                      </p:cBhvr>
+                                      <p:to>
+                                        <p:strVal val="visible"/>
+                                      </p:to>
+                                    </p:set>
+                                    <p:animEffect transition="in" filter="wipe(left)">
+                                      <p:cBhvr>
+                                        <p:cTn id="70" dur="500"/>
+                                        <p:tgtEl>
+                                          <p:spTgt spid="17"/>
+                                        </p:tgtEl>
+                                      </p:cBhvr>
+                                    </p:animEffect>
+                                  </p:childTnLst>
+                                </p:cTn>
+                              </p:par>
+                            </p:childTnLst>
+                          </p:cTn>
+                        </p:par>
+                      </p:childTnLst>
+                    </p:cTn>
+                  </p:par>
+                  <p:par>
+                    <p:cTn id="71" fill="hold">
+                      <p:stCondLst>
+                        <p:cond delay="indefinite"/>
+                      </p:stCondLst>
+                      <p:childTnLst>
+                        <p:par>
+                          <p:cTn id="72" fill="hold">
+                            <p:stCondLst>
+                              <p:cond delay="0"/>
+                            </p:stCondLst>
+                            <p:childTnLst>
+                              <p:par>
+                                <p:cTn id="73" presetID="22" presetClass="entr" presetSubtype="8" fill="hold" nodeType="clickEffect">
+                                  <p:stCondLst>
+                                    <p:cond delay="0"/>
+                                  </p:stCondLst>
+                                  <p:childTnLst>
+                                    <p:set>
+                                      <p:cBhvr>
+                                        <p:cTn id="74" dur="1" fill="hold">
+                                          <p:stCondLst>
+                                            <p:cond delay="0"/>
+                                          </p:stCondLst>
+                                        </p:cTn>
+                                        <p:tgtEl>
+                                          <p:spTgt spid="7"/>
+                                        </p:tgtEl>
+                                        <p:attrNameLst>
+                                          <p:attrName>style.visibility</p:attrName>
+                                        </p:attrNameLst>
+                                      </p:cBhvr>
+                                      <p:to>
+                                        <p:strVal val="visible"/>
+                                      </p:to>
+                                    </p:set>
+                                    <p:animEffect transition="in" filter="wipe(left)">
+                                      <p:cBhvr>
+                                        <p:cTn id="75" dur="500"/>
+                                        <p:tgtEl>
+                                          <p:spTgt spid="7"/>
+                                        </p:tgtEl>
+                                      </p:cBhvr>
+                                    </p:animEffect>
+                                  </p:childTnLst>
+                                </p:cTn>
+                              </p:par>
+                            </p:childTnLst>
+                          </p:cTn>
+                        </p:par>
+                      </p:childTnLst>
+                    </p:cTn>
+                  </p:par>
+                  <p:par>
+                    <p:cTn id="76" fill="hold">
+                      <p:stCondLst>
+                        <p:cond delay="indefinite"/>
+                      </p:stCondLst>
+                      <p:childTnLst>
+                        <p:par>
+                          <p:cTn id="77" fill="hold">
+                            <p:stCondLst>
+                              <p:cond delay="0"/>
+                            </p:stCondLst>
+                            <p:childTnLst>
+                              <p:par>
+                                <p:cTn id="78" presetID="22" presetClass="entr" presetSubtype="8" fill="hold" nodeType="clickEffect">
+                                  <p:stCondLst>
+                                    <p:cond delay="0"/>
+                                  </p:stCondLst>
+                                  <p:childTnLst>
+                                    <p:set>
+                                      <p:cBhvr>
+                                        <p:cTn id="79" dur="1" fill="hold">
+                                          <p:stCondLst>
+                                            <p:cond delay="0"/>
+                                          </p:stCondLst>
+                                        </p:cTn>
+                                        <p:tgtEl>
+                                          <p:spTgt spid="23"/>
+                                        </p:tgtEl>
+                                        <p:attrNameLst>
+                                          <p:attrName>style.visibility</p:attrName>
+                                        </p:attrNameLst>
+                                      </p:cBhvr>
+                                      <p:to>
+                                        <p:strVal val="visible"/>
+                                      </p:to>
+                                    </p:set>
+                                    <p:animEffect transition="in" filter="wipe(left)">
+                                      <p:cBhvr>
+                                        <p:cTn id="80" dur="500"/>
+                                        <p:tgtEl>
+                                          <p:spTgt spid="23"/>
+                                        </p:tgtEl>
+                                      </p:cBhvr>
+                                    </p:animEffect>
+                                  </p:childTnLst>
+                                </p:cTn>
+                              </p:par>
+                            </p:childTnLst>
+                          </p:cTn>
+                        </p:par>
+                      </p:childTnLst>
+                    </p:cTn>
+                  </p:par>
+                  <p:par>
+                    <p:cTn id="81" fill="hold">
+                      <p:stCondLst>
+                        <p:cond delay="indefinite"/>
+                      </p:stCondLst>
+                      <p:childTnLst>
+                        <p:par>
+                          <p:cTn id="82" fill="hold">
+                            <p:stCondLst>
+                              <p:cond delay="0"/>
+                            </p:stCondLst>
+                            <p:childTnLst>
+                              <p:par>
+                                <p:cTn id="83" presetID="22" presetClass="entr" presetSubtype="8" fill="hold" nodeType="clickEffect">
+                                  <p:stCondLst>
+                                    <p:cond delay="0"/>
+                                  </p:stCondLst>
+                                  <p:childTnLst>
+                                    <p:set>
+                                      <p:cBhvr>
+                                        <p:cTn id="84" dur="1" fill="hold">
+                                          <p:stCondLst>
+                                            <p:cond delay="0"/>
+                                          </p:stCondLst>
+                                        </p:cTn>
+                                        <p:tgtEl>
+                                          <p:spTgt spid="24"/>
+                                        </p:tgtEl>
+                                        <p:attrNameLst>
+                                          <p:attrName>style.visibility</p:attrName>
+                                        </p:attrNameLst>
+                                      </p:cBhvr>
+                                      <p:to>
+                                        <p:strVal val="visible"/>
+                                      </p:to>
+                                    </p:set>
+                                    <p:animEffect transition="in" filter="wipe(left)">
+                                      <p:cBhvr>
+                                        <p:cTn id="85" dur="500"/>
+                                        <p:tgtEl>
+                                          <p:spTgt spid="24"/>
+                                        </p:tgtEl>
+                                      </p:cBhvr>
+                                    </p:animEffect>
+                                  </p:childTnLst>
+                                </p:cTn>
+                              </p:par>
+                            </p:childTnLst>
+                          </p:cTn>
+                        </p:par>
+                      </p:childTnLst>
+                    </p:cTn>
+                  </p:par>
+                </p:childTnLst>
+              </p:cTn>
+              <p:prevCondLst>
+                <p:cond evt="onPrev" delay="0">
+                  <p:tgtEl>
+                    <p:sldTgt/>
+                  </p:tgtEl>
+                </p:cond>
+              </p:prevCondLst>
+              <p:nextCondLst>
+                <p:cond evt="onNext" delay="0">
+                  <p:tgtEl>
+                    <p:sldTgt/>
+                  </p:tgtEl>
+                </p:cond>
+              </p:nextCondLst>
+            </p:seq>
+          </p:childTnLst>
+        </p:cTn>
+      </p:par>
+    </p:tnLst>
+    <p:bldLst>
+      <p:bldP spid="8" grpId="0"/>
+      <p:bldP spid="9" grpId="0"/>
+      <p:bldP spid="16" grpId="0"/>
+      <p:bldP spid="17" grpId="0"/>
+    </p:bldLst>
+  </p:timing>
+</p:sld>
+</file>
+
+<file path=ppt/slides/slide14.xml><?xml version="1.0" encoding="utf-8"?>
 <p:sld xmlns:a="http://schemas.openxmlformats.org/drawingml/2006/main" xmlns:r="http://schemas.openxmlformats.org/officeDocument/2006/relationships" xmlns:p="http://schemas.openxmlformats.org/presentationml/2006/main" showMasterSp="0">
   <p:cSld>
     <p:spTree>
@@ -24478,7 +28775,7 @@
           <a:graphicData uri="http://schemas.openxmlformats.org/presentationml/2006/ole">
             <mc:AlternateContent xmlns:mc="http://schemas.openxmlformats.org/markup-compatibility/2006">
               <mc:Choice xmlns:v="urn:schemas-microsoft-com:vml" Requires="v">
-                <p:oleObj spid="_x0000_s9217" name="Equation" r:id="rId4" imgW="2933640" imgH="253800" progId="Equation.DSMT4">
+                <p:oleObj spid="_x0000_s9220" name="Equation" r:id="rId4" imgW="2933640" imgH="253800" progId="Equation.DSMT4">
                   <p:embed/>
                 </p:oleObj>
               </mc:Choice>
@@ -24592,7 +28889,7 @@
           <a:graphicData uri="http://schemas.openxmlformats.org/presentationml/2006/ole">
             <mc:AlternateContent xmlns:mc="http://schemas.openxmlformats.org/markup-compatibility/2006">
               <mc:Choice xmlns:v="urn:schemas-microsoft-com:vml" Requires="v">
-                <p:oleObj spid="_x0000_s9218" name="Equation" r:id="rId6" imgW="5270073" imgH="2232800" progId="Equation.DSMT4">
+                <p:oleObj spid="_x0000_s9221" name="Equation" r:id="rId6" imgW="5270073" imgH="2232800" progId="Equation.DSMT4">
                   <p:embed/>
                 </p:oleObj>
               </mc:Choice>
@@ -24707,7 +29004,7 @@
           <a:graphicData uri="http://schemas.openxmlformats.org/presentationml/2006/ole">
             <mc:AlternateContent xmlns:mc="http://schemas.openxmlformats.org/markup-compatibility/2006">
               <mc:Choice xmlns:v="urn:schemas-microsoft-com:vml" Requires="v">
-                <p:oleObj spid="_x0000_s9219" name="Equation" r:id="rId8" imgW="419040" imgH="228600" progId="Equation.DSMT4">
+                <p:oleObj spid="_x0000_s9222" name="Equation" r:id="rId8" imgW="419040" imgH="228600" progId="Equation.DSMT4">
                   <p:embed/>
                 </p:oleObj>
               </mc:Choice>
@@ -25250,7 +29547,7 @@
 </p:sld>
 </file>
 
-<file path=ppt/slides/slide13.xml><?xml version="1.0" encoding="utf-8"?>
+<file path=ppt/slides/slide15.xml><?xml version="1.0" encoding="utf-8"?>
 <p:sld xmlns:a="http://schemas.openxmlformats.org/drawingml/2006/main" xmlns:r="http://schemas.openxmlformats.org/officeDocument/2006/relationships" xmlns:p="http://schemas.openxmlformats.org/presentationml/2006/main" showMasterSp="0">
   <p:cSld>
     <p:spTree>
@@ -26251,7 +30548,7 @@
           <a:graphicData uri="http://schemas.openxmlformats.org/presentationml/2006/ole">
             <mc:AlternateContent xmlns:mc="http://schemas.openxmlformats.org/markup-compatibility/2006">
               <mc:Choice xmlns:v="urn:schemas-microsoft-com:vml" Requires="v">
-                <p:oleObj spid="_x0000_s10241" name="Equation" r:id="rId4" imgW="4232116" imgH="1906628" progId="Equation.DSMT4">
+                <p:oleObj spid="_x0000_s10243" name="Equation" r:id="rId4" imgW="4232116" imgH="1906628" progId="Equation.DSMT4">
                   <p:embed/>
                 </p:oleObj>
               </mc:Choice>
@@ -26320,7 +30617,7 @@
           <a:graphicData uri="http://schemas.openxmlformats.org/presentationml/2006/ole">
             <mc:AlternateContent xmlns:mc="http://schemas.openxmlformats.org/markup-compatibility/2006">
               <mc:Choice xmlns:v="urn:schemas-microsoft-com:vml" Requires="v">
-                <p:oleObj spid="_x0000_s10242" name="Equation" r:id="rId6" imgW="3549505" imgH="816869" progId="Equation.DSMT4">
+                <p:oleObj spid="_x0000_s10244" name="Equation" r:id="rId6" imgW="3549505" imgH="816869" progId="Equation.DSMT4">
                   <p:embed/>
                 </p:oleObj>
               </mc:Choice>
@@ -26726,7 +31023,7 @@
 </p:sld>
 </file>
 
-<file path=ppt/slides/slide14.xml><?xml version="1.0" encoding="utf-8"?>
+<file path=ppt/slides/slide16.xml><?xml version="1.0" encoding="utf-8"?>
 <p:sld xmlns:a="http://schemas.openxmlformats.org/drawingml/2006/main" xmlns:r="http://schemas.openxmlformats.org/officeDocument/2006/relationships" xmlns:p="http://schemas.openxmlformats.org/presentationml/2006/main" showMasterSp="0">
   <p:cSld>
     <p:bg>
@@ -31952,7 +36249,7 @@
           <a:graphicData uri="http://schemas.openxmlformats.org/presentationml/2006/ole">
             <mc:AlternateContent xmlns:mc="http://schemas.openxmlformats.org/markup-compatibility/2006">
               <mc:Choice xmlns:v="urn:schemas-microsoft-com:vml" Requires="v">
-                <p:oleObj spid="_x0000_s1025" name="Equation" r:id="rId4" imgW="2171520" imgH="799920" progId="Equation.DSMT4">
+                <p:oleObj spid="_x0000_s1026" name="Equation" r:id="rId4" imgW="2171520" imgH="799920" progId="Equation.DSMT4">
                   <p:embed/>
                 </p:oleObj>
               </mc:Choice>
@@ -32965,7 +37262,7 @@
           <a:graphicData uri="http://schemas.openxmlformats.org/presentationml/2006/ole">
             <mc:AlternateContent xmlns:mc="http://schemas.openxmlformats.org/markup-compatibility/2006">
               <mc:Choice xmlns:v="urn:schemas-microsoft-com:vml" Requires="v">
-                <p:oleObj spid="_x0000_s2049" name="Equation" r:id="rId3" imgW="1587240" imgH="799920" progId="Equation.DSMT4">
+                <p:oleObj spid="_x0000_s2051" name="Equation" r:id="rId3" imgW="1587240" imgH="799920" progId="Equation.DSMT4">
                   <p:embed/>
                 </p:oleObj>
               </mc:Choice>
@@ -33034,7 +37331,7 @@
           <a:graphicData uri="http://schemas.openxmlformats.org/presentationml/2006/ole">
             <mc:AlternateContent xmlns:mc="http://schemas.openxmlformats.org/markup-compatibility/2006">
               <mc:Choice xmlns:v="urn:schemas-microsoft-com:vml" Requires="v">
-                <p:oleObj spid="_x0000_s2050" name="Equation" r:id="rId5" imgW="5669343" imgH="1726982" progId="Equation.DSMT4">
+                <p:oleObj spid="_x0000_s2052" name="Equation" r:id="rId5" imgW="5669343" imgH="1726982" progId="Equation.DSMT4">
                   <p:embed/>
                 </p:oleObj>
               </mc:Choice>
@@ -33930,7 +38227,7 @@
           <a:graphicData uri="http://schemas.openxmlformats.org/presentationml/2006/ole">
             <mc:AlternateContent xmlns:mc="http://schemas.openxmlformats.org/markup-compatibility/2006">
               <mc:Choice xmlns:v="urn:schemas-microsoft-com:vml" Requires="v">
-                <p:oleObj spid="_x0000_s3073" name="Equation" r:id="rId3" imgW="596880" imgH="393480" progId="Equation.DSMT4">
+                <p:oleObj spid="_x0000_s3079" name="Equation" r:id="rId3" imgW="596880" imgH="393480" progId="Equation.DSMT4">
                   <p:embed/>
                 </p:oleObj>
               </mc:Choice>
@@ -34125,7 +38422,7 @@
           <a:graphicData uri="http://schemas.openxmlformats.org/presentationml/2006/ole">
             <mc:AlternateContent xmlns:mc="http://schemas.openxmlformats.org/markup-compatibility/2006">
               <mc:Choice xmlns:v="urn:schemas-microsoft-com:vml" Requires="v">
-                <p:oleObj spid="_x0000_s3074" name="Equation" r:id="rId5" imgW="5323357" imgH="820109" progId="Equation.DSMT4">
+                <p:oleObj spid="_x0000_s3080" name="Equation" r:id="rId5" imgW="5323357" imgH="820109" progId="Equation.DSMT4">
                   <p:embed/>
                 </p:oleObj>
               </mc:Choice>
@@ -34508,7 +38805,7 @@
           <a:graphicData uri="http://schemas.openxmlformats.org/presentationml/2006/ole">
             <mc:AlternateContent xmlns:mc="http://schemas.openxmlformats.org/markup-compatibility/2006">
               <mc:Choice xmlns:v="urn:schemas-microsoft-com:vml" Requires="v">
-                <p:oleObj spid="_x0000_s3075" name="Equation" r:id="rId7" imgW="622080" imgH="393480" progId="Equation.DSMT4">
+                <p:oleObj spid="_x0000_s3081" name="Equation" r:id="rId7" imgW="622080" imgH="393480" progId="Equation.DSMT4">
                   <p:embed/>
                 </p:oleObj>
               </mc:Choice>
@@ -34577,7 +38874,7 @@
           <a:graphicData uri="http://schemas.openxmlformats.org/presentationml/2006/ole">
             <mc:AlternateContent xmlns:mc="http://schemas.openxmlformats.org/markup-compatibility/2006">
               <mc:Choice xmlns:v="urn:schemas-microsoft-com:vml" Requires="v">
-                <p:oleObj spid="_x0000_s3076" name="Equation" r:id="rId9" imgW="622080" imgH="406080" progId="Equation.DSMT4">
+                <p:oleObj spid="_x0000_s3082" name="Equation" r:id="rId9" imgW="622080" imgH="406080" progId="Equation.DSMT4">
                   <p:embed/>
                 </p:oleObj>
               </mc:Choice>
@@ -34646,7 +38943,7 @@
           <a:graphicData uri="http://schemas.openxmlformats.org/presentationml/2006/ole">
             <mc:AlternateContent xmlns:mc="http://schemas.openxmlformats.org/markup-compatibility/2006">
               <mc:Choice xmlns:v="urn:schemas-microsoft-com:vml" Requires="v">
-                <p:oleObj spid="_x0000_s3077" name="Equation" r:id="rId11" imgW="5366200" imgH="460457" progId="Equation.DSMT4">
+                <p:oleObj spid="_x0000_s3083" name="Equation" r:id="rId11" imgW="5366200" imgH="460457" progId="Equation.DSMT4">
                   <p:embed/>
                 </p:oleObj>
               </mc:Choice>
@@ -34715,7 +39012,7 @@
           <a:graphicData uri="http://schemas.openxmlformats.org/presentationml/2006/ole">
             <mc:AlternateContent xmlns:mc="http://schemas.openxmlformats.org/markup-compatibility/2006">
               <mc:Choice xmlns:v="urn:schemas-microsoft-com:vml" Requires="v">
-                <p:oleObj spid="_x0000_s3078" name="Equation" r:id="rId13" imgW="177480" imgH="101520" progId="Equation.DSMT4">
+                <p:oleObj spid="_x0000_s3084" name="Equation" r:id="rId13" imgW="177480" imgH="101520" progId="Equation.DSMT4">
                   <p:embed/>
                 </p:oleObj>
               </mc:Choice>
@@ -36175,7 +40472,7 @@
           <a:graphicData uri="http://schemas.openxmlformats.org/presentationml/2006/ole">
             <mc:AlternateContent xmlns:mc="http://schemas.openxmlformats.org/markup-compatibility/2006">
               <mc:Choice xmlns:v="urn:schemas-microsoft-com:vml" Requires="v">
-                <p:oleObj spid="_x0000_s4097" name="Equation" r:id="rId4" imgW="5366200" imgH="460457" progId="Equation.DSMT4">
+                <p:oleObj spid="_x0000_s4102" name="Equation" r:id="rId4" imgW="5366200" imgH="460457" progId="Equation.DSMT4">
                   <p:embed/>
                 </p:oleObj>
               </mc:Choice>
@@ -36454,7 +40751,7 @@
           <a:graphicData uri="http://schemas.openxmlformats.org/presentationml/2006/ole">
             <mc:AlternateContent xmlns:mc="http://schemas.openxmlformats.org/markup-compatibility/2006">
               <mc:Choice xmlns:v="urn:schemas-microsoft-com:vml" Requires="v">
-                <p:oleObj spid="_x0000_s4098" name="Equation" r:id="rId6" imgW="1638000" imgH="228600" progId="Equation.DSMT4">
+                <p:oleObj spid="_x0000_s4103" name="Equation" r:id="rId6" imgW="1638000" imgH="228600" progId="Equation.DSMT4">
                   <p:embed/>
                 </p:oleObj>
               </mc:Choice>
@@ -36607,7 +40904,7 @@
           <a:graphicData uri="http://schemas.openxmlformats.org/presentationml/2006/ole">
             <mc:AlternateContent xmlns:mc="http://schemas.openxmlformats.org/markup-compatibility/2006">
               <mc:Choice xmlns:v="urn:schemas-microsoft-com:vml" Requires="v">
-                <p:oleObj spid="_x0000_s4099" name="Equation" r:id="rId8" imgW="4813200" imgH="228600" progId="Equation.DSMT4">
+                <p:oleObj spid="_x0000_s4104" name="Equation" r:id="rId8" imgW="4813200" imgH="228600" progId="Equation.DSMT4">
                   <p:embed/>
                 </p:oleObj>
               </mc:Choice>
@@ -36683,7 +40980,7 @@
           <a:graphicData uri="http://schemas.openxmlformats.org/presentationml/2006/ole">
             <mc:AlternateContent xmlns:mc="http://schemas.openxmlformats.org/markup-compatibility/2006">
               <mc:Choice xmlns:v="urn:schemas-microsoft-com:vml" Requires="v">
-                <p:oleObj spid="_x0000_s4100" name="Equation" r:id="rId10" imgW="4711680" imgH="457200" progId="Equation.DSMT4">
+                <p:oleObj spid="_x0000_s4105" name="Equation" r:id="rId10" imgW="4711680" imgH="457200" progId="Equation.DSMT4">
                   <p:embed/>
                 </p:oleObj>
               </mc:Choice>
@@ -36759,7 +41056,7 @@
           <a:graphicData uri="http://schemas.openxmlformats.org/presentationml/2006/ole">
             <mc:AlternateContent xmlns:mc="http://schemas.openxmlformats.org/markup-compatibility/2006">
               <mc:Choice xmlns:v="urn:schemas-microsoft-com:vml" Requires="v">
-                <p:oleObj spid="_x0000_s4101" name="Equation" r:id="rId12" imgW="431640" imgH="228600" progId="Equation.DSMT4">
+                <p:oleObj spid="_x0000_s4106" name="Equation" r:id="rId12" imgW="431640" imgH="228600" progId="Equation.DSMT4">
                   <p:embed/>
                 </p:oleObj>
               </mc:Choice>
@@ -37603,7 +41900,7 @@
           <a:graphicData uri="http://schemas.openxmlformats.org/presentationml/2006/ole">
             <mc:AlternateContent xmlns:mc="http://schemas.openxmlformats.org/markup-compatibility/2006">
               <mc:Choice xmlns:v="urn:schemas-microsoft-com:vml" Requires="v">
-                <p:oleObj spid="_x0000_s5121" name="Equation" r:id="rId3" imgW="3390840" imgH="469800" progId="Equation.DSMT4">
+                <p:oleObj spid="_x0000_s5124" name="Equation" r:id="rId3" imgW="3390840" imgH="469800" progId="Equation.DSMT4">
                   <p:embed/>
                 </p:oleObj>
               </mc:Choice>
@@ -37698,7 +41995,7 @@
           <a:graphicData uri="http://schemas.openxmlformats.org/presentationml/2006/ole">
             <mc:AlternateContent xmlns:mc="http://schemas.openxmlformats.org/markup-compatibility/2006">
               <mc:Choice xmlns:v="urn:schemas-microsoft-com:vml" Requires="v">
-                <p:oleObj spid="_x0000_s5122" name="Equation" r:id="rId5" imgW="1536480" imgH="419040" progId="Equation.DSMT4">
+                <p:oleObj spid="_x0000_s5125" name="Equation" r:id="rId5" imgW="1536480" imgH="419040" progId="Equation.DSMT4">
                   <p:embed/>
                 </p:oleObj>
               </mc:Choice>
@@ -38020,7 +42317,7 @@
           <a:graphicData uri="http://schemas.openxmlformats.org/presentationml/2006/ole">
             <mc:AlternateContent xmlns:mc="http://schemas.openxmlformats.org/markup-compatibility/2006">
               <mc:Choice xmlns:v="urn:schemas-microsoft-com:vml" Requires="v">
-                <p:oleObj spid="_x0000_s5123" name="Equation" r:id="rId7" imgW="723600" imgH="469800" progId="Equation.DSMT4">
+                <p:oleObj spid="_x0000_s5126" name="Equation" r:id="rId7" imgW="723600" imgH="469800" progId="Equation.DSMT4">
                   <p:embed/>
                 </p:oleObj>
               </mc:Choice>
@@ -39739,7 +44036,7 @@
           <a:graphicData uri="http://schemas.openxmlformats.org/presentationml/2006/ole">
             <mc:AlternateContent xmlns:mc="http://schemas.openxmlformats.org/markup-compatibility/2006">
               <mc:Choice xmlns:v="urn:schemas-microsoft-com:vml" Requires="v">
-                <p:oleObj spid="_x0000_s6145" name="Equation" r:id="rId5" imgW="1993680" imgH="799920" progId="Equation.DSMT4">
+                <p:oleObj spid="_x0000_s6146" name="Equation" r:id="rId5" imgW="1993680" imgH="799920" progId="Equation.DSMT4">
                   <p:embed/>
                 </p:oleObj>
               </mc:Choice>

--- a/files/2025_2_LM/1017_0105.pptx
+++ b/files/2025_2_LM/1017_0105.pptx
@@ -8,7 +8,7 @@
     <p:sldMasterId id="2147487332" r:id="rId4"/>
   </p:sldMasterIdLst>
   <p:notesMasterIdLst>
-    <p:notesMasterId r:id="rId21"/>
+    <p:notesMasterId r:id="rId24"/>
   </p:notesMasterIdLst>
   <p:sldIdLst>
     <p:sldId id="1383" r:id="rId5"/>
@@ -26,7 +26,10 @@
     <p:sldId id="1385" r:id="rId17"/>
     <p:sldId id="1379" r:id="rId18"/>
     <p:sldId id="1381" r:id="rId19"/>
-    <p:sldId id="1357" r:id="rId20"/>
+    <p:sldId id="1386" r:id="rId20"/>
+    <p:sldId id="1387" r:id="rId21"/>
+    <p:sldId id="1388" r:id="rId22"/>
+    <p:sldId id="1357" r:id="rId23"/>
   </p:sldIdLst>
   <p:sldSz cx="9144000" cy="6858000" type="screen4x3"/>
   <p:notesSz cx="6858000" cy="9144000"/>
@@ -284,7 +287,7 @@
               <a:pPr>
                 <a:defRPr/>
               </a:pPr>
-              <a:t>2026/10/10</a:t>
+              <a:t>2026/10/13</a:t>
             </a:fld>
             <a:endParaRPr lang="zh-CN" altLang="en-US"/>
           </a:p>
@@ -1163,7 +1166,7 @@
               <a:pPr>
                 <a:defRPr/>
               </a:pPr>
-              <a:t>2026/10/10</a:t>
+              <a:t>2026/10/13</a:t>
             </a:fld>
             <a:endParaRPr lang="zh-CN" altLang="en-US"/>
           </a:p>
@@ -1421,7 +1424,7 @@
               <a:pPr>
                 <a:defRPr/>
               </a:pPr>
-              <a:t>2026/10/10</a:t>
+              <a:t>2026/10/13</a:t>
             </a:fld>
             <a:endParaRPr lang="zh-CN" altLang="en-US"/>
           </a:p>
@@ -4815,7 +4818,7 @@
               <a:pPr>
                 <a:defRPr/>
               </a:pPr>
-              <a:t>2026/10/10</a:t>
+              <a:t>2026/10/13</a:t>
             </a:fld>
             <a:endParaRPr lang="zh-CN" altLang="en-US"/>
           </a:p>
@@ -5033,7 +5036,7 @@
               <a:pPr>
                 <a:defRPr/>
               </a:pPr>
-              <a:t>2026/10/10</a:t>
+              <a:t>2026/10/13</a:t>
             </a:fld>
             <a:endParaRPr lang="zh-CN" altLang="en-US"/>
           </a:p>
@@ -21193,7 +21196,7 @@
           <a:graphicData uri="http://schemas.openxmlformats.org/presentationml/2006/ole">
             <mc:AlternateContent xmlns:mc="http://schemas.openxmlformats.org/markup-compatibility/2006">
               <mc:Choice xmlns:v="urn:schemas-microsoft-com:vml" Requires="v">
-                <p:oleObj spid="_x0000_s7172" name="Equation" r:id="rId4" imgW="3576867" imgH="2016432" progId="Equation.DSMT4">
+                <p:oleObj spid="_x0000_s7178" name="Equation" r:id="rId4" imgW="3576867" imgH="2016432" progId="Equation.DSMT4">
                   <p:embed/>
                 </p:oleObj>
               </mc:Choice>
@@ -21405,7 +21408,7 @@
           <a:graphicData uri="http://schemas.openxmlformats.org/presentationml/2006/ole">
             <mc:AlternateContent xmlns:mc="http://schemas.openxmlformats.org/markup-compatibility/2006">
               <mc:Choice xmlns:v="urn:schemas-microsoft-com:vml" Requires="v">
-                <p:oleObj spid="_x0000_s7173" name="Equation" r:id="rId6" imgW="596880" imgH="203040" progId="Equation.DSMT4">
+                <p:oleObj spid="_x0000_s7179" name="Equation" r:id="rId6" imgW="596880" imgH="203040" progId="Equation.DSMT4">
                   <p:embed/>
                 </p:oleObj>
               </mc:Choice>
@@ -21474,7 +21477,7 @@
           <a:graphicData uri="http://schemas.openxmlformats.org/presentationml/2006/ole">
             <mc:AlternateContent xmlns:mc="http://schemas.openxmlformats.org/markup-compatibility/2006">
               <mc:Choice xmlns:v="urn:schemas-microsoft-com:vml" Requires="v">
-                <p:oleObj spid="_x0000_s7174" name="Equation" r:id="rId8" imgW="1371600" imgH="787320" progId="Equation.DSMT4">
+                <p:oleObj spid="_x0000_s7180" name="Equation" r:id="rId8" imgW="1371600" imgH="787320" progId="Equation.DSMT4">
                   <p:embed/>
                 </p:oleObj>
               </mc:Choice>
@@ -22380,7 +22383,7 @@
           <a:graphicData uri="http://schemas.openxmlformats.org/presentationml/2006/ole">
             <mc:AlternateContent xmlns:mc="http://schemas.openxmlformats.org/markup-compatibility/2006">
               <mc:Choice xmlns:v="urn:schemas-microsoft-com:vml" Requires="v">
-                <p:oleObj spid="_x0000_s8201" name="Equation" r:id="rId4" imgW="3958135" imgH="1688821" progId="Equation.DSMT4">
+                <p:oleObj spid="_x0000_s8217" name="Equation" r:id="rId4" imgW="3958135" imgH="1688821" progId="Equation.DSMT4">
                   <p:embed/>
                 </p:oleObj>
               </mc:Choice>
@@ -22449,7 +22452,7 @@
           <a:graphicData uri="http://schemas.openxmlformats.org/presentationml/2006/ole">
             <mc:AlternateContent xmlns:mc="http://schemas.openxmlformats.org/markup-compatibility/2006">
               <mc:Choice xmlns:v="urn:schemas-microsoft-com:vml" Requires="v">
-                <p:oleObj spid="_x0000_s8202" name="Equation" r:id="rId6" imgW="1930320" imgH="787320" progId="Equation.DSMT4">
+                <p:oleObj spid="_x0000_s8218" name="Equation" r:id="rId6" imgW="1930320" imgH="787320" progId="Equation.DSMT4">
                   <p:embed/>
                 </p:oleObj>
               </mc:Choice>
@@ -22525,7 +22528,7 @@
           <a:graphicData uri="http://schemas.openxmlformats.org/presentationml/2006/ole">
             <mc:AlternateContent xmlns:mc="http://schemas.openxmlformats.org/markup-compatibility/2006">
               <mc:Choice xmlns:v="urn:schemas-microsoft-com:vml" Requires="v">
-                <p:oleObj spid="_x0000_s8203" name="Equation" r:id="rId8" imgW="3986937" imgH="1688821" progId="Equation.DSMT4">
+                <p:oleObj spid="_x0000_s8219" name="Equation" r:id="rId8" imgW="3986937" imgH="1688821" progId="Equation.DSMT4">
                   <p:embed/>
                 </p:oleObj>
               </mc:Choice>
@@ -22594,7 +22597,7 @@
           <a:graphicData uri="http://schemas.openxmlformats.org/presentationml/2006/ole">
             <mc:AlternateContent xmlns:mc="http://schemas.openxmlformats.org/markup-compatibility/2006">
               <mc:Choice xmlns:v="urn:schemas-microsoft-com:vml" Requires="v">
-                <p:oleObj spid="_x0000_s8204" name="Equation" r:id="rId10" imgW="3795043" imgH="1688821" progId="Equation.DSMT4">
+                <p:oleObj spid="_x0000_s8220" name="Equation" r:id="rId10" imgW="3795043" imgH="1688821" progId="Equation.DSMT4">
                   <p:embed/>
                 </p:oleObj>
               </mc:Choice>
@@ -22701,7 +22704,7 @@
           <a:graphicData uri="http://schemas.openxmlformats.org/presentationml/2006/ole">
             <mc:AlternateContent xmlns:mc="http://schemas.openxmlformats.org/markup-compatibility/2006">
               <mc:Choice xmlns:v="urn:schemas-microsoft-com:vml" Requires="v">
-                <p:oleObj spid="_x0000_s8205" name="Equation" r:id="rId12" imgW="1155600" imgH="393480" progId="Equation.DSMT4">
+                <p:oleObj spid="_x0000_s8221" name="Equation" r:id="rId12" imgW="1155600" imgH="393480" progId="Equation.DSMT4">
                   <p:embed/>
                 </p:oleObj>
               </mc:Choice>
@@ -22777,7 +22780,7 @@
           <a:graphicData uri="http://schemas.openxmlformats.org/presentationml/2006/ole">
             <mc:AlternateContent xmlns:mc="http://schemas.openxmlformats.org/markup-compatibility/2006">
               <mc:Choice xmlns:v="urn:schemas-microsoft-com:vml" Requires="v">
-                <p:oleObj spid="_x0000_s8206" name="Equation" r:id="rId14" imgW="1155600" imgH="393480" progId="Equation.DSMT4">
+                <p:oleObj spid="_x0000_s8222" name="Equation" r:id="rId14" imgW="1155600" imgH="393480" progId="Equation.DSMT4">
                   <p:embed/>
                 </p:oleObj>
               </mc:Choice>
@@ -22853,7 +22856,7 @@
           <a:graphicData uri="http://schemas.openxmlformats.org/presentationml/2006/ole">
             <mc:AlternateContent xmlns:mc="http://schemas.openxmlformats.org/markup-compatibility/2006">
               <mc:Choice xmlns:v="urn:schemas-microsoft-com:vml" Requires="v">
-                <p:oleObj spid="_x0000_s8207" name="Equation" r:id="rId16" imgW="1422360" imgH="393480" progId="Equation.DSMT4">
+                <p:oleObj spid="_x0000_s8223" name="Equation" r:id="rId16" imgW="1422360" imgH="393480" progId="Equation.DSMT4">
                   <p:embed/>
                 </p:oleObj>
               </mc:Choice>
@@ -22929,7 +22932,7 @@
           <a:graphicData uri="http://schemas.openxmlformats.org/presentationml/2006/ole">
             <mc:AlternateContent xmlns:mc="http://schemas.openxmlformats.org/markup-compatibility/2006">
               <mc:Choice xmlns:v="urn:schemas-microsoft-com:vml" Requires="v">
-                <p:oleObj spid="_x0000_s8208" name="Equation" r:id="rId18" imgW="1333440" imgH="406080" progId="Equation.DSMT4">
+                <p:oleObj spid="_x0000_s8224" name="Equation" r:id="rId18" imgW="1333440" imgH="406080" progId="Equation.DSMT4">
                   <p:embed/>
                 </p:oleObj>
               </mc:Choice>
@@ -23768,7 +23771,7 @@
           <a:graphicData uri="http://schemas.openxmlformats.org/presentationml/2006/ole">
             <mc:AlternateContent xmlns:mc="http://schemas.openxmlformats.org/markup-compatibility/2006">
               <mc:Choice xmlns:v="urn:schemas-microsoft-com:vml" Requires="v">
-                <p:oleObj spid="_x0000_s11265" name="Equation" r:id="rId3" imgW="1041120" imgH="711000" progId="Equation.DSMT4">
+                <p:oleObj spid="_x0000_s11277" name="Equation" r:id="rId3" imgW="1041120" imgH="711000" progId="Equation.DSMT4">
                   <p:embed/>
                 </p:oleObj>
               </mc:Choice>
@@ -23850,7 +23853,7 @@
           <a:graphicData uri="http://schemas.openxmlformats.org/presentationml/2006/ole">
             <mc:AlternateContent xmlns:mc="http://schemas.openxmlformats.org/markup-compatibility/2006">
               <mc:Choice xmlns:v="urn:schemas-microsoft-com:vml" Requires="v">
-                <p:oleObj spid="_x0000_s11266" name="Equation" r:id="rId5" imgW="495000" imgH="203040" progId="Equation.DSMT4">
+                <p:oleObj spid="_x0000_s11278" name="Equation" r:id="rId5" imgW="495000" imgH="203040" progId="Equation.DSMT4">
                   <p:embed/>
                 </p:oleObj>
               </mc:Choice>
@@ -23932,7 +23935,7 @@
           <a:graphicData uri="http://schemas.openxmlformats.org/presentationml/2006/ole">
             <mc:AlternateContent xmlns:mc="http://schemas.openxmlformats.org/markup-compatibility/2006">
               <mc:Choice xmlns:v="urn:schemas-microsoft-com:vml" Requires="v">
-                <p:oleObj spid="_x0000_s11267" name="Equation" r:id="rId7" imgW="532937" imgH="177646" progId="Equation.DSMT4">
+                <p:oleObj spid="_x0000_s11279" name="Equation" r:id="rId7" imgW="532937" imgH="177646" progId="Equation.DSMT4">
                   <p:embed/>
                 </p:oleObj>
               </mc:Choice>
@@ -24158,7 +24161,7 @@
             <a:graphicData uri="http://schemas.openxmlformats.org/presentationml/2006/ole">
               <mc:AlternateContent xmlns:mc="http://schemas.openxmlformats.org/markup-compatibility/2006">
                 <mc:Choice xmlns:v="urn:schemas-microsoft-com:vml" Requires="v">
-                  <p:oleObj spid="_x0000_s11268" name="Equation" r:id="rId9" imgW="1028520" imgH="711000" progId="Equation.DSMT4">
+                  <p:oleObj spid="_x0000_s11280" name="Equation" r:id="rId9" imgW="1028520" imgH="711000" progId="Equation.DSMT4">
                     <p:embed/>
                   </p:oleObj>
                 </mc:Choice>
@@ -24391,7 +24394,7 @@
           <a:graphicData uri="http://schemas.openxmlformats.org/presentationml/2006/ole">
             <mc:AlternateContent xmlns:mc="http://schemas.openxmlformats.org/markup-compatibility/2006">
               <mc:Choice xmlns:v="urn:schemas-microsoft-com:vml" Requires="v">
-                <p:oleObj spid="_x0000_s11269" name="Equation" r:id="rId11" imgW="241200" imgH="177480" progId="Equation.DSMT4">
+                <p:oleObj spid="_x0000_s11281" name="Equation" r:id="rId11" imgW="241200" imgH="177480" progId="Equation.DSMT4">
                   <p:embed/>
                 </p:oleObj>
               </mc:Choice>
@@ -24473,7 +24476,7 @@
           <a:graphicData uri="http://schemas.openxmlformats.org/presentationml/2006/ole">
             <mc:AlternateContent xmlns:mc="http://schemas.openxmlformats.org/markup-compatibility/2006">
               <mc:Choice xmlns:v="urn:schemas-microsoft-com:vml" Requires="v">
-                <p:oleObj spid="_x0000_s11270" name="Equation" r:id="rId13" imgW="1473120" imgH="203040" progId="Equation.DSMT4">
+                <p:oleObj spid="_x0000_s11282" name="Equation" r:id="rId13" imgW="1473120" imgH="203040" progId="Equation.DSMT4">
                   <p:embed/>
                 </p:oleObj>
               </mc:Choice>
@@ -25501,7 +25504,7 @@
           <a:graphicData uri="http://schemas.openxmlformats.org/presentationml/2006/ole">
             <mc:AlternateContent xmlns:mc="http://schemas.openxmlformats.org/markup-compatibility/2006">
               <mc:Choice xmlns:v="urn:schemas-microsoft-com:vml" Requires="v">
-                <p:oleObj spid="_x0000_s12289" name="Equation" r:id="rId3" imgW="1143000" imgH="711000" progId="Equation.DSMT4">
+                <p:oleObj spid="_x0000_s12315" name="Equation" r:id="rId3" imgW="1143000" imgH="711000" progId="Equation.DSMT4">
                   <p:embed/>
                 </p:oleObj>
               </mc:Choice>
@@ -25583,7 +25586,7 @@
           <a:graphicData uri="http://schemas.openxmlformats.org/presentationml/2006/ole">
             <mc:AlternateContent xmlns:mc="http://schemas.openxmlformats.org/markup-compatibility/2006">
               <mc:Choice xmlns:v="urn:schemas-microsoft-com:vml" Requires="v">
-                <p:oleObj spid="_x0000_s12290" name="Equation" r:id="rId5" imgW="1079280" imgH="711000" progId="Equation.DSMT4">
+                <p:oleObj spid="_x0000_s12316" name="Equation" r:id="rId5" imgW="1079280" imgH="711000" progId="Equation.DSMT4">
                   <p:embed/>
                 </p:oleObj>
               </mc:Choice>
@@ -25665,7 +25668,7 @@
           <a:graphicData uri="http://schemas.openxmlformats.org/presentationml/2006/ole">
             <mc:AlternateContent xmlns:mc="http://schemas.openxmlformats.org/markup-compatibility/2006">
               <mc:Choice xmlns:v="urn:schemas-microsoft-com:vml" Requires="v">
-                <p:oleObj spid="_x0000_s12291" name="Equation" r:id="rId7" imgW="1143000" imgH="711000" progId="Equation.DSMT4">
+                <p:oleObj spid="_x0000_s12317" name="Equation" r:id="rId7" imgW="1143000" imgH="711000" progId="Equation.DSMT4">
                   <p:embed/>
                 </p:oleObj>
               </mc:Choice>
@@ -25747,7 +25750,7 @@
           <a:graphicData uri="http://schemas.openxmlformats.org/presentationml/2006/ole">
             <mc:AlternateContent xmlns:mc="http://schemas.openxmlformats.org/markup-compatibility/2006">
               <mc:Choice xmlns:v="urn:schemas-microsoft-com:vml" Requires="v">
-                <p:oleObj spid="_x0000_s12292" name="Equation" r:id="rId9" imgW="749160" imgH="393480" progId="Equation.DSMT4">
+                <p:oleObj spid="_x0000_s12318" name="Equation" r:id="rId9" imgW="749160" imgH="393480" progId="Equation.DSMT4">
                   <p:embed/>
                 </p:oleObj>
               </mc:Choice>
@@ -25967,7 +25970,7 @@
             <a:graphicData uri="http://schemas.openxmlformats.org/presentationml/2006/ole">
               <mc:AlternateContent xmlns:mc="http://schemas.openxmlformats.org/markup-compatibility/2006">
                 <mc:Choice xmlns:v="urn:schemas-microsoft-com:vml" Requires="v">
-                  <p:oleObj spid="_x0000_s12293" name="Equation" r:id="rId11" imgW="1320480" imgH="711000" progId="Equation.DSMT4">
+                  <p:oleObj spid="_x0000_s12319" name="Equation" r:id="rId11" imgW="1320480" imgH="711000" progId="Equation.DSMT4">
                     <p:embed/>
                   </p:oleObj>
                 </mc:Choice>
@@ -26105,7 +26108,7 @@
             <a:graphicData uri="http://schemas.openxmlformats.org/presentationml/2006/ole">
               <mc:AlternateContent xmlns:mc="http://schemas.openxmlformats.org/markup-compatibility/2006">
                 <mc:Choice xmlns:v="urn:schemas-microsoft-com:vml" Requires="v">
-                  <p:oleObj spid="_x0000_s12294" name="Equation" r:id="rId13" imgW="952200" imgH="711000" progId="Equation.DSMT4">
+                  <p:oleObj spid="_x0000_s12320" name="Equation" r:id="rId13" imgW="952200" imgH="711000" progId="Equation.DSMT4">
                     <p:embed/>
                   </p:oleObj>
                 </mc:Choice>
@@ -26293,7 +26296,7 @@
           <a:graphicData uri="http://schemas.openxmlformats.org/presentationml/2006/ole">
             <mc:AlternateContent xmlns:mc="http://schemas.openxmlformats.org/markup-compatibility/2006">
               <mc:Choice xmlns:v="urn:schemas-microsoft-com:vml" Requires="v">
-                <p:oleObj spid="_x0000_s12295" name="Equation" r:id="rId15" imgW="241200" imgH="164880" progId="Equation.DSMT4">
+                <p:oleObj spid="_x0000_s12321" name="Equation" r:id="rId15" imgW="241200" imgH="164880" progId="Equation.DSMT4">
                   <p:embed/>
                 </p:oleObj>
               </mc:Choice>
@@ -26375,7 +26378,7 @@
           <a:graphicData uri="http://schemas.openxmlformats.org/presentationml/2006/ole">
             <mc:AlternateContent xmlns:mc="http://schemas.openxmlformats.org/markup-compatibility/2006">
               <mc:Choice xmlns:v="urn:schemas-microsoft-com:vml" Requires="v">
-                <p:oleObj spid="_x0000_s12296" name="Equation" r:id="rId17" imgW="279360" imgH="203040" progId="Equation.DSMT4">
+                <p:oleObj spid="_x0000_s12322" name="Equation" r:id="rId17" imgW="279360" imgH="203040" progId="Equation.DSMT4">
                   <p:embed/>
                 </p:oleObj>
               </mc:Choice>
@@ -26457,7 +26460,7 @@
           <a:graphicData uri="http://schemas.openxmlformats.org/presentationml/2006/ole">
             <mc:AlternateContent xmlns:mc="http://schemas.openxmlformats.org/markup-compatibility/2006">
               <mc:Choice xmlns:v="urn:schemas-microsoft-com:vml" Requires="v">
-                <p:oleObj spid="_x0000_s12297" name="Equation" r:id="rId19" imgW="279360" imgH="203040" progId="Equation.DSMT4">
+                <p:oleObj spid="_x0000_s12323" name="Equation" r:id="rId19" imgW="279360" imgH="203040" progId="Equation.DSMT4">
                   <p:embed/>
                 </p:oleObj>
               </mc:Choice>
@@ -26539,7 +26542,7 @@
           <a:graphicData uri="http://schemas.openxmlformats.org/presentationml/2006/ole">
             <mc:AlternateContent xmlns:mc="http://schemas.openxmlformats.org/markup-compatibility/2006">
               <mc:Choice xmlns:v="urn:schemas-microsoft-com:vml" Requires="v">
-                <p:oleObj spid="_x0000_s12298" name="Equation" r:id="rId21" imgW="279360" imgH="203040" progId="Equation.DSMT4">
+                <p:oleObj spid="_x0000_s12324" name="Equation" r:id="rId21" imgW="279360" imgH="203040" progId="Equation.DSMT4">
                   <p:embed/>
                 </p:oleObj>
               </mc:Choice>
@@ -26621,7 +26624,7 @@
           <a:graphicData uri="http://schemas.openxmlformats.org/presentationml/2006/ole">
             <mc:AlternateContent xmlns:mc="http://schemas.openxmlformats.org/markup-compatibility/2006">
               <mc:Choice xmlns:v="urn:schemas-microsoft-com:vml" Requires="v">
-                <p:oleObj spid="_x0000_s12299" name="Equation" r:id="rId23" imgW="355320" imgH="203040" progId="Equation.DSMT4">
+                <p:oleObj spid="_x0000_s12325" name="Equation" r:id="rId23" imgW="355320" imgH="203040" progId="Equation.DSMT4">
                   <p:embed/>
                 </p:oleObj>
               </mc:Choice>
@@ -26703,7 +26706,7 @@
           <a:graphicData uri="http://schemas.openxmlformats.org/presentationml/2006/ole">
             <mc:AlternateContent xmlns:mc="http://schemas.openxmlformats.org/markup-compatibility/2006">
               <mc:Choice xmlns:v="urn:schemas-microsoft-com:vml" Requires="v">
-                <p:oleObj spid="_x0000_s12300" name="Equation" r:id="rId25" imgW="736560" imgH="393480" progId="Equation.DSMT4">
+                <p:oleObj spid="_x0000_s12326" name="Equation" r:id="rId25" imgW="736560" imgH="393480" progId="Equation.DSMT4">
                   <p:embed/>
                 </p:oleObj>
               </mc:Choice>
@@ -26785,7 +26788,7 @@
           <a:graphicData uri="http://schemas.openxmlformats.org/presentationml/2006/ole">
             <mc:AlternateContent xmlns:mc="http://schemas.openxmlformats.org/markup-compatibility/2006">
               <mc:Choice xmlns:v="urn:schemas-microsoft-com:vml" Requires="v">
-                <p:oleObj spid="_x0000_s12301" name="Equation" r:id="rId27" imgW="799920" imgH="393480" progId="Equation.DSMT4">
+                <p:oleObj spid="_x0000_s12327" name="Equation" r:id="rId27" imgW="799920" imgH="393480" progId="Equation.DSMT4">
                   <p:embed/>
                 </p:oleObj>
               </mc:Choice>
@@ -28775,7 +28778,7 @@
           <a:graphicData uri="http://schemas.openxmlformats.org/presentationml/2006/ole">
             <mc:AlternateContent xmlns:mc="http://schemas.openxmlformats.org/markup-compatibility/2006">
               <mc:Choice xmlns:v="urn:schemas-microsoft-com:vml" Requires="v">
-                <p:oleObj spid="_x0000_s9220" name="Equation" r:id="rId4" imgW="2933640" imgH="253800" progId="Equation.DSMT4">
+                <p:oleObj spid="_x0000_s9226" name="Equation" r:id="rId4" imgW="2933640" imgH="253800" progId="Equation.DSMT4">
                   <p:embed/>
                 </p:oleObj>
               </mc:Choice>
@@ -28889,7 +28892,7 @@
           <a:graphicData uri="http://schemas.openxmlformats.org/presentationml/2006/ole">
             <mc:AlternateContent xmlns:mc="http://schemas.openxmlformats.org/markup-compatibility/2006">
               <mc:Choice xmlns:v="urn:schemas-microsoft-com:vml" Requires="v">
-                <p:oleObj spid="_x0000_s9221" name="Equation" r:id="rId6" imgW="5270073" imgH="2232800" progId="Equation.DSMT4">
+                <p:oleObj spid="_x0000_s9227" name="Equation" r:id="rId6" imgW="5270073" imgH="2232800" progId="Equation.DSMT4">
                   <p:embed/>
                 </p:oleObj>
               </mc:Choice>
@@ -29004,7 +29007,7 @@
           <a:graphicData uri="http://schemas.openxmlformats.org/presentationml/2006/ole">
             <mc:AlternateContent xmlns:mc="http://schemas.openxmlformats.org/markup-compatibility/2006">
               <mc:Choice xmlns:v="urn:schemas-microsoft-com:vml" Requires="v">
-                <p:oleObj spid="_x0000_s9222" name="Equation" r:id="rId8" imgW="419040" imgH="228600" progId="Equation.DSMT4">
+                <p:oleObj spid="_x0000_s9228" name="Equation" r:id="rId8" imgW="419040" imgH="228600" progId="Equation.DSMT4">
                   <p:embed/>
                 </p:oleObj>
               </mc:Choice>
@@ -30548,7 +30551,7 @@
           <a:graphicData uri="http://schemas.openxmlformats.org/presentationml/2006/ole">
             <mc:AlternateContent xmlns:mc="http://schemas.openxmlformats.org/markup-compatibility/2006">
               <mc:Choice xmlns:v="urn:schemas-microsoft-com:vml" Requires="v">
-                <p:oleObj spid="_x0000_s10243" name="Equation" r:id="rId4" imgW="4232116" imgH="1906628" progId="Equation.DSMT4">
+                <p:oleObj spid="_x0000_s10247" name="Equation" r:id="rId4" imgW="4232116" imgH="1906628" progId="Equation.DSMT4">
                   <p:embed/>
                 </p:oleObj>
               </mc:Choice>
@@ -30617,7 +30620,7 @@
           <a:graphicData uri="http://schemas.openxmlformats.org/presentationml/2006/ole">
             <mc:AlternateContent xmlns:mc="http://schemas.openxmlformats.org/markup-compatibility/2006">
               <mc:Choice xmlns:v="urn:schemas-microsoft-com:vml" Requires="v">
-                <p:oleObj spid="_x0000_s10244" name="Equation" r:id="rId6" imgW="3549505" imgH="816869" progId="Equation.DSMT4">
+                <p:oleObj spid="_x0000_s10248" name="Equation" r:id="rId6" imgW="3549505" imgH="816869" progId="Equation.DSMT4">
                   <p:embed/>
                 </p:oleObj>
               </mc:Choice>
@@ -31024,6 +31027,2922 @@
 </file>
 
 <file path=ppt/slides/slide16.xml><?xml version="1.0" encoding="utf-8"?>
+<p:sld xmlns:a="http://schemas.openxmlformats.org/drawingml/2006/main" xmlns:r="http://schemas.openxmlformats.org/officeDocument/2006/relationships" xmlns:p="http://schemas.openxmlformats.org/presentationml/2006/main">
+  <p:cSld>
+    <p:spTree>
+      <p:nvGrpSpPr>
+        <p:cNvPr id="1" name=""/>
+        <p:cNvGrpSpPr/>
+        <p:nvPr/>
+      </p:nvGrpSpPr>
+      <p:grpSpPr>
+        <a:xfrm>
+          <a:off x="0" y="0"/>
+          <a:ext cx="0" cy="0"/>
+          <a:chOff x="0" y="0"/>
+          <a:chExt cx="0" cy="0"/>
+        </a:xfrm>
+      </p:grpSpPr>
+      <p:sp>
+        <p:nvSpPr>
+          <p:cNvPr id="2" name="灯片编号占位符 7">
+            <a:extLst>
+              <a:ext uri="{FF2B5EF4-FFF2-40B4-BE49-F238E27FC236}">
+                <a16:creationId xmlns:a16="http://schemas.microsoft.com/office/drawing/2014/main" id="{71CEAFD3-FB2C-C74C-98F5-D244C28F29A2}"/>
+              </a:ext>
+            </a:extLst>
+          </p:cNvPr>
+          <p:cNvSpPr txBox="1">
+            <a:spLocks/>
+          </p:cNvSpPr>
+          <p:nvPr/>
+        </p:nvSpPr>
+        <p:spPr bwMode="auto">
+          <a:xfrm>
+            <a:off x="8658768" y="6518612"/>
+            <a:ext cx="574464" cy="349702"/>
+          </a:xfrm>
+          <a:prstGeom prst="rect">
+            <a:avLst/>
+          </a:prstGeom>
+          <a:noFill/>
+          <a:ln>
+            <a:noFill/>
+          </a:ln>
+          <a:effectLst/>
+        </p:spPr>
+        <p:txBody>
+          <a:bodyPr vert="horz" wrap="square" lIns="91440" tIns="45720" rIns="91440" bIns="45720" numCol="1" anchor="b" anchorCtr="0" compatLnSpc="1">
+            <a:prstTxWarp prst="textNoShape">
+              <a:avLst/>
+            </a:prstTxWarp>
+          </a:bodyPr>
+          <a:lstStyle>
+            <a:defPPr>
+              <a:defRPr lang="zh-CN"/>
+            </a:defPPr>
+            <a:lvl1pPr algn="l" rtl="0" eaLnBrk="0" fontAlgn="auto" hangingPunct="0">
+              <a:spcBef>
+                <a:spcPts val="0"/>
+              </a:spcBef>
+              <a:spcAft>
+                <a:spcPts val="0"/>
+              </a:spcAft>
+              <a:defRPr kumimoji="1" sz="1200" kern="1200" dirty="0">
+                <a:solidFill>
+                  <a:srgbClr val="000000"/>
+                </a:solidFill>
+                <a:latin typeface="+mn-lt"/>
+                <a:ea typeface="+mn-ea"/>
+                <a:cs typeface="+mn-cs"/>
+              </a:defRPr>
+            </a:lvl1pPr>
+            <a:lvl2pPr marL="457200" algn="l" rtl="0" eaLnBrk="0" fontAlgn="base" hangingPunct="0">
+              <a:spcBef>
+                <a:spcPct val="0"/>
+              </a:spcBef>
+              <a:spcAft>
+                <a:spcPct val="0"/>
+              </a:spcAft>
+              <a:defRPr kumimoji="1" sz="2800" kern="1200">
+                <a:solidFill>
+                  <a:schemeClr val="tx2"/>
+                </a:solidFill>
+                <a:latin typeface="Times New Roman" panose="02020603050405020304" pitchFamily="18" charset="0"/>
+                <a:ea typeface="宋体" panose="02010600030101010101" pitchFamily="2" charset="-122"/>
+                <a:cs typeface="+mn-cs"/>
+              </a:defRPr>
+            </a:lvl2pPr>
+            <a:lvl3pPr marL="914400" algn="l" rtl="0" eaLnBrk="0" fontAlgn="base" hangingPunct="0">
+              <a:spcBef>
+                <a:spcPct val="0"/>
+              </a:spcBef>
+              <a:spcAft>
+                <a:spcPct val="0"/>
+              </a:spcAft>
+              <a:defRPr kumimoji="1" sz="2800" kern="1200">
+                <a:solidFill>
+                  <a:schemeClr val="tx2"/>
+                </a:solidFill>
+                <a:latin typeface="Times New Roman" panose="02020603050405020304" pitchFamily="18" charset="0"/>
+                <a:ea typeface="宋体" panose="02010600030101010101" pitchFamily="2" charset="-122"/>
+                <a:cs typeface="+mn-cs"/>
+              </a:defRPr>
+            </a:lvl3pPr>
+            <a:lvl4pPr marL="1371600" algn="l" rtl="0" eaLnBrk="0" fontAlgn="base" hangingPunct="0">
+              <a:spcBef>
+                <a:spcPct val="0"/>
+              </a:spcBef>
+              <a:spcAft>
+                <a:spcPct val="0"/>
+              </a:spcAft>
+              <a:defRPr kumimoji="1" sz="2800" kern="1200">
+                <a:solidFill>
+                  <a:schemeClr val="tx2"/>
+                </a:solidFill>
+                <a:latin typeface="Times New Roman" panose="02020603050405020304" pitchFamily="18" charset="0"/>
+                <a:ea typeface="宋体" panose="02010600030101010101" pitchFamily="2" charset="-122"/>
+                <a:cs typeface="+mn-cs"/>
+              </a:defRPr>
+            </a:lvl4pPr>
+            <a:lvl5pPr marL="1828800" algn="l" rtl="0" eaLnBrk="0" fontAlgn="base" hangingPunct="0">
+              <a:spcBef>
+                <a:spcPct val="0"/>
+              </a:spcBef>
+              <a:spcAft>
+                <a:spcPct val="0"/>
+              </a:spcAft>
+              <a:defRPr kumimoji="1" sz="2800" kern="1200">
+                <a:solidFill>
+                  <a:schemeClr val="tx2"/>
+                </a:solidFill>
+                <a:latin typeface="Times New Roman" panose="02020603050405020304" pitchFamily="18" charset="0"/>
+                <a:ea typeface="宋体" panose="02010600030101010101" pitchFamily="2" charset="-122"/>
+                <a:cs typeface="+mn-cs"/>
+              </a:defRPr>
+            </a:lvl5pPr>
+            <a:lvl6pPr marL="2286000" algn="l" defTabSz="914400" rtl="0" eaLnBrk="1" latinLnBrk="0" hangingPunct="1">
+              <a:defRPr kumimoji="1" sz="2800" kern="1200">
+                <a:solidFill>
+                  <a:schemeClr val="tx2"/>
+                </a:solidFill>
+                <a:latin typeface="Times New Roman" panose="02020603050405020304" pitchFamily="18" charset="0"/>
+                <a:ea typeface="宋体" panose="02010600030101010101" pitchFamily="2" charset="-122"/>
+                <a:cs typeface="+mn-cs"/>
+              </a:defRPr>
+            </a:lvl6pPr>
+            <a:lvl7pPr marL="2743200" algn="l" defTabSz="914400" rtl="0" eaLnBrk="1" latinLnBrk="0" hangingPunct="1">
+              <a:defRPr kumimoji="1" sz="2800" kern="1200">
+                <a:solidFill>
+                  <a:schemeClr val="tx2"/>
+                </a:solidFill>
+                <a:latin typeface="Times New Roman" panose="02020603050405020304" pitchFamily="18" charset="0"/>
+                <a:ea typeface="宋体" panose="02010600030101010101" pitchFamily="2" charset="-122"/>
+                <a:cs typeface="+mn-cs"/>
+              </a:defRPr>
+            </a:lvl7pPr>
+            <a:lvl8pPr marL="3200400" algn="l" defTabSz="914400" rtl="0" eaLnBrk="1" latinLnBrk="0" hangingPunct="1">
+              <a:defRPr kumimoji="1" sz="2800" kern="1200">
+                <a:solidFill>
+                  <a:schemeClr val="tx2"/>
+                </a:solidFill>
+                <a:latin typeface="Times New Roman" panose="02020603050405020304" pitchFamily="18" charset="0"/>
+                <a:ea typeface="宋体" panose="02010600030101010101" pitchFamily="2" charset="-122"/>
+                <a:cs typeface="+mn-cs"/>
+              </a:defRPr>
+            </a:lvl8pPr>
+            <a:lvl9pPr marL="3657600" algn="l" defTabSz="914400" rtl="0" eaLnBrk="1" latinLnBrk="0" hangingPunct="1">
+              <a:defRPr kumimoji="1" sz="2800" kern="1200">
+                <a:solidFill>
+                  <a:schemeClr val="tx2"/>
+                </a:solidFill>
+                <a:latin typeface="Times New Roman" panose="02020603050405020304" pitchFamily="18" charset="0"/>
+                <a:ea typeface="宋体" panose="02010600030101010101" pitchFamily="2" charset="-122"/>
+                <a:cs typeface="+mn-cs"/>
+              </a:defRPr>
+            </a:lvl9pPr>
+          </a:lstStyle>
+          <a:p>
+            <a:fld id="{252E7140-E4F4-49D5-9AFB-3467FF007A05}" type="slidenum">
+              <a:rPr lang="zh-CN" altLang="en-US" smtClean="0">
+                <a:cs typeface="+mn-ea"/>
+                <a:sym typeface="+mn-lt"/>
+              </a:rPr>
+              <a:pPr/>
+              <a:t>16</a:t>
+            </a:fld>
+            <a:endParaRPr lang="zh-CN" altLang="en-US">
+              <a:cs typeface="+mn-ea"/>
+              <a:sym typeface="+mn-lt"/>
+            </a:endParaRPr>
+          </a:p>
+        </p:txBody>
+      </p:sp>
+      <p:sp>
+        <p:nvSpPr>
+          <p:cNvPr id="3" name="文本框 26">
+            <a:extLst>
+              <a:ext uri="{FF2B5EF4-FFF2-40B4-BE49-F238E27FC236}">
+                <a16:creationId xmlns:a16="http://schemas.microsoft.com/office/drawing/2014/main" id="{7E393432-145C-4047-8636-6E5D8C6288DE}"/>
+              </a:ext>
+            </a:extLst>
+          </p:cNvPr>
+          <p:cNvSpPr txBox="1"/>
+          <p:nvPr/>
+        </p:nvSpPr>
+        <p:spPr>
+          <a:xfrm>
+            <a:off x="251053" y="1982618"/>
+            <a:ext cx="1211870" cy="564514"/>
+          </a:xfrm>
+          <a:prstGeom prst="rect">
+            <a:avLst/>
+          </a:prstGeom>
+          <a:noFill/>
+        </p:spPr>
+        <p:txBody>
+          <a:bodyPr wrap="none" lIns="0" tIns="0" rIns="0" bIns="0" rtlCol="0" anchor="t" anchorCtr="0">
+            <a:spAutoFit/>
+          </a:bodyPr>
+          <a:lstStyle/>
+          <a:p>
+            <a:pPr>
+              <a:lnSpc>
+                <a:spcPct val="150000"/>
+              </a:lnSpc>
+            </a:pPr>
+            <a:r>
+              <a:rPr lang="zh-CN" altLang="en-US" sz="2800" dirty="0">
+                <a:cs typeface="+mn-ea"/>
+                <a:sym typeface="+mn-lt"/>
+              </a:rPr>
+              <a:t>🎯</a:t>
+            </a:r>
+            <a:r>
+              <a:rPr lang="zh-CN" altLang="en-US" sz="2800" dirty="0">
+                <a:highlight>
+                  <a:srgbClr val="FFC000"/>
+                </a:highlight>
+                <a:cs typeface="+mn-ea"/>
+                <a:sym typeface="+mn-lt"/>
+              </a:rPr>
+              <a:t>结论</a:t>
+            </a:r>
+          </a:p>
+        </p:txBody>
+      </p:sp>
+      <p:sp>
+        <p:nvSpPr>
+          <p:cNvPr id="4" name="文本框 27">
+            <a:extLst>
+              <a:ext uri="{FF2B5EF4-FFF2-40B4-BE49-F238E27FC236}">
+                <a16:creationId xmlns:a16="http://schemas.microsoft.com/office/drawing/2014/main" id="{15E08D20-CE3F-F544-AFEE-0A1109D72FE2}"/>
+              </a:ext>
+            </a:extLst>
+          </p:cNvPr>
+          <p:cNvSpPr txBox="1"/>
+          <p:nvPr/>
+        </p:nvSpPr>
+        <p:spPr>
+          <a:xfrm>
+            <a:off x="1462924" y="2070628"/>
+            <a:ext cx="2507225" cy="523220"/>
+          </a:xfrm>
+          <a:prstGeom prst="rect">
+            <a:avLst/>
+          </a:prstGeom>
+          <a:noFill/>
+        </p:spPr>
+        <p:txBody>
+          <a:bodyPr wrap="square">
+            <a:spAutoFit/>
+          </a:bodyPr>
+          <a:lstStyle/>
+          <a:p>
+            <a:r>
+              <a:rPr lang="zh-CN" altLang="en-US" sz="2800" dirty="0"/>
+              <a:t>范德蒙行列式</a:t>
+            </a:r>
+          </a:p>
+        </p:txBody>
+      </p:sp>
+      <p:grpSp>
+        <p:nvGrpSpPr>
+          <p:cNvPr id="5" name="组合 2">
+            <a:extLst>
+              <a:ext uri="{FF2B5EF4-FFF2-40B4-BE49-F238E27FC236}">
+                <a16:creationId xmlns:a16="http://schemas.microsoft.com/office/drawing/2014/main" id="{D621CC07-02D0-9E4F-AA7D-CCCAA1C89850}"/>
+              </a:ext>
+            </a:extLst>
+          </p:cNvPr>
+          <p:cNvGrpSpPr/>
+          <p:nvPr/>
+        </p:nvGrpSpPr>
+        <p:grpSpPr>
+          <a:xfrm>
+            <a:off x="251053" y="2904880"/>
+            <a:ext cx="9216000" cy="2633662"/>
+            <a:chOff x="1775053" y="2904880"/>
+            <a:chExt cx="9216000" cy="2633662"/>
+          </a:xfrm>
+        </p:grpSpPr>
+        <p:graphicFrame>
+          <p:nvGraphicFramePr>
+            <p:cNvPr id="6" name="Object 10">
+              <a:extLst>
+                <a:ext uri="{FF2B5EF4-FFF2-40B4-BE49-F238E27FC236}">
+                  <a16:creationId xmlns:a16="http://schemas.microsoft.com/office/drawing/2014/main" id="{12B2A636-3205-D641-A3A8-153C1518111A}"/>
+                </a:ext>
+              </a:extLst>
+            </p:cNvPr>
+            <p:cNvGraphicFramePr>
+              <a:graphicFrameLocks noChangeAspect="1"/>
+            </p:cNvGraphicFramePr>
+            <p:nvPr>
+              <p:extLst>
+                <p:ext uri="{D42A27DB-BD31-4B8C-83A1-F6EECF244321}">
+                  <p14:modId xmlns:p14="http://schemas.microsoft.com/office/powerpoint/2010/main" val="1050577210"/>
+                </p:ext>
+              </p:extLst>
+            </p:nvPr>
+          </p:nvGraphicFramePr>
+          <p:xfrm>
+            <a:off x="1775053" y="2904880"/>
+            <a:ext cx="6708775" cy="2633662"/>
+          </p:xfrm>
+          <a:graphic>
+            <a:graphicData uri="http://schemas.openxmlformats.org/presentationml/2006/ole">
+              <mc:AlternateContent xmlns:mc="http://schemas.openxmlformats.org/markup-compatibility/2006">
+                <mc:Choice xmlns:v="urn:schemas-microsoft-com:vml" Requires="v">
+                  <p:oleObj spid="_x0000_s14338" name="Equation" r:id="rId3" imgW="2971800" imgH="1168200" progId="Equation.DSMT4">
+                    <p:embed/>
+                  </p:oleObj>
+                </mc:Choice>
+                <mc:Fallback>
+                  <p:oleObj name="Equation" r:id="rId3" imgW="2971800" imgH="1168200" progId="Equation.DSMT4">
+                    <p:embed/>
+                    <p:pic>
+                      <p:nvPicPr>
+                        <p:cNvPr id="53" name="Object 10">
+                          <a:extLst>
+                            <a:ext uri="{FF2B5EF4-FFF2-40B4-BE49-F238E27FC236}">
+                              <a16:creationId xmlns:a16="http://schemas.microsoft.com/office/drawing/2014/main" id="{8083D98F-959B-4FD4-B5E3-97C6593C0C66}"/>
+                            </a:ext>
+                          </a:extLst>
+                        </p:cNvPr>
+                        <p:cNvPicPr>
+                          <a:picLocks noChangeAspect="1" noChangeArrowheads="1"/>
+                        </p:cNvPicPr>
+                        <p:nvPr/>
+                      </p:nvPicPr>
+                      <p:blipFill>
+                        <a:blip r:embed="rId4"/>
+                        <a:srcRect/>
+                        <a:stretch>
+                          <a:fillRect/>
+                        </a:stretch>
+                      </p:blipFill>
+                      <p:spPr bwMode="auto">
+                        <a:xfrm>
+                          <a:off x="1775053" y="2904880"/>
+                          <a:ext cx="6708775" cy="2633662"/>
+                        </a:xfrm>
+                        <a:prstGeom prst="rect">
+                          <a:avLst/>
+                        </a:prstGeom>
+                        <a:noFill/>
+                        <a:ln>
+                          <a:noFill/>
+                        </a:ln>
+                        <a:effectLst/>
+                      </p:spPr>
+                    </p:pic>
+                  </p:oleObj>
+                </mc:Fallback>
+              </mc:AlternateContent>
+            </a:graphicData>
+          </a:graphic>
+        </p:graphicFrame>
+        <p:sp>
+          <p:nvSpPr>
+            <p:cNvPr id="7" name="文本框 28">
+              <a:extLst>
+                <a:ext uri="{FF2B5EF4-FFF2-40B4-BE49-F238E27FC236}">
+                  <a16:creationId xmlns:a16="http://schemas.microsoft.com/office/drawing/2014/main" id="{573FC31A-3124-B945-A8EF-4C5F0DD2F325}"/>
+                </a:ext>
+              </a:extLst>
+            </p:cNvPr>
+            <p:cNvSpPr txBox="1"/>
+            <p:nvPr/>
+          </p:nvSpPr>
+          <p:spPr>
+            <a:xfrm>
+              <a:off x="8483828" y="3960101"/>
+              <a:ext cx="2507225" cy="523220"/>
+            </a:xfrm>
+            <a:prstGeom prst="rect">
+              <a:avLst/>
+            </a:prstGeom>
+            <a:noFill/>
+          </p:spPr>
+          <p:txBody>
+            <a:bodyPr wrap="square">
+              <a:spAutoFit/>
+            </a:bodyPr>
+            <a:lstStyle/>
+            <a:p>
+              <a:r>
+                <a:rPr lang="zh-CN" altLang="en-US" sz="2800" dirty="0"/>
+                <a:t>互不相同</a:t>
+              </a:r>
+              <a:r>
+                <a:rPr lang="en-US" altLang="zh-CN" sz="2800" dirty="0"/>
+                <a:t>.</a:t>
+              </a:r>
+              <a:endParaRPr lang="zh-CN" altLang="en-US" sz="2800" dirty="0"/>
+            </a:p>
+          </p:txBody>
+        </p:sp>
+      </p:grpSp>
+      <p:grpSp>
+        <p:nvGrpSpPr>
+          <p:cNvPr id="11" name="组合 43">
+            <a:extLst>
+              <a:ext uri="{FF2B5EF4-FFF2-40B4-BE49-F238E27FC236}">
+                <a16:creationId xmlns:a16="http://schemas.microsoft.com/office/drawing/2014/main" id="{A737A251-3705-2545-919E-A339273C10FD}"/>
+              </a:ext>
+            </a:extLst>
+          </p:cNvPr>
+          <p:cNvGrpSpPr/>
+          <p:nvPr/>
+        </p:nvGrpSpPr>
+        <p:grpSpPr>
+          <a:xfrm>
+            <a:off x="-1524000" y="1053994"/>
+            <a:ext cx="12192000" cy="523220"/>
+            <a:chOff x="0" y="1418478"/>
+            <a:chExt cx="12192000" cy="523220"/>
+          </a:xfrm>
+        </p:grpSpPr>
+        <p:cxnSp>
+          <p:nvCxnSpPr>
+            <p:cNvPr id="12" name="直接连接符 44">
+              <a:extLst>
+                <a:ext uri="{FF2B5EF4-FFF2-40B4-BE49-F238E27FC236}">
+                  <a16:creationId xmlns:a16="http://schemas.microsoft.com/office/drawing/2014/main" id="{3B211599-B184-314F-9027-7419156921C3}"/>
+                </a:ext>
+              </a:extLst>
+            </p:cNvPr>
+            <p:cNvCxnSpPr/>
+            <p:nvPr/>
+          </p:nvCxnSpPr>
+          <p:spPr>
+            <a:xfrm>
+              <a:off x="0" y="1680088"/>
+              <a:ext cx="12192000" cy="0"/>
+            </a:xfrm>
+            <a:prstGeom prst="line">
+              <a:avLst/>
+            </a:prstGeom>
+            <a:noFill/>
+            <a:ln w="38100" cap="flat" cmpd="sng" algn="ctr">
+              <a:solidFill>
+                <a:srgbClr val="449BAF"/>
+              </a:solidFill>
+              <a:prstDash val="solid"/>
+              <a:miter lim="800000"/>
+            </a:ln>
+            <a:effectLst/>
+          </p:spPr>
+        </p:cxnSp>
+        <p:sp>
+          <p:nvSpPr>
+            <p:cNvPr id="13" name="Text Box 36">
+              <a:extLst>
+                <a:ext uri="{FF2B5EF4-FFF2-40B4-BE49-F238E27FC236}">
+                  <a16:creationId xmlns:a16="http://schemas.microsoft.com/office/drawing/2014/main" id="{282C6E22-F6C5-F841-A652-43BA0D4F046D}"/>
+                </a:ext>
+              </a:extLst>
+            </p:cNvPr>
+            <p:cNvSpPr txBox="1">
+              <a:spLocks noChangeArrowheads="1"/>
+            </p:cNvSpPr>
+            <p:nvPr/>
+          </p:nvSpPr>
+          <p:spPr bwMode="auto">
+            <a:xfrm>
+              <a:off x="1775053" y="1418478"/>
+              <a:ext cx="2365765" cy="523220"/>
+            </a:xfrm>
+            <a:prstGeom prst="rect">
+              <a:avLst/>
+            </a:prstGeom>
+            <a:solidFill>
+              <a:srgbClr val="449BAF"/>
+            </a:solidFill>
+            <a:ln w="9525">
+              <a:noFill/>
+              <a:miter lim="800000"/>
+              <a:headEnd/>
+              <a:tailEnd/>
+            </a:ln>
+            <a:effectLst/>
+          </p:spPr>
+          <p:txBody>
+            <a:bodyPr wrap="square">
+              <a:spAutoFit/>
+            </a:bodyPr>
+            <a:lstStyle/>
+            <a:p>
+              <a:pPr marL="0" marR="0" lvl="0" indent="0" algn="ctr" defTabSz="457200" eaLnBrk="1" fontAlgn="auto" latinLnBrk="0" hangingPunct="1">
+                <a:lnSpc>
+                  <a:spcPct val="100000"/>
+                </a:lnSpc>
+                <a:spcBef>
+                  <a:spcPts val="0"/>
+                </a:spcBef>
+                <a:spcAft>
+                  <a:spcPts val="0"/>
+                </a:spcAft>
+                <a:buClrTx/>
+                <a:buSzTx/>
+                <a:buFontTx/>
+                <a:buNone/>
+                <a:tabLst/>
+                <a:defRPr/>
+              </a:pPr>
+              <a:r>
+                <a:rPr kumimoji="0" lang="zh-CN" altLang="en-US" sz="1800" b="0" i="0" u="none" strike="noStrike" kern="0" cap="none" spc="0" normalizeH="0" baseline="0" noProof="0" dirty="0">
+                  <a:ln>
+                    <a:noFill/>
+                  </a:ln>
+                  <a:solidFill>
+                    <a:prstClr val="white"/>
+                  </a:solidFill>
+                  <a:effectLst/>
+                  <a:uLnTx/>
+                  <a:uFillTx/>
+                  <a:latin typeface="Times New Roman"/>
+                  <a:ea typeface="黑体"/>
+                  <a:cs typeface="+mn-ea"/>
+                  <a:sym typeface="+mn-lt"/>
+                </a:rPr>
+                <a:t>范德蒙行列式</a:t>
+              </a:r>
+            </a:p>
+          </p:txBody>
+        </p:sp>
+      </p:grpSp>
+    </p:spTree>
+    <p:extLst>
+      <p:ext uri="{BB962C8B-B14F-4D97-AF65-F5344CB8AC3E}">
+        <p14:creationId xmlns:p14="http://schemas.microsoft.com/office/powerpoint/2010/main" val="2566853719"/>
+      </p:ext>
+    </p:extLst>
+  </p:cSld>
+  <p:clrMapOvr>
+    <a:masterClrMapping/>
+  </p:clrMapOvr>
+  <p:transition spd="slow">
+    <p:split orient="vert"/>
+  </p:transition>
+  <p:timing>
+    <p:tnLst>
+      <p:par>
+        <p:cTn id="1" dur="indefinite" restart="never" nodeType="tmRoot">
+          <p:childTnLst>
+            <p:seq concurrent="1" nextAc="seek">
+              <p:cTn id="2" dur="indefinite" nodeType="mainSeq">
+                <p:childTnLst>
+                  <p:par>
+                    <p:cTn id="3" fill="hold">
+                      <p:stCondLst>
+                        <p:cond delay="indefinite"/>
+                      </p:stCondLst>
+                      <p:childTnLst>
+                        <p:par>
+                          <p:cTn id="4" fill="hold">
+                            <p:stCondLst>
+                              <p:cond delay="0"/>
+                            </p:stCondLst>
+                            <p:childTnLst>
+                              <p:par>
+                                <p:cTn id="5" presetID="22" presetClass="entr" presetSubtype="8" fill="hold" grpId="0" nodeType="clickEffect">
+                                  <p:stCondLst>
+                                    <p:cond delay="0"/>
+                                  </p:stCondLst>
+                                  <p:childTnLst>
+                                    <p:set>
+                                      <p:cBhvr>
+                                        <p:cTn id="6" dur="1" fill="hold">
+                                          <p:stCondLst>
+                                            <p:cond delay="0"/>
+                                          </p:stCondLst>
+                                        </p:cTn>
+                                        <p:tgtEl>
+                                          <p:spTgt spid="3"/>
+                                        </p:tgtEl>
+                                        <p:attrNameLst>
+                                          <p:attrName>style.visibility</p:attrName>
+                                        </p:attrNameLst>
+                                      </p:cBhvr>
+                                      <p:to>
+                                        <p:strVal val="visible"/>
+                                      </p:to>
+                                    </p:set>
+                                    <p:animEffect transition="in" filter="wipe(left)">
+                                      <p:cBhvr>
+                                        <p:cTn id="7" dur="500"/>
+                                        <p:tgtEl>
+                                          <p:spTgt spid="3"/>
+                                        </p:tgtEl>
+                                      </p:cBhvr>
+                                    </p:animEffect>
+                                  </p:childTnLst>
+                                </p:cTn>
+                              </p:par>
+                            </p:childTnLst>
+                          </p:cTn>
+                        </p:par>
+                      </p:childTnLst>
+                    </p:cTn>
+                  </p:par>
+                  <p:par>
+                    <p:cTn id="8" fill="hold">
+                      <p:stCondLst>
+                        <p:cond delay="indefinite"/>
+                      </p:stCondLst>
+                      <p:childTnLst>
+                        <p:par>
+                          <p:cTn id="9" fill="hold">
+                            <p:stCondLst>
+                              <p:cond delay="0"/>
+                            </p:stCondLst>
+                            <p:childTnLst>
+                              <p:par>
+                                <p:cTn id="10" presetID="22" presetClass="entr" presetSubtype="8" fill="hold" grpId="0" nodeType="clickEffect">
+                                  <p:stCondLst>
+                                    <p:cond delay="0"/>
+                                  </p:stCondLst>
+                                  <p:childTnLst>
+                                    <p:set>
+                                      <p:cBhvr>
+                                        <p:cTn id="11" dur="1" fill="hold">
+                                          <p:stCondLst>
+                                            <p:cond delay="0"/>
+                                          </p:stCondLst>
+                                        </p:cTn>
+                                        <p:tgtEl>
+                                          <p:spTgt spid="4"/>
+                                        </p:tgtEl>
+                                        <p:attrNameLst>
+                                          <p:attrName>style.visibility</p:attrName>
+                                        </p:attrNameLst>
+                                      </p:cBhvr>
+                                      <p:to>
+                                        <p:strVal val="visible"/>
+                                      </p:to>
+                                    </p:set>
+                                    <p:animEffect transition="in" filter="wipe(left)">
+                                      <p:cBhvr>
+                                        <p:cTn id="12" dur="500"/>
+                                        <p:tgtEl>
+                                          <p:spTgt spid="4"/>
+                                        </p:tgtEl>
+                                      </p:cBhvr>
+                                    </p:animEffect>
+                                  </p:childTnLst>
+                                </p:cTn>
+                              </p:par>
+                            </p:childTnLst>
+                          </p:cTn>
+                        </p:par>
+                      </p:childTnLst>
+                    </p:cTn>
+                  </p:par>
+                  <p:par>
+                    <p:cTn id="13" fill="hold">
+                      <p:stCondLst>
+                        <p:cond delay="indefinite"/>
+                      </p:stCondLst>
+                      <p:childTnLst>
+                        <p:par>
+                          <p:cTn id="14" fill="hold">
+                            <p:stCondLst>
+                              <p:cond delay="0"/>
+                            </p:stCondLst>
+                            <p:childTnLst>
+                              <p:par>
+                                <p:cTn id="15" presetID="22" presetClass="entr" presetSubtype="8" fill="hold" nodeType="clickEffect">
+                                  <p:stCondLst>
+                                    <p:cond delay="0"/>
+                                  </p:stCondLst>
+                                  <p:childTnLst>
+                                    <p:set>
+                                      <p:cBhvr>
+                                        <p:cTn id="16" dur="1" fill="hold">
+                                          <p:stCondLst>
+                                            <p:cond delay="0"/>
+                                          </p:stCondLst>
+                                        </p:cTn>
+                                        <p:tgtEl>
+                                          <p:spTgt spid="5"/>
+                                        </p:tgtEl>
+                                        <p:attrNameLst>
+                                          <p:attrName>style.visibility</p:attrName>
+                                        </p:attrNameLst>
+                                      </p:cBhvr>
+                                      <p:to>
+                                        <p:strVal val="visible"/>
+                                      </p:to>
+                                    </p:set>
+                                    <p:animEffect transition="in" filter="wipe(left)">
+                                      <p:cBhvr>
+                                        <p:cTn id="17" dur="500"/>
+                                        <p:tgtEl>
+                                          <p:spTgt spid="5"/>
+                                        </p:tgtEl>
+                                      </p:cBhvr>
+                                    </p:animEffect>
+                                  </p:childTnLst>
+                                </p:cTn>
+                              </p:par>
+                            </p:childTnLst>
+                          </p:cTn>
+                        </p:par>
+                      </p:childTnLst>
+                    </p:cTn>
+                  </p:par>
+                  <p:par>
+                    <p:cTn id="18" fill="hold">
+                      <p:stCondLst>
+                        <p:cond delay="indefinite"/>
+                      </p:stCondLst>
+                      <p:childTnLst>
+                        <p:par>
+                          <p:cTn id="19" fill="hold">
+                            <p:stCondLst>
+                              <p:cond delay="0"/>
+                            </p:stCondLst>
+                            <p:childTnLst>
+                              <p:par>
+                                <p:cTn id="20" presetID="22" presetClass="entr" presetSubtype="8" fill="hold" nodeType="clickEffect">
+                                  <p:stCondLst>
+                                    <p:cond delay="0"/>
+                                  </p:stCondLst>
+                                  <p:childTnLst>
+                                    <p:set>
+                                      <p:cBhvr>
+                                        <p:cTn id="21" dur="1" fill="hold">
+                                          <p:stCondLst>
+                                            <p:cond delay="0"/>
+                                          </p:stCondLst>
+                                        </p:cTn>
+                                        <p:tgtEl>
+                                          <p:spTgt spid="11"/>
+                                        </p:tgtEl>
+                                        <p:attrNameLst>
+                                          <p:attrName>style.visibility</p:attrName>
+                                        </p:attrNameLst>
+                                      </p:cBhvr>
+                                      <p:to>
+                                        <p:strVal val="visible"/>
+                                      </p:to>
+                                    </p:set>
+                                    <p:animEffect transition="in" filter="wipe(left)">
+                                      <p:cBhvr>
+                                        <p:cTn id="22" dur="500"/>
+                                        <p:tgtEl>
+                                          <p:spTgt spid="11"/>
+                                        </p:tgtEl>
+                                      </p:cBhvr>
+                                    </p:animEffect>
+                                  </p:childTnLst>
+                                </p:cTn>
+                              </p:par>
+                            </p:childTnLst>
+                          </p:cTn>
+                        </p:par>
+                      </p:childTnLst>
+                    </p:cTn>
+                  </p:par>
+                </p:childTnLst>
+              </p:cTn>
+              <p:prevCondLst>
+                <p:cond evt="onPrev" delay="0">
+                  <p:tgtEl>
+                    <p:sldTgt/>
+                  </p:tgtEl>
+                </p:cond>
+              </p:prevCondLst>
+              <p:nextCondLst>
+                <p:cond evt="onNext" delay="0">
+                  <p:tgtEl>
+                    <p:sldTgt/>
+                  </p:tgtEl>
+                </p:cond>
+              </p:nextCondLst>
+            </p:seq>
+          </p:childTnLst>
+        </p:cTn>
+      </p:par>
+    </p:tnLst>
+    <p:bldLst>
+      <p:bldP spid="3" grpId="0"/>
+      <p:bldP spid="4" grpId="0"/>
+    </p:bldLst>
+  </p:timing>
+</p:sld>
+</file>
+
+<file path=ppt/slides/slide17.xml><?xml version="1.0" encoding="utf-8"?>
+<p:sld xmlns:a="http://schemas.openxmlformats.org/drawingml/2006/main" xmlns:r="http://schemas.openxmlformats.org/officeDocument/2006/relationships" xmlns:p="http://schemas.openxmlformats.org/presentationml/2006/main">
+  <p:cSld>
+    <p:spTree>
+      <p:nvGrpSpPr>
+        <p:cNvPr id="1" name=""/>
+        <p:cNvGrpSpPr/>
+        <p:nvPr/>
+      </p:nvGrpSpPr>
+      <p:grpSpPr>
+        <a:xfrm>
+          <a:off x="0" y="0"/>
+          <a:ext cx="0" cy="0"/>
+          <a:chOff x="0" y="0"/>
+          <a:chExt cx="0" cy="0"/>
+        </a:xfrm>
+      </p:grpSpPr>
+      <p:grpSp>
+        <p:nvGrpSpPr>
+          <p:cNvPr id="14" name="组合 4">
+            <a:extLst>
+              <a:ext uri="{FF2B5EF4-FFF2-40B4-BE49-F238E27FC236}">
+                <a16:creationId xmlns:a16="http://schemas.microsoft.com/office/drawing/2014/main" id="{CE851D11-A446-BE40-958A-C82A76AE684D}"/>
+              </a:ext>
+            </a:extLst>
+          </p:cNvPr>
+          <p:cNvGrpSpPr/>
+          <p:nvPr/>
+        </p:nvGrpSpPr>
+        <p:grpSpPr>
+          <a:xfrm>
+            <a:off x="1403648" y="409368"/>
+            <a:ext cx="7197041" cy="2803608"/>
+            <a:chOff x="2862290" y="680189"/>
+            <a:chExt cx="7197041" cy="2803608"/>
+          </a:xfrm>
+        </p:grpSpPr>
+        <p:graphicFrame>
+          <p:nvGraphicFramePr>
+            <p:cNvPr id="15" name="Object 6">
+              <a:extLst>
+                <a:ext uri="{FF2B5EF4-FFF2-40B4-BE49-F238E27FC236}">
+                  <a16:creationId xmlns:a16="http://schemas.microsoft.com/office/drawing/2014/main" id="{42075F95-03BA-984B-9DBE-4D89C7EC40D4}"/>
+                </a:ext>
+              </a:extLst>
+            </p:cNvPr>
+            <p:cNvGraphicFramePr>
+              <a:graphicFrameLocks noChangeAspect="1"/>
+            </p:cNvGraphicFramePr>
+            <p:nvPr>
+              <p:extLst>
+                <p:ext uri="{D42A27DB-BD31-4B8C-83A1-F6EECF244321}">
+                  <p14:modId xmlns:p14="http://schemas.microsoft.com/office/powerpoint/2010/main" val="2186435196"/>
+                </p:ext>
+              </p:extLst>
+            </p:nvPr>
+          </p:nvGraphicFramePr>
+          <p:xfrm>
+            <a:off x="5444887" y="680189"/>
+            <a:ext cx="4614444" cy="2803608"/>
+          </p:xfrm>
+          <a:graphic>
+            <a:graphicData uri="http://schemas.openxmlformats.org/presentationml/2006/ole">
+              <mc:AlternateContent xmlns:mc="http://schemas.openxmlformats.org/markup-compatibility/2006">
+                <mc:Choice xmlns:v="urn:schemas-microsoft-com:vml" Requires="v">
+                  <p:oleObj spid="_x0000_s15366" name="Equation" r:id="rId3" imgW="2006280" imgH="1218960" progId="Equation.DSMT4">
+                    <p:embed/>
+                  </p:oleObj>
+                </mc:Choice>
+                <mc:Fallback>
+                  <p:oleObj name="Equation" r:id="rId3" imgW="2006280" imgH="1218960" progId="Equation.DSMT4">
+                    <p:embed/>
+                    <p:pic>
+                      <p:nvPicPr>
+                        <p:cNvPr id="23" name="Object 6">
+                          <a:extLst>
+                            <a:ext uri="{FF2B5EF4-FFF2-40B4-BE49-F238E27FC236}">
+                              <a16:creationId xmlns:a16="http://schemas.microsoft.com/office/drawing/2014/main" id="{48C68257-B6DB-4B60-8DD8-7D12E50C4448}"/>
+                            </a:ext>
+                          </a:extLst>
+                        </p:cNvPr>
+                        <p:cNvPicPr>
+                          <a:picLocks noChangeAspect="1" noChangeArrowheads="1"/>
+                        </p:cNvPicPr>
+                        <p:nvPr/>
+                      </p:nvPicPr>
+                      <p:blipFill>
+                        <a:blip r:embed="rId4"/>
+                        <a:srcRect/>
+                        <a:stretch>
+                          <a:fillRect/>
+                        </a:stretch>
+                      </p:blipFill>
+                      <p:spPr bwMode="auto">
+                        <a:xfrm>
+                          <a:off x="5444887" y="680189"/>
+                          <a:ext cx="4614444" cy="2803608"/>
+                        </a:xfrm>
+                        <a:prstGeom prst="rect">
+                          <a:avLst/>
+                        </a:prstGeom>
+                        <a:noFill/>
+                      </p:spPr>
+                    </p:pic>
+                  </p:oleObj>
+                </mc:Fallback>
+              </mc:AlternateContent>
+            </a:graphicData>
+          </a:graphic>
+        </p:graphicFrame>
+        <p:sp>
+          <p:nvSpPr>
+            <p:cNvPr id="16" name="文本框 23">
+              <a:extLst>
+                <a:ext uri="{FF2B5EF4-FFF2-40B4-BE49-F238E27FC236}">
+                  <a16:creationId xmlns:a16="http://schemas.microsoft.com/office/drawing/2014/main" id="{BA4098D1-8AC9-1F4E-BC92-0D6B6C214947}"/>
+                </a:ext>
+              </a:extLst>
+            </p:cNvPr>
+            <p:cNvSpPr txBox="1"/>
+            <p:nvPr/>
+          </p:nvSpPr>
+          <p:spPr>
+            <a:xfrm>
+              <a:off x="2862290" y="1818547"/>
+              <a:ext cx="2681335" cy="523220"/>
+            </a:xfrm>
+            <a:prstGeom prst="rect">
+              <a:avLst/>
+            </a:prstGeom>
+            <a:noFill/>
+          </p:spPr>
+          <p:txBody>
+            <a:bodyPr wrap="square">
+              <a:spAutoFit/>
+            </a:bodyPr>
+            <a:lstStyle/>
+            <a:p>
+              <a:pPr marL="0" marR="0" lvl="0" indent="0" defTabSz="457200" eaLnBrk="1" fontAlgn="auto" latinLnBrk="0" hangingPunct="1">
+                <a:lnSpc>
+                  <a:spcPct val="100000"/>
+                </a:lnSpc>
+                <a:spcBef>
+                  <a:spcPts val="0"/>
+                </a:spcBef>
+                <a:spcAft>
+                  <a:spcPts val="0"/>
+                </a:spcAft>
+                <a:buClrTx/>
+                <a:buSzTx/>
+                <a:buFontTx/>
+                <a:buNone/>
+                <a:tabLst/>
+                <a:defRPr/>
+              </a:pPr>
+              <a:r>
+                <a:rPr kumimoji="0" lang="zh-CN" altLang="en-US" sz="1800" b="0" i="0" u="none" strike="noStrike" kern="0" cap="none" spc="0" normalizeH="0" baseline="0" noProof="0" dirty="0">
+                  <a:ln>
+                    <a:noFill/>
+                  </a:ln>
+                  <a:solidFill>
+                    <a:prstClr val="black"/>
+                  </a:solidFill>
+                  <a:effectLst/>
+                  <a:uLnTx/>
+                  <a:uFillTx/>
+                  <a:latin typeface="Times New Roman"/>
+                  <a:ea typeface="黑体"/>
+                </a:rPr>
+                <a:t>求解线性方程组</a:t>
+              </a:r>
+            </a:p>
+          </p:txBody>
+        </p:sp>
+      </p:grpSp>
+      <p:grpSp>
+        <p:nvGrpSpPr>
+          <p:cNvPr id="17" name="组合 1">
+            <a:extLst>
+              <a:ext uri="{FF2B5EF4-FFF2-40B4-BE49-F238E27FC236}">
+                <a16:creationId xmlns:a16="http://schemas.microsoft.com/office/drawing/2014/main" id="{1D2EC47B-1946-5344-A5BB-58A1DE904AC2}"/>
+              </a:ext>
+            </a:extLst>
+          </p:cNvPr>
+          <p:cNvGrpSpPr/>
+          <p:nvPr/>
+        </p:nvGrpSpPr>
+        <p:grpSpPr>
+          <a:xfrm>
+            <a:off x="278532" y="3083766"/>
+            <a:ext cx="5543045" cy="559151"/>
+            <a:chOff x="1754473" y="2736077"/>
+            <a:chExt cx="5543045" cy="559151"/>
+          </a:xfrm>
+        </p:grpSpPr>
+        <p:graphicFrame>
+          <p:nvGraphicFramePr>
+            <p:cNvPr id="18" name="Object 6">
+              <a:extLst>
+                <a:ext uri="{FF2B5EF4-FFF2-40B4-BE49-F238E27FC236}">
+                  <a16:creationId xmlns:a16="http://schemas.microsoft.com/office/drawing/2014/main" id="{6865E91E-3B24-C748-9A20-13E13DA8B30A}"/>
+                </a:ext>
+              </a:extLst>
+            </p:cNvPr>
+            <p:cNvGraphicFramePr>
+              <a:graphicFrameLocks noChangeAspect="1"/>
+            </p:cNvGraphicFramePr>
+            <p:nvPr>
+              <p:extLst>
+                <p:ext uri="{D42A27DB-BD31-4B8C-83A1-F6EECF244321}">
+                  <p14:modId xmlns:p14="http://schemas.microsoft.com/office/powerpoint/2010/main" val="1027333875"/>
+                </p:ext>
+              </p:extLst>
+            </p:nvPr>
+          </p:nvGraphicFramePr>
+          <p:xfrm>
+            <a:off x="2624286" y="2740468"/>
+            <a:ext cx="4673232" cy="554760"/>
+          </p:xfrm>
+          <a:graphic>
+            <a:graphicData uri="http://schemas.openxmlformats.org/presentationml/2006/ole">
+              <mc:AlternateContent xmlns:mc="http://schemas.openxmlformats.org/markup-compatibility/2006">
+                <mc:Choice xmlns:v="urn:schemas-microsoft-com:vml" Requires="v">
+                  <p:oleObj spid="_x0000_s15367" name="Equation" r:id="rId5" imgW="2031840" imgH="241200" progId="Equation.DSMT4">
+                    <p:embed/>
+                  </p:oleObj>
+                </mc:Choice>
+                <mc:Fallback>
+                  <p:oleObj name="Equation" r:id="rId5" imgW="2031840" imgH="241200" progId="Equation.DSMT4">
+                    <p:embed/>
+                    <p:pic>
+                      <p:nvPicPr>
+                        <p:cNvPr id="25" name="Object 6">
+                          <a:extLst>
+                            <a:ext uri="{FF2B5EF4-FFF2-40B4-BE49-F238E27FC236}">
+                              <a16:creationId xmlns:a16="http://schemas.microsoft.com/office/drawing/2014/main" id="{48C68257-B6DB-4B60-8DD8-7D12E50C4448}"/>
+                            </a:ext>
+                          </a:extLst>
+                        </p:cNvPr>
+                        <p:cNvPicPr>
+                          <a:picLocks noChangeAspect="1" noChangeArrowheads="1"/>
+                        </p:cNvPicPr>
+                        <p:nvPr/>
+                      </p:nvPicPr>
+                      <p:blipFill>
+                        <a:blip r:embed="rId6"/>
+                        <a:srcRect/>
+                        <a:stretch>
+                          <a:fillRect/>
+                        </a:stretch>
+                      </p:blipFill>
+                      <p:spPr bwMode="auto">
+                        <a:xfrm>
+                          <a:off x="2624286" y="2740468"/>
+                          <a:ext cx="4673232" cy="554760"/>
+                        </a:xfrm>
+                        <a:prstGeom prst="rect">
+                          <a:avLst/>
+                        </a:prstGeom>
+                        <a:noFill/>
+                      </p:spPr>
+                    </p:pic>
+                  </p:oleObj>
+                </mc:Fallback>
+              </mc:AlternateContent>
+            </a:graphicData>
+          </a:graphic>
+        </p:graphicFrame>
+        <p:sp>
+          <p:nvSpPr>
+            <p:cNvPr id="19" name="文本框 25">
+              <a:extLst>
+                <a:ext uri="{FF2B5EF4-FFF2-40B4-BE49-F238E27FC236}">
+                  <a16:creationId xmlns:a16="http://schemas.microsoft.com/office/drawing/2014/main" id="{03D9D9F1-AC3A-AE41-9B1A-BE8F7004B794}"/>
+                </a:ext>
+              </a:extLst>
+            </p:cNvPr>
+            <p:cNvSpPr txBox="1"/>
+            <p:nvPr/>
+          </p:nvSpPr>
+          <p:spPr>
+            <a:xfrm>
+              <a:off x="1754473" y="2736077"/>
+              <a:ext cx="910069" cy="523220"/>
+            </a:xfrm>
+            <a:prstGeom prst="rect">
+              <a:avLst/>
+            </a:prstGeom>
+            <a:noFill/>
+          </p:spPr>
+          <p:txBody>
+            <a:bodyPr wrap="square">
+              <a:spAutoFit/>
+            </a:bodyPr>
+            <a:lstStyle/>
+            <a:p>
+              <a:pPr marL="0" marR="0" lvl="0" indent="0" defTabSz="457200" eaLnBrk="1" fontAlgn="auto" latinLnBrk="0" hangingPunct="1">
+                <a:lnSpc>
+                  <a:spcPct val="100000"/>
+                </a:lnSpc>
+                <a:spcBef>
+                  <a:spcPts val="0"/>
+                </a:spcBef>
+                <a:spcAft>
+                  <a:spcPts val="0"/>
+                </a:spcAft>
+                <a:buClrTx/>
+                <a:buSzTx/>
+                <a:buFontTx/>
+                <a:buNone/>
+                <a:tabLst/>
+                <a:defRPr/>
+              </a:pPr>
+              <a:r>
+                <a:rPr kumimoji="0" lang="zh-CN" altLang="en-US" sz="1800" b="0" i="0" u="none" strike="noStrike" kern="0" cap="none" spc="0" normalizeH="0" baseline="0" noProof="0" dirty="0">
+                  <a:ln>
+                    <a:noFill/>
+                  </a:ln>
+                  <a:solidFill>
+                    <a:prstClr val="black"/>
+                  </a:solidFill>
+                  <a:effectLst/>
+                  <a:uLnTx/>
+                  <a:uFillTx/>
+                  <a:latin typeface="Times New Roman"/>
+                  <a:ea typeface="黑体"/>
+                </a:rPr>
+                <a:t>其中</a:t>
+              </a:r>
+            </a:p>
+          </p:txBody>
+        </p:sp>
+      </p:grpSp>
+      <p:sp>
+        <p:nvSpPr>
+          <p:cNvPr id="20" name="文本框 26">
+            <a:extLst>
+              <a:ext uri="{FF2B5EF4-FFF2-40B4-BE49-F238E27FC236}">
+                <a16:creationId xmlns:a16="http://schemas.microsoft.com/office/drawing/2014/main" id="{961E48A3-A753-B348-B798-CE0EA113ED6B}"/>
+              </a:ext>
+            </a:extLst>
+          </p:cNvPr>
+          <p:cNvSpPr txBox="1"/>
+          <p:nvPr/>
+        </p:nvSpPr>
+        <p:spPr>
+          <a:xfrm>
+            <a:off x="344428" y="1387150"/>
+            <a:ext cx="993862" cy="564514"/>
+          </a:xfrm>
+          <a:prstGeom prst="rect">
+            <a:avLst/>
+          </a:prstGeom>
+          <a:noFill/>
+        </p:spPr>
+        <p:txBody>
+          <a:bodyPr wrap="square" lIns="0" tIns="0" rIns="0" bIns="0" rtlCol="0">
+            <a:spAutoFit/>
+          </a:bodyPr>
+          <a:lstStyle/>
+          <a:p>
+            <a:pPr defTabSz="457200" eaLnBrk="1" fontAlgn="auto" hangingPunct="1">
+              <a:lnSpc>
+                <a:spcPct val="150000"/>
+              </a:lnSpc>
+              <a:spcBef>
+                <a:spcPts val="0"/>
+              </a:spcBef>
+              <a:spcAft>
+                <a:spcPts val="0"/>
+              </a:spcAft>
+            </a:pPr>
+            <a:r>
+              <a:rPr kumimoji="0" lang="zh-CN" altLang="en-US" dirty="0">
+                <a:solidFill>
+                  <a:prstClr val="black"/>
+                </a:solidFill>
+                <a:latin typeface="Times New Roman"/>
+                <a:ea typeface="黑体"/>
+                <a:cs typeface="+mn-ea"/>
+                <a:sym typeface="+mn-lt"/>
+              </a:rPr>
+              <a:t>📚</a:t>
+            </a:r>
+            <a:r>
+              <a:rPr kumimoji="0" lang="zh-CN" altLang="en-US" dirty="0">
+                <a:solidFill>
+                  <a:prstClr val="black"/>
+                </a:solidFill>
+                <a:highlight>
+                  <a:srgbClr val="FFC000"/>
+                </a:highlight>
+                <a:latin typeface="Times New Roman"/>
+                <a:ea typeface="黑体"/>
+                <a:cs typeface="+mn-ea"/>
+                <a:sym typeface="+mn-lt"/>
+              </a:rPr>
+              <a:t>例</a:t>
+            </a:r>
+            <a:r>
+              <a:rPr kumimoji="0" lang="en-US" altLang="zh-CN" dirty="0">
+                <a:solidFill>
+                  <a:prstClr val="black"/>
+                </a:solidFill>
+                <a:highlight>
+                  <a:srgbClr val="FFC000"/>
+                </a:highlight>
+                <a:latin typeface="Times New Roman"/>
+                <a:ea typeface="黑体"/>
+                <a:cs typeface="+mn-ea"/>
+                <a:sym typeface="+mn-lt"/>
+              </a:rPr>
+              <a:t>4</a:t>
+            </a:r>
+            <a:endParaRPr kumimoji="0" lang="zh-CN" altLang="en-US" dirty="0">
+              <a:solidFill>
+                <a:prstClr val="black"/>
+              </a:solidFill>
+              <a:highlight>
+                <a:srgbClr val="FFC000"/>
+              </a:highlight>
+              <a:latin typeface="Times New Roman"/>
+              <a:ea typeface="黑体"/>
+              <a:cs typeface="+mn-ea"/>
+              <a:sym typeface="+mn-lt"/>
+            </a:endParaRPr>
+          </a:p>
+        </p:txBody>
+      </p:sp>
+      <p:sp>
+        <p:nvSpPr>
+          <p:cNvPr id="21" name="Rectangle 46">
+            <a:extLst>
+              <a:ext uri="{FF2B5EF4-FFF2-40B4-BE49-F238E27FC236}">
+                <a16:creationId xmlns:a16="http://schemas.microsoft.com/office/drawing/2014/main" id="{86D9CC52-1AE3-ED4E-8012-DD7EB64BDD77}"/>
+              </a:ext>
+            </a:extLst>
+          </p:cNvPr>
+          <p:cNvSpPr>
+            <a:spLocks noChangeArrowheads="1"/>
+          </p:cNvSpPr>
+          <p:nvPr/>
+        </p:nvSpPr>
+        <p:spPr bwMode="auto">
+          <a:xfrm rot="10800000" flipV="1">
+            <a:off x="278532" y="4759281"/>
+            <a:ext cx="350735" cy="564514"/>
+          </a:xfrm>
+          <a:prstGeom prst="rect">
+            <a:avLst/>
+          </a:prstGeom>
+          <a:noFill/>
+          <a:ln w="9525">
+            <a:noFill/>
+            <a:miter lim="800000"/>
+            <a:headEnd/>
+            <a:tailEnd/>
+          </a:ln>
+          <a:effectLst/>
+        </p:spPr>
+        <p:txBody>
+          <a:bodyPr wrap="square" lIns="0" tIns="0" rIns="0" bIns="0" anchor="t" anchorCtr="0">
+            <a:spAutoFit/>
+          </a:bodyPr>
+          <a:lstStyle/>
+          <a:p>
+            <a:pPr defTabSz="457200" eaLnBrk="1" fontAlgn="auto" hangingPunct="1">
+              <a:lnSpc>
+                <a:spcPct val="150000"/>
+              </a:lnSpc>
+              <a:spcBef>
+                <a:spcPts val="0"/>
+              </a:spcBef>
+              <a:spcAft>
+                <a:spcPts val="0"/>
+              </a:spcAft>
+            </a:pPr>
+            <a:r>
+              <a:rPr lang="zh-CN" altLang="en-US" dirty="0">
+                <a:solidFill>
+                  <a:prstClr val="black"/>
+                </a:solidFill>
+                <a:highlight>
+                  <a:srgbClr val="FFC000"/>
+                </a:highlight>
+                <a:latin typeface="Times New Roman"/>
+                <a:ea typeface="黑体"/>
+                <a:cs typeface="+mn-ea"/>
+                <a:sym typeface="+mn-lt"/>
+              </a:rPr>
+              <a:t>解</a:t>
+            </a:r>
+            <a:endParaRPr lang="en-US" altLang="zh-CN" dirty="0">
+              <a:solidFill>
+                <a:srgbClr val="FFC000"/>
+              </a:solidFill>
+              <a:highlight>
+                <a:srgbClr val="FFC000"/>
+              </a:highlight>
+              <a:latin typeface="Times New Roman"/>
+              <a:ea typeface="黑体"/>
+              <a:cs typeface="+mn-ea"/>
+              <a:sym typeface="+mn-lt"/>
+            </a:endParaRPr>
+          </a:p>
+        </p:txBody>
+      </p:sp>
+      <p:graphicFrame>
+        <p:nvGraphicFramePr>
+          <p:cNvPr id="22" name="Object 6">
+            <a:extLst>
+              <a:ext uri="{FF2B5EF4-FFF2-40B4-BE49-F238E27FC236}">
+                <a16:creationId xmlns:a16="http://schemas.microsoft.com/office/drawing/2014/main" id="{DEEAEDC5-1648-A34B-8AE2-7973C5E77B2E}"/>
+              </a:ext>
+            </a:extLst>
+          </p:cNvPr>
+          <p:cNvGraphicFramePr>
+            <a:graphicFrameLocks noChangeAspect="1"/>
+          </p:cNvGraphicFramePr>
+          <p:nvPr>
+            <p:extLst>
+              <p:ext uri="{D42A27DB-BD31-4B8C-83A1-F6EECF244321}">
+                <p14:modId xmlns:p14="http://schemas.microsoft.com/office/powerpoint/2010/main" val="2476746377"/>
+              </p:ext>
+            </p:extLst>
+          </p:nvPr>
+        </p:nvGraphicFramePr>
+        <p:xfrm>
+          <a:off x="630258" y="3717032"/>
+          <a:ext cx="3941763" cy="2686050"/>
+        </p:xfrm>
+        <a:graphic>
+          <a:graphicData uri="http://schemas.openxmlformats.org/presentationml/2006/ole">
+            <mc:AlternateContent xmlns:mc="http://schemas.openxmlformats.org/markup-compatibility/2006">
+              <mc:Choice xmlns:v="urn:schemas-microsoft-com:vml" Requires="v">
+                <p:oleObj spid="_x0000_s15368" name="Equation" r:id="rId7" imgW="1714320" imgH="1168200" progId="Equation.DSMT4">
+                  <p:embed/>
+                </p:oleObj>
+              </mc:Choice>
+              <mc:Fallback>
+                <p:oleObj name="Equation" r:id="rId7" imgW="1714320" imgH="1168200" progId="Equation.DSMT4">
+                  <p:embed/>
+                  <p:pic>
+                    <p:nvPicPr>
+                      <p:cNvPr id="36" name="Object 6">
+                        <a:extLst>
+                          <a:ext uri="{FF2B5EF4-FFF2-40B4-BE49-F238E27FC236}">
+                            <a16:creationId xmlns:a16="http://schemas.microsoft.com/office/drawing/2014/main" id="{4F2AD099-5E6C-46D2-AD3C-A474892BFEB6}"/>
+                          </a:ext>
+                        </a:extLst>
+                      </p:cNvPr>
+                      <p:cNvPicPr>
+                        <a:picLocks noChangeAspect="1" noChangeArrowheads="1"/>
+                      </p:cNvPicPr>
+                      <p:nvPr/>
+                    </p:nvPicPr>
+                    <p:blipFill>
+                      <a:blip r:embed="rId8"/>
+                      <a:srcRect/>
+                      <a:stretch>
+                        <a:fillRect/>
+                      </a:stretch>
+                    </p:blipFill>
+                    <p:spPr bwMode="auto">
+                      <a:xfrm>
+                        <a:off x="630258" y="3717032"/>
+                        <a:ext cx="3941763" cy="2686050"/>
+                      </a:xfrm>
+                      <a:prstGeom prst="rect">
+                        <a:avLst/>
+                      </a:prstGeom>
+                      <a:noFill/>
+                      <a:extLst>
+                        <a:ext uri="{909E8E84-426E-40DD-AFC4-6F175D3DCCD1}">
+                          <a14:hiddenFill xmlns:a14="http://schemas.microsoft.com/office/drawing/2010/main">
+                            <a:solidFill>
+                              <a:srgbClr val="FFFFFF"/>
+                            </a:solidFill>
+                          </a14:hiddenFill>
+                        </a:ext>
+                      </a:extLst>
+                    </p:spPr>
+                  </p:pic>
+                </p:oleObj>
+              </mc:Fallback>
+            </mc:AlternateContent>
+          </a:graphicData>
+        </a:graphic>
+      </p:graphicFrame>
+      <p:graphicFrame>
+        <p:nvGraphicFramePr>
+          <p:cNvPr id="23" name="Object 6">
+            <a:extLst>
+              <a:ext uri="{FF2B5EF4-FFF2-40B4-BE49-F238E27FC236}">
+                <a16:creationId xmlns:a16="http://schemas.microsoft.com/office/drawing/2014/main" id="{EAEC0695-3745-D94C-9F2E-A043CF435239}"/>
+              </a:ext>
+            </a:extLst>
+          </p:cNvPr>
+          <p:cNvGraphicFramePr>
+            <a:graphicFrameLocks noChangeAspect="1"/>
+          </p:cNvGraphicFramePr>
+          <p:nvPr>
+            <p:extLst>
+              <p:ext uri="{D42A27DB-BD31-4B8C-83A1-F6EECF244321}">
+                <p14:modId xmlns:p14="http://schemas.microsoft.com/office/powerpoint/2010/main" val="3905501770"/>
+              </p:ext>
+            </p:extLst>
+          </p:nvPr>
+        </p:nvGraphicFramePr>
+        <p:xfrm>
+          <a:off x="4572000" y="4821060"/>
+          <a:ext cx="2278062" cy="847725"/>
+        </p:xfrm>
+        <a:graphic>
+          <a:graphicData uri="http://schemas.openxmlformats.org/presentationml/2006/ole">
+            <mc:AlternateContent xmlns:mc="http://schemas.openxmlformats.org/markup-compatibility/2006">
+              <mc:Choice xmlns:v="urn:schemas-microsoft-com:vml" Requires="v">
+                <p:oleObj spid="_x0000_s15369" name="Equation" r:id="rId9" imgW="990360" imgH="368280" progId="Equation.DSMT4">
+                  <p:embed/>
+                </p:oleObj>
+              </mc:Choice>
+              <mc:Fallback>
+                <p:oleObj name="Equation" r:id="rId9" imgW="990360" imgH="368280" progId="Equation.DSMT4">
+                  <p:embed/>
+                  <p:pic>
+                    <p:nvPicPr>
+                      <p:cNvPr id="37" name="Object 6">
+                        <a:extLst>
+                          <a:ext uri="{FF2B5EF4-FFF2-40B4-BE49-F238E27FC236}">
+                            <a16:creationId xmlns:a16="http://schemas.microsoft.com/office/drawing/2014/main" id="{3FA8089A-95AE-4B29-BBDA-DE2E67F8BD46}"/>
+                          </a:ext>
+                        </a:extLst>
+                      </p:cNvPr>
+                      <p:cNvPicPr>
+                        <a:picLocks noChangeAspect="1" noChangeArrowheads="1"/>
+                      </p:cNvPicPr>
+                      <p:nvPr/>
+                    </p:nvPicPr>
+                    <p:blipFill>
+                      <a:blip r:embed="rId10"/>
+                      <a:srcRect/>
+                      <a:stretch>
+                        <a:fillRect/>
+                      </a:stretch>
+                    </p:blipFill>
+                    <p:spPr bwMode="auto">
+                      <a:xfrm>
+                        <a:off x="4572000" y="4821060"/>
+                        <a:ext cx="2278062" cy="847725"/>
+                      </a:xfrm>
+                      <a:prstGeom prst="rect">
+                        <a:avLst/>
+                      </a:prstGeom>
+                      <a:noFill/>
+                      <a:extLst>
+                        <a:ext uri="{909E8E84-426E-40DD-AFC4-6F175D3DCCD1}">
+                          <a14:hiddenFill xmlns:a14="http://schemas.microsoft.com/office/drawing/2010/main">
+                            <a:solidFill>
+                              <a:srgbClr val="FFFFFF"/>
+                            </a:solidFill>
+                          </a14:hiddenFill>
+                        </a:ext>
+                      </a:extLst>
+                    </p:spPr>
+                  </p:pic>
+                </p:oleObj>
+              </mc:Fallback>
+            </mc:AlternateContent>
+          </a:graphicData>
+        </a:graphic>
+      </p:graphicFrame>
+      <p:graphicFrame>
+        <p:nvGraphicFramePr>
+          <p:cNvPr id="24" name="Object 6">
+            <a:extLst>
+              <a:ext uri="{FF2B5EF4-FFF2-40B4-BE49-F238E27FC236}">
+                <a16:creationId xmlns:a16="http://schemas.microsoft.com/office/drawing/2014/main" id="{A9555231-7589-2747-B303-CB8924526E96}"/>
+              </a:ext>
+            </a:extLst>
+          </p:cNvPr>
+          <p:cNvGraphicFramePr>
+            <a:graphicFrameLocks noChangeAspect="1"/>
+          </p:cNvGraphicFramePr>
+          <p:nvPr>
+            <p:extLst>
+              <p:ext uri="{D42A27DB-BD31-4B8C-83A1-F6EECF244321}">
+                <p14:modId xmlns:p14="http://schemas.microsoft.com/office/powerpoint/2010/main" val="990297286"/>
+              </p:ext>
+            </p:extLst>
+          </p:nvPr>
+        </p:nvGraphicFramePr>
+        <p:xfrm>
+          <a:off x="6850063" y="4914221"/>
+          <a:ext cx="642937" cy="409575"/>
+        </p:xfrm>
+        <a:graphic>
+          <a:graphicData uri="http://schemas.openxmlformats.org/presentationml/2006/ole">
+            <mc:AlternateContent xmlns:mc="http://schemas.openxmlformats.org/markup-compatibility/2006">
+              <mc:Choice xmlns:v="urn:schemas-microsoft-com:vml" Requires="v">
+                <p:oleObj spid="_x0000_s15370" name="Equation" r:id="rId11" imgW="279360" imgH="177480" progId="Equation.DSMT4">
+                  <p:embed/>
+                </p:oleObj>
+              </mc:Choice>
+              <mc:Fallback>
+                <p:oleObj name="Equation" r:id="rId11" imgW="279360" imgH="177480" progId="Equation.DSMT4">
+                  <p:embed/>
+                  <p:pic>
+                    <p:nvPicPr>
+                      <p:cNvPr id="43" name="Object 6">
+                        <a:extLst>
+                          <a:ext uri="{FF2B5EF4-FFF2-40B4-BE49-F238E27FC236}">
+                            <a16:creationId xmlns:a16="http://schemas.microsoft.com/office/drawing/2014/main" id="{A9B1C2B2-49C8-4EC7-9F83-BDC870B5EF40}"/>
+                          </a:ext>
+                        </a:extLst>
+                      </p:cNvPr>
+                      <p:cNvPicPr>
+                        <a:picLocks noChangeAspect="1" noChangeArrowheads="1"/>
+                      </p:cNvPicPr>
+                      <p:nvPr/>
+                    </p:nvPicPr>
+                    <p:blipFill>
+                      <a:blip r:embed="rId12"/>
+                      <a:srcRect/>
+                      <a:stretch>
+                        <a:fillRect/>
+                      </a:stretch>
+                    </p:blipFill>
+                    <p:spPr bwMode="auto">
+                      <a:xfrm>
+                        <a:off x="6850063" y="4914221"/>
+                        <a:ext cx="642937" cy="409575"/>
+                      </a:xfrm>
+                      <a:prstGeom prst="rect">
+                        <a:avLst/>
+                      </a:prstGeom>
+                      <a:noFill/>
+                      <a:extLst>
+                        <a:ext uri="{909E8E84-426E-40DD-AFC4-6F175D3DCCD1}">
+                          <a14:hiddenFill xmlns:a14="http://schemas.microsoft.com/office/drawing/2010/main">
+                            <a:solidFill>
+                              <a:srgbClr val="FFFFFF"/>
+                            </a:solidFill>
+                          </a14:hiddenFill>
+                        </a:ext>
+                      </a:extLst>
+                    </p:spPr>
+                  </p:pic>
+                </p:oleObj>
+              </mc:Fallback>
+            </mc:AlternateContent>
+          </a:graphicData>
+        </a:graphic>
+      </p:graphicFrame>
+      <p:cxnSp>
+        <p:nvCxnSpPr>
+          <p:cNvPr id="25" name="直接连接符 43">
+            <a:extLst>
+              <a:ext uri="{FF2B5EF4-FFF2-40B4-BE49-F238E27FC236}">
+                <a16:creationId xmlns:a16="http://schemas.microsoft.com/office/drawing/2014/main" id="{A59B5BF0-D89A-2644-B779-BFC2FE40F08C}"/>
+              </a:ext>
+            </a:extLst>
+          </p:cNvPr>
+          <p:cNvCxnSpPr>
+            <a:cxnSpLocks/>
+          </p:cNvCxnSpPr>
+          <p:nvPr/>
+        </p:nvCxnSpPr>
+        <p:spPr>
+          <a:xfrm>
+            <a:off x="-1524000" y="3725142"/>
+            <a:ext cx="12193200" cy="0"/>
+          </a:xfrm>
+          <a:prstGeom prst="line">
+            <a:avLst/>
+          </a:prstGeom>
+          <a:noFill/>
+          <a:ln w="38100" cap="flat" cmpd="sng" algn="ctr">
+            <a:solidFill>
+              <a:srgbClr val="449BAF"/>
+            </a:solidFill>
+            <a:prstDash val="solid"/>
+            <a:miter lim="800000"/>
+          </a:ln>
+          <a:effectLst/>
+        </p:spPr>
+      </p:cxnSp>
+    </p:spTree>
+    <p:extLst>
+      <p:ext uri="{BB962C8B-B14F-4D97-AF65-F5344CB8AC3E}">
+        <p14:creationId xmlns:p14="http://schemas.microsoft.com/office/powerpoint/2010/main" val="3666960661"/>
+      </p:ext>
+    </p:extLst>
+  </p:cSld>
+  <p:clrMapOvr>
+    <a:masterClrMapping/>
+  </p:clrMapOvr>
+  <p:transition spd="slow">
+    <p:split orient="vert"/>
+  </p:transition>
+  <p:timing>
+    <p:tnLst>
+      <p:par>
+        <p:cTn id="1" dur="indefinite" restart="never" nodeType="tmRoot">
+          <p:childTnLst>
+            <p:seq concurrent="1" nextAc="seek">
+              <p:cTn id="2" dur="indefinite" nodeType="mainSeq">
+                <p:childTnLst>
+                  <p:par>
+                    <p:cTn id="3" fill="hold">
+                      <p:stCondLst>
+                        <p:cond delay="indefinite"/>
+                      </p:stCondLst>
+                      <p:childTnLst>
+                        <p:par>
+                          <p:cTn id="4" fill="hold">
+                            <p:stCondLst>
+                              <p:cond delay="0"/>
+                            </p:stCondLst>
+                            <p:childTnLst>
+                              <p:par>
+                                <p:cTn id="5" presetID="22" presetClass="entr" presetSubtype="8" fill="hold" grpId="0" nodeType="clickEffect">
+                                  <p:stCondLst>
+                                    <p:cond delay="0"/>
+                                  </p:stCondLst>
+                                  <p:childTnLst>
+                                    <p:set>
+                                      <p:cBhvr>
+                                        <p:cTn id="6" dur="1" fill="hold">
+                                          <p:stCondLst>
+                                            <p:cond delay="0"/>
+                                          </p:stCondLst>
+                                        </p:cTn>
+                                        <p:tgtEl>
+                                          <p:spTgt spid="20"/>
+                                        </p:tgtEl>
+                                        <p:attrNameLst>
+                                          <p:attrName>style.visibility</p:attrName>
+                                        </p:attrNameLst>
+                                      </p:cBhvr>
+                                      <p:to>
+                                        <p:strVal val="visible"/>
+                                      </p:to>
+                                    </p:set>
+                                    <p:animEffect transition="in" filter="wipe(left)">
+                                      <p:cBhvr>
+                                        <p:cTn id="7" dur="500"/>
+                                        <p:tgtEl>
+                                          <p:spTgt spid="20"/>
+                                        </p:tgtEl>
+                                      </p:cBhvr>
+                                    </p:animEffect>
+                                  </p:childTnLst>
+                                </p:cTn>
+                              </p:par>
+                            </p:childTnLst>
+                          </p:cTn>
+                        </p:par>
+                        <p:par>
+                          <p:cTn id="8" fill="hold">
+                            <p:stCondLst>
+                              <p:cond delay="500"/>
+                            </p:stCondLst>
+                            <p:childTnLst>
+                              <p:par>
+                                <p:cTn id="9" presetID="22" presetClass="entr" presetSubtype="8" fill="hold" nodeType="afterEffect">
+                                  <p:stCondLst>
+                                    <p:cond delay="0"/>
+                                  </p:stCondLst>
+                                  <p:childTnLst>
+                                    <p:set>
+                                      <p:cBhvr>
+                                        <p:cTn id="10" dur="1" fill="hold">
+                                          <p:stCondLst>
+                                            <p:cond delay="0"/>
+                                          </p:stCondLst>
+                                        </p:cTn>
+                                        <p:tgtEl>
+                                          <p:spTgt spid="14"/>
+                                        </p:tgtEl>
+                                        <p:attrNameLst>
+                                          <p:attrName>style.visibility</p:attrName>
+                                        </p:attrNameLst>
+                                      </p:cBhvr>
+                                      <p:to>
+                                        <p:strVal val="visible"/>
+                                      </p:to>
+                                    </p:set>
+                                    <p:animEffect transition="in" filter="wipe(left)">
+                                      <p:cBhvr>
+                                        <p:cTn id="11" dur="500"/>
+                                        <p:tgtEl>
+                                          <p:spTgt spid="14"/>
+                                        </p:tgtEl>
+                                      </p:cBhvr>
+                                    </p:animEffect>
+                                  </p:childTnLst>
+                                </p:cTn>
+                              </p:par>
+                            </p:childTnLst>
+                          </p:cTn>
+                        </p:par>
+                      </p:childTnLst>
+                    </p:cTn>
+                  </p:par>
+                  <p:par>
+                    <p:cTn id="12" fill="hold">
+                      <p:stCondLst>
+                        <p:cond delay="indefinite"/>
+                      </p:stCondLst>
+                      <p:childTnLst>
+                        <p:par>
+                          <p:cTn id="13" fill="hold">
+                            <p:stCondLst>
+                              <p:cond delay="0"/>
+                            </p:stCondLst>
+                            <p:childTnLst>
+                              <p:par>
+                                <p:cTn id="14" presetID="22" presetClass="entr" presetSubtype="8" fill="hold" nodeType="clickEffect">
+                                  <p:stCondLst>
+                                    <p:cond delay="0"/>
+                                  </p:stCondLst>
+                                  <p:childTnLst>
+                                    <p:set>
+                                      <p:cBhvr>
+                                        <p:cTn id="15" dur="1" fill="hold">
+                                          <p:stCondLst>
+                                            <p:cond delay="0"/>
+                                          </p:stCondLst>
+                                        </p:cTn>
+                                        <p:tgtEl>
+                                          <p:spTgt spid="17"/>
+                                        </p:tgtEl>
+                                        <p:attrNameLst>
+                                          <p:attrName>style.visibility</p:attrName>
+                                        </p:attrNameLst>
+                                      </p:cBhvr>
+                                      <p:to>
+                                        <p:strVal val="visible"/>
+                                      </p:to>
+                                    </p:set>
+                                    <p:animEffect transition="in" filter="wipe(left)">
+                                      <p:cBhvr>
+                                        <p:cTn id="16" dur="500"/>
+                                        <p:tgtEl>
+                                          <p:spTgt spid="17"/>
+                                        </p:tgtEl>
+                                      </p:cBhvr>
+                                    </p:animEffect>
+                                  </p:childTnLst>
+                                </p:cTn>
+                              </p:par>
+                            </p:childTnLst>
+                          </p:cTn>
+                        </p:par>
+                      </p:childTnLst>
+                    </p:cTn>
+                  </p:par>
+                  <p:par>
+                    <p:cTn id="17" fill="hold">
+                      <p:stCondLst>
+                        <p:cond delay="indefinite"/>
+                      </p:stCondLst>
+                      <p:childTnLst>
+                        <p:par>
+                          <p:cTn id="18" fill="hold">
+                            <p:stCondLst>
+                              <p:cond delay="0"/>
+                            </p:stCondLst>
+                            <p:childTnLst>
+                              <p:par>
+                                <p:cTn id="19" presetID="22" presetClass="entr" presetSubtype="8" fill="hold" nodeType="clickEffect">
+                                  <p:stCondLst>
+                                    <p:cond delay="0"/>
+                                  </p:stCondLst>
+                                  <p:childTnLst>
+                                    <p:set>
+                                      <p:cBhvr>
+                                        <p:cTn id="20" dur="1" fill="hold">
+                                          <p:stCondLst>
+                                            <p:cond delay="0"/>
+                                          </p:stCondLst>
+                                        </p:cTn>
+                                        <p:tgtEl>
+                                          <p:spTgt spid="25"/>
+                                        </p:tgtEl>
+                                        <p:attrNameLst>
+                                          <p:attrName>style.visibility</p:attrName>
+                                        </p:attrNameLst>
+                                      </p:cBhvr>
+                                      <p:to>
+                                        <p:strVal val="visible"/>
+                                      </p:to>
+                                    </p:set>
+                                    <p:animEffect transition="in" filter="wipe(left)">
+                                      <p:cBhvr>
+                                        <p:cTn id="21" dur="500"/>
+                                        <p:tgtEl>
+                                          <p:spTgt spid="25"/>
+                                        </p:tgtEl>
+                                      </p:cBhvr>
+                                    </p:animEffect>
+                                  </p:childTnLst>
+                                </p:cTn>
+                              </p:par>
+                            </p:childTnLst>
+                          </p:cTn>
+                        </p:par>
+                      </p:childTnLst>
+                    </p:cTn>
+                  </p:par>
+                  <p:par>
+                    <p:cTn id="22" fill="hold">
+                      <p:stCondLst>
+                        <p:cond delay="indefinite"/>
+                      </p:stCondLst>
+                      <p:childTnLst>
+                        <p:par>
+                          <p:cTn id="23" fill="hold">
+                            <p:stCondLst>
+                              <p:cond delay="0"/>
+                            </p:stCondLst>
+                            <p:childTnLst>
+                              <p:par>
+                                <p:cTn id="24" presetID="22" presetClass="entr" presetSubtype="8" fill="hold" grpId="0" nodeType="clickEffect">
+                                  <p:stCondLst>
+                                    <p:cond delay="0"/>
+                                  </p:stCondLst>
+                                  <p:childTnLst>
+                                    <p:set>
+                                      <p:cBhvr>
+                                        <p:cTn id="25" dur="1" fill="hold">
+                                          <p:stCondLst>
+                                            <p:cond delay="0"/>
+                                          </p:stCondLst>
+                                        </p:cTn>
+                                        <p:tgtEl>
+                                          <p:spTgt spid="21"/>
+                                        </p:tgtEl>
+                                        <p:attrNameLst>
+                                          <p:attrName>style.visibility</p:attrName>
+                                        </p:attrNameLst>
+                                      </p:cBhvr>
+                                      <p:to>
+                                        <p:strVal val="visible"/>
+                                      </p:to>
+                                    </p:set>
+                                    <p:animEffect transition="in" filter="wipe(left)">
+                                      <p:cBhvr>
+                                        <p:cTn id="26" dur="500"/>
+                                        <p:tgtEl>
+                                          <p:spTgt spid="21"/>
+                                        </p:tgtEl>
+                                      </p:cBhvr>
+                                    </p:animEffect>
+                                  </p:childTnLst>
+                                </p:cTn>
+                              </p:par>
+                            </p:childTnLst>
+                          </p:cTn>
+                        </p:par>
+                        <p:par>
+                          <p:cTn id="27" fill="hold">
+                            <p:stCondLst>
+                              <p:cond delay="500"/>
+                            </p:stCondLst>
+                            <p:childTnLst>
+                              <p:par>
+                                <p:cTn id="28" presetID="22" presetClass="entr" presetSubtype="8" fill="hold" nodeType="afterEffect">
+                                  <p:stCondLst>
+                                    <p:cond delay="0"/>
+                                  </p:stCondLst>
+                                  <p:childTnLst>
+                                    <p:set>
+                                      <p:cBhvr>
+                                        <p:cTn id="29" dur="1" fill="hold">
+                                          <p:stCondLst>
+                                            <p:cond delay="0"/>
+                                          </p:stCondLst>
+                                        </p:cTn>
+                                        <p:tgtEl>
+                                          <p:spTgt spid="22"/>
+                                        </p:tgtEl>
+                                        <p:attrNameLst>
+                                          <p:attrName>style.visibility</p:attrName>
+                                        </p:attrNameLst>
+                                      </p:cBhvr>
+                                      <p:to>
+                                        <p:strVal val="visible"/>
+                                      </p:to>
+                                    </p:set>
+                                    <p:animEffect transition="in" filter="wipe(left)">
+                                      <p:cBhvr>
+                                        <p:cTn id="30" dur="500"/>
+                                        <p:tgtEl>
+                                          <p:spTgt spid="22"/>
+                                        </p:tgtEl>
+                                      </p:cBhvr>
+                                    </p:animEffect>
+                                  </p:childTnLst>
+                                </p:cTn>
+                              </p:par>
+                            </p:childTnLst>
+                          </p:cTn>
+                        </p:par>
+                      </p:childTnLst>
+                    </p:cTn>
+                  </p:par>
+                  <p:par>
+                    <p:cTn id="31" fill="hold">
+                      <p:stCondLst>
+                        <p:cond delay="indefinite"/>
+                      </p:stCondLst>
+                      <p:childTnLst>
+                        <p:par>
+                          <p:cTn id="32" fill="hold">
+                            <p:stCondLst>
+                              <p:cond delay="0"/>
+                            </p:stCondLst>
+                            <p:childTnLst>
+                              <p:par>
+                                <p:cTn id="33" presetID="22" presetClass="entr" presetSubtype="8" fill="hold" nodeType="clickEffect">
+                                  <p:stCondLst>
+                                    <p:cond delay="0"/>
+                                  </p:stCondLst>
+                                  <p:childTnLst>
+                                    <p:set>
+                                      <p:cBhvr>
+                                        <p:cTn id="34" dur="1" fill="hold">
+                                          <p:stCondLst>
+                                            <p:cond delay="0"/>
+                                          </p:stCondLst>
+                                        </p:cTn>
+                                        <p:tgtEl>
+                                          <p:spTgt spid="23"/>
+                                        </p:tgtEl>
+                                        <p:attrNameLst>
+                                          <p:attrName>style.visibility</p:attrName>
+                                        </p:attrNameLst>
+                                      </p:cBhvr>
+                                      <p:to>
+                                        <p:strVal val="visible"/>
+                                      </p:to>
+                                    </p:set>
+                                    <p:animEffect transition="in" filter="wipe(left)">
+                                      <p:cBhvr>
+                                        <p:cTn id="35" dur="500"/>
+                                        <p:tgtEl>
+                                          <p:spTgt spid="23"/>
+                                        </p:tgtEl>
+                                      </p:cBhvr>
+                                    </p:animEffect>
+                                  </p:childTnLst>
+                                </p:cTn>
+                              </p:par>
+                            </p:childTnLst>
+                          </p:cTn>
+                        </p:par>
+                      </p:childTnLst>
+                    </p:cTn>
+                  </p:par>
+                  <p:par>
+                    <p:cTn id="36" fill="hold">
+                      <p:stCondLst>
+                        <p:cond delay="indefinite"/>
+                      </p:stCondLst>
+                      <p:childTnLst>
+                        <p:par>
+                          <p:cTn id="37" fill="hold">
+                            <p:stCondLst>
+                              <p:cond delay="0"/>
+                            </p:stCondLst>
+                            <p:childTnLst>
+                              <p:par>
+                                <p:cTn id="38" presetID="22" presetClass="entr" presetSubtype="8" fill="hold" nodeType="clickEffect">
+                                  <p:stCondLst>
+                                    <p:cond delay="0"/>
+                                  </p:stCondLst>
+                                  <p:childTnLst>
+                                    <p:set>
+                                      <p:cBhvr>
+                                        <p:cTn id="39" dur="1" fill="hold">
+                                          <p:stCondLst>
+                                            <p:cond delay="0"/>
+                                          </p:stCondLst>
+                                        </p:cTn>
+                                        <p:tgtEl>
+                                          <p:spTgt spid="24"/>
+                                        </p:tgtEl>
+                                        <p:attrNameLst>
+                                          <p:attrName>style.visibility</p:attrName>
+                                        </p:attrNameLst>
+                                      </p:cBhvr>
+                                      <p:to>
+                                        <p:strVal val="visible"/>
+                                      </p:to>
+                                    </p:set>
+                                    <p:animEffect transition="in" filter="wipe(left)">
+                                      <p:cBhvr>
+                                        <p:cTn id="40" dur="500"/>
+                                        <p:tgtEl>
+                                          <p:spTgt spid="24"/>
+                                        </p:tgtEl>
+                                      </p:cBhvr>
+                                    </p:animEffect>
+                                  </p:childTnLst>
+                                </p:cTn>
+                              </p:par>
+                            </p:childTnLst>
+                          </p:cTn>
+                        </p:par>
+                      </p:childTnLst>
+                    </p:cTn>
+                  </p:par>
+                </p:childTnLst>
+              </p:cTn>
+              <p:prevCondLst>
+                <p:cond evt="onPrev" delay="0">
+                  <p:tgtEl>
+                    <p:sldTgt/>
+                  </p:tgtEl>
+                </p:cond>
+              </p:prevCondLst>
+              <p:nextCondLst>
+                <p:cond evt="onNext" delay="0">
+                  <p:tgtEl>
+                    <p:sldTgt/>
+                  </p:tgtEl>
+                </p:cond>
+              </p:nextCondLst>
+            </p:seq>
+          </p:childTnLst>
+        </p:cTn>
+      </p:par>
+    </p:tnLst>
+    <p:bldLst>
+      <p:bldP spid="20" grpId="0"/>
+      <p:bldP spid="21" grpId="0"/>
+    </p:bldLst>
+  </p:timing>
+</p:sld>
+</file>
+
+<file path=ppt/slides/slide18.xml><?xml version="1.0" encoding="utf-8"?>
+<p:sld xmlns:a="http://schemas.openxmlformats.org/drawingml/2006/main" xmlns:r="http://schemas.openxmlformats.org/officeDocument/2006/relationships" xmlns:p="http://schemas.openxmlformats.org/presentationml/2006/main">
+  <p:cSld>
+    <p:spTree>
+      <p:nvGrpSpPr>
+        <p:cNvPr id="1" name=""/>
+        <p:cNvGrpSpPr/>
+        <p:nvPr/>
+      </p:nvGrpSpPr>
+      <p:grpSpPr>
+        <a:xfrm>
+          <a:off x="0" y="0"/>
+          <a:ext cx="0" cy="0"/>
+          <a:chOff x="0" y="0"/>
+          <a:chExt cx="0" cy="0"/>
+        </a:xfrm>
+      </p:grpSpPr>
+      <p:graphicFrame>
+        <p:nvGraphicFramePr>
+          <p:cNvPr id="2" name="Object 6">
+            <a:extLst>
+              <a:ext uri="{FF2B5EF4-FFF2-40B4-BE49-F238E27FC236}">
+                <a16:creationId xmlns:a16="http://schemas.microsoft.com/office/drawing/2014/main" id="{EA57B112-2BCD-4E45-B7C7-6F11852816E7}"/>
+              </a:ext>
+            </a:extLst>
+          </p:cNvPr>
+          <p:cNvGraphicFramePr>
+            <a:graphicFrameLocks noChangeAspect="1"/>
+          </p:cNvGraphicFramePr>
+          <p:nvPr>
+            <p:extLst>
+              <p:ext uri="{D42A27DB-BD31-4B8C-83A1-F6EECF244321}">
+                <p14:modId xmlns:p14="http://schemas.microsoft.com/office/powerpoint/2010/main" val="2488826367"/>
+              </p:ext>
+            </p:extLst>
+          </p:nvPr>
+        </p:nvGraphicFramePr>
+        <p:xfrm>
+          <a:off x="278532" y="1234075"/>
+          <a:ext cx="3941763" cy="2686050"/>
+        </p:xfrm>
+        <a:graphic>
+          <a:graphicData uri="http://schemas.openxmlformats.org/presentationml/2006/ole">
+            <mc:AlternateContent xmlns:mc="http://schemas.openxmlformats.org/markup-compatibility/2006">
+              <mc:Choice xmlns:v="urn:schemas-microsoft-com:vml" Requires="v">
+                <p:oleObj spid="_x0000_s16390" name="Equation" r:id="rId3" imgW="1714320" imgH="1168200" progId="Equation.DSMT4">
+                  <p:embed/>
+                </p:oleObj>
+              </mc:Choice>
+              <mc:Fallback>
+                <p:oleObj name="Equation" r:id="rId3" imgW="1714320" imgH="1168200" progId="Equation.DSMT4">
+                  <p:embed/>
+                  <p:pic>
+                    <p:nvPicPr>
+                      <p:cNvPr id="29" name="Object 6">
+                        <a:extLst>
+                          <a:ext uri="{FF2B5EF4-FFF2-40B4-BE49-F238E27FC236}">
+                            <a16:creationId xmlns:a16="http://schemas.microsoft.com/office/drawing/2014/main" id="{9EF5B5D9-EE43-49E1-8F03-F84CD071E899}"/>
+                          </a:ext>
+                        </a:extLst>
+                      </p:cNvPr>
+                      <p:cNvPicPr>
+                        <a:picLocks noChangeAspect="1" noChangeArrowheads="1"/>
+                      </p:cNvPicPr>
+                      <p:nvPr/>
+                    </p:nvPicPr>
+                    <p:blipFill>
+                      <a:blip r:embed="rId4"/>
+                      <a:srcRect/>
+                      <a:stretch>
+                        <a:fillRect/>
+                      </a:stretch>
+                    </p:blipFill>
+                    <p:spPr bwMode="auto">
+                      <a:xfrm>
+                        <a:off x="278532" y="1234075"/>
+                        <a:ext cx="3941763" cy="2686050"/>
+                      </a:xfrm>
+                      <a:prstGeom prst="rect">
+                        <a:avLst/>
+                      </a:prstGeom>
+                      <a:noFill/>
+                      <a:extLst>
+                        <a:ext uri="{909E8E84-426E-40DD-AFC4-6F175D3DCCD1}">
+                          <a14:hiddenFill xmlns:a14="http://schemas.microsoft.com/office/drawing/2010/main">
+                            <a:solidFill>
+                              <a:srgbClr val="FFFFFF"/>
+                            </a:solidFill>
+                          </a14:hiddenFill>
+                        </a:ext>
+                      </a:extLst>
+                    </p:spPr>
+                  </p:pic>
+                </p:oleObj>
+              </mc:Fallback>
+            </mc:AlternateContent>
+          </a:graphicData>
+        </a:graphic>
+      </p:graphicFrame>
+      <p:graphicFrame>
+        <p:nvGraphicFramePr>
+          <p:cNvPr id="3" name="Object 6">
+            <a:extLst>
+              <a:ext uri="{FF2B5EF4-FFF2-40B4-BE49-F238E27FC236}">
+                <a16:creationId xmlns:a16="http://schemas.microsoft.com/office/drawing/2014/main" id="{9F40542B-2B39-C64B-A21C-7D395E0D4714}"/>
+              </a:ext>
+            </a:extLst>
+          </p:cNvPr>
+          <p:cNvGraphicFramePr>
+            <a:graphicFrameLocks noChangeAspect="1"/>
+          </p:cNvGraphicFramePr>
+          <p:nvPr>
+            <p:extLst>
+              <p:ext uri="{D42A27DB-BD31-4B8C-83A1-F6EECF244321}">
+                <p14:modId xmlns:p14="http://schemas.microsoft.com/office/powerpoint/2010/main" val="1131141075"/>
+              </p:ext>
+            </p:extLst>
+          </p:nvPr>
+        </p:nvGraphicFramePr>
+        <p:xfrm>
+          <a:off x="277813" y="4249739"/>
+          <a:ext cx="5784850" cy="904875"/>
+        </p:xfrm>
+        <a:graphic>
+          <a:graphicData uri="http://schemas.openxmlformats.org/presentationml/2006/ole">
+            <mc:AlternateContent xmlns:mc="http://schemas.openxmlformats.org/markup-compatibility/2006">
+              <mc:Choice xmlns:v="urn:schemas-microsoft-com:vml" Requires="v">
+                <p:oleObj spid="_x0000_s16391" name="Equation" r:id="rId5" imgW="2514600" imgH="393480" progId="Equation.DSMT4">
+                  <p:embed/>
+                </p:oleObj>
+              </mc:Choice>
+              <mc:Fallback>
+                <p:oleObj name="Equation" r:id="rId5" imgW="2514600" imgH="393480" progId="Equation.DSMT4">
+                  <p:embed/>
+                  <p:pic>
+                    <p:nvPicPr>
+                      <p:cNvPr id="31" name="Object 6">
+                        <a:extLst>
+                          <a:ext uri="{FF2B5EF4-FFF2-40B4-BE49-F238E27FC236}">
+                            <a16:creationId xmlns:a16="http://schemas.microsoft.com/office/drawing/2014/main" id="{6D03C0F3-D44F-4D0F-8C23-B3EEB5E940C4}"/>
+                          </a:ext>
+                        </a:extLst>
+                      </p:cNvPr>
+                      <p:cNvPicPr>
+                        <a:picLocks noChangeAspect="1" noChangeArrowheads="1"/>
+                      </p:cNvPicPr>
+                      <p:nvPr/>
+                    </p:nvPicPr>
+                    <p:blipFill>
+                      <a:blip r:embed="rId6"/>
+                      <a:srcRect/>
+                      <a:stretch>
+                        <a:fillRect/>
+                      </a:stretch>
+                    </p:blipFill>
+                    <p:spPr bwMode="auto">
+                      <a:xfrm>
+                        <a:off x="277813" y="4249739"/>
+                        <a:ext cx="5784850" cy="904875"/>
+                      </a:xfrm>
+                      <a:prstGeom prst="rect">
+                        <a:avLst/>
+                      </a:prstGeom>
+                      <a:noFill/>
+                      <a:extLst>
+                        <a:ext uri="{909E8E84-426E-40DD-AFC4-6F175D3DCCD1}">
+                          <a14:hiddenFill xmlns:a14="http://schemas.microsoft.com/office/drawing/2010/main">
+                            <a:solidFill>
+                              <a:srgbClr val="FFFFFF"/>
+                            </a:solidFill>
+                          </a14:hiddenFill>
+                        </a:ext>
+                      </a:extLst>
+                    </p:spPr>
+                  </p:pic>
+                </p:oleObj>
+              </mc:Fallback>
+            </mc:AlternateContent>
+          </a:graphicData>
+        </a:graphic>
+      </p:graphicFrame>
+      <p:grpSp>
+        <p:nvGrpSpPr>
+          <p:cNvPr id="4" name="组合 3">
+            <a:extLst>
+              <a:ext uri="{FF2B5EF4-FFF2-40B4-BE49-F238E27FC236}">
+                <a16:creationId xmlns:a16="http://schemas.microsoft.com/office/drawing/2014/main" id="{9C86A079-89F7-0B45-A0A7-6BB3CCF90CD3}"/>
+              </a:ext>
+            </a:extLst>
+          </p:cNvPr>
+          <p:cNvGrpSpPr/>
+          <p:nvPr/>
+        </p:nvGrpSpPr>
+        <p:grpSpPr>
+          <a:xfrm>
+            <a:off x="172526" y="5459801"/>
+            <a:ext cx="8938892" cy="578716"/>
+            <a:chOff x="610241" y="6285044"/>
+            <a:chExt cx="8938892" cy="578716"/>
+          </a:xfrm>
+        </p:grpSpPr>
+        <p:grpSp>
+          <p:nvGrpSpPr>
+            <p:cNvPr id="5" name="组合 2">
+              <a:extLst>
+                <a:ext uri="{FF2B5EF4-FFF2-40B4-BE49-F238E27FC236}">
+                  <a16:creationId xmlns:a16="http://schemas.microsoft.com/office/drawing/2014/main" id="{11524CB5-DF99-D245-86F3-8739E0ACE506}"/>
+                </a:ext>
+              </a:extLst>
+            </p:cNvPr>
+            <p:cNvGrpSpPr/>
+            <p:nvPr/>
+          </p:nvGrpSpPr>
+          <p:grpSpPr>
+            <a:xfrm>
+              <a:off x="610241" y="6285044"/>
+              <a:ext cx="4606529" cy="578716"/>
+              <a:chOff x="1587483" y="6334780"/>
+              <a:chExt cx="4606529" cy="578716"/>
+            </a:xfrm>
+          </p:grpSpPr>
+          <p:graphicFrame>
+            <p:nvGraphicFramePr>
+              <p:cNvPr id="7" name="Object 6">
+                <a:extLst>
+                  <a:ext uri="{FF2B5EF4-FFF2-40B4-BE49-F238E27FC236}">
+                    <a16:creationId xmlns:a16="http://schemas.microsoft.com/office/drawing/2014/main" id="{843E3695-47FA-B345-AB42-7165C3FD8A66}"/>
+                  </a:ext>
+                </a:extLst>
+              </p:cNvPr>
+              <p:cNvGraphicFramePr>
+                <a:graphicFrameLocks noChangeAspect="1"/>
+              </p:cNvGraphicFramePr>
+              <p:nvPr/>
+            </p:nvGraphicFramePr>
+            <p:xfrm>
+              <a:off x="2017580" y="6358736"/>
+              <a:ext cx="4176432" cy="554760"/>
+            </p:xfrm>
+            <a:graphic>
+              <a:graphicData uri="http://schemas.openxmlformats.org/presentationml/2006/ole">
+                <mc:AlternateContent xmlns:mc="http://schemas.openxmlformats.org/markup-compatibility/2006">
+                  <mc:Choice xmlns:v="urn:schemas-microsoft-com:vml" Requires="v">
+                    <p:oleObj spid="_x0000_s16392" name="Equation" r:id="rId7" imgW="1815840" imgH="241200" progId="Equation.DSMT4">
+                      <p:embed/>
+                    </p:oleObj>
+                  </mc:Choice>
+                  <mc:Fallback>
+                    <p:oleObj name="Equation" r:id="rId7" imgW="1815840" imgH="241200" progId="Equation.DSMT4">
+                      <p:embed/>
+                      <p:pic>
+                        <p:nvPicPr>
+                          <p:cNvPr id="30" name="Object 6">
+                            <a:extLst>
+                              <a:ext uri="{FF2B5EF4-FFF2-40B4-BE49-F238E27FC236}">
+                                <a16:creationId xmlns:a16="http://schemas.microsoft.com/office/drawing/2014/main" id="{91255C79-320C-4090-94E5-A0FC930BE3D1}"/>
+                              </a:ext>
+                            </a:extLst>
+                          </p:cNvPr>
+                          <p:cNvPicPr>
+                            <a:picLocks noChangeAspect="1" noChangeArrowheads="1"/>
+                          </p:cNvPicPr>
+                          <p:nvPr/>
+                        </p:nvPicPr>
+                        <p:blipFill>
+                          <a:blip r:embed="rId8"/>
+                          <a:srcRect/>
+                          <a:stretch>
+                            <a:fillRect/>
+                          </a:stretch>
+                        </p:blipFill>
+                        <p:spPr bwMode="auto">
+                          <a:xfrm>
+                            <a:off x="2017580" y="6358736"/>
+                            <a:ext cx="4176432" cy="554760"/>
+                          </a:xfrm>
+                          <a:prstGeom prst="rect">
+                            <a:avLst/>
+                          </a:prstGeom>
+                          <a:noFill/>
+                          <a:extLst>
+                            <a:ext uri="{909E8E84-426E-40DD-AFC4-6F175D3DCCD1}">
+                              <a14:hiddenFill xmlns:a14="http://schemas.microsoft.com/office/drawing/2010/main">
+                                <a:solidFill>
+                                  <a:srgbClr val="FFFFFF"/>
+                                </a:solidFill>
+                              </a14:hiddenFill>
+                            </a:ext>
+                          </a:extLst>
+                        </p:spPr>
+                      </p:pic>
+                    </p:oleObj>
+                  </mc:Fallback>
+                </mc:AlternateContent>
+              </a:graphicData>
+            </a:graphic>
+          </p:graphicFrame>
+          <p:sp>
+            <p:nvSpPr>
+              <p:cNvPr id="8" name="文本框 31">
+                <a:extLst>
+                  <a:ext uri="{FF2B5EF4-FFF2-40B4-BE49-F238E27FC236}">
+                    <a16:creationId xmlns:a16="http://schemas.microsoft.com/office/drawing/2014/main" id="{9AC1096D-9361-AD41-AEEF-584ABFDA501E}"/>
+                  </a:ext>
+                </a:extLst>
+              </p:cNvPr>
+              <p:cNvSpPr txBox="1"/>
+              <p:nvPr/>
+            </p:nvSpPr>
+            <p:spPr>
+              <a:xfrm>
+                <a:off x="1587483" y="6334780"/>
+                <a:ext cx="430097" cy="523220"/>
+              </a:xfrm>
+              <a:prstGeom prst="rect">
+                <a:avLst/>
+              </a:prstGeom>
+              <a:noFill/>
+            </p:spPr>
+            <p:txBody>
+              <a:bodyPr wrap="square">
+                <a:spAutoFit/>
+              </a:bodyPr>
+              <a:lstStyle/>
+              <a:p>
+                <a:r>
+                  <a:rPr lang="zh-CN" altLang="en-US" sz="2800" dirty="0"/>
+                  <a:t>当</a:t>
+                </a:r>
+              </a:p>
+            </p:txBody>
+          </p:sp>
+        </p:grpSp>
+        <p:sp>
+          <p:nvSpPr>
+            <p:cNvPr id="6" name="文本框 32">
+              <a:extLst>
+                <a:ext uri="{FF2B5EF4-FFF2-40B4-BE49-F238E27FC236}">
+                  <a16:creationId xmlns:a16="http://schemas.microsoft.com/office/drawing/2014/main" id="{60082B24-E2EC-5547-9AD7-21E0198A5879}"/>
+                </a:ext>
+              </a:extLst>
+            </p:cNvPr>
+            <p:cNvSpPr txBox="1"/>
+            <p:nvPr/>
+          </p:nvSpPr>
+          <p:spPr>
+            <a:xfrm>
+              <a:off x="5216770" y="6287275"/>
+              <a:ext cx="4332363" cy="523220"/>
+            </a:xfrm>
+            <a:prstGeom prst="rect">
+              <a:avLst/>
+            </a:prstGeom>
+            <a:noFill/>
+          </p:spPr>
+          <p:txBody>
+            <a:bodyPr wrap="square">
+              <a:spAutoFit/>
+            </a:bodyPr>
+            <a:lstStyle/>
+            <a:p>
+              <a:r>
+                <a:rPr lang="zh-CN" altLang="en-US" sz="2800" dirty="0"/>
+                <a:t>时</a:t>
+              </a:r>
+              <a:r>
+                <a:rPr lang="en-US" altLang="zh-CN" sz="2800" dirty="0"/>
+                <a:t>,  </a:t>
+              </a:r>
+              <a:r>
+                <a:rPr lang="en-US" altLang="zh-CN" sz="2800" i="1" dirty="0"/>
+                <a:t>D</a:t>
+              </a:r>
+              <a:r>
+                <a:rPr lang="en-US" altLang="zh-CN" sz="2800" dirty="0"/>
+                <a:t>≠0,  </a:t>
+              </a:r>
+              <a:r>
+                <a:rPr lang="zh-CN" altLang="en-US" sz="2800" dirty="0"/>
+                <a:t>方程组有唯一解</a:t>
+              </a:r>
+              <a:r>
+                <a:rPr lang="en-US" altLang="zh-CN" sz="2800" dirty="0"/>
+                <a:t>.</a:t>
+              </a:r>
+              <a:endParaRPr lang="zh-CN" altLang="en-US" sz="2800" dirty="0"/>
+            </a:p>
+          </p:txBody>
+        </p:sp>
+      </p:grpSp>
+      <p:graphicFrame>
+        <p:nvGraphicFramePr>
+          <p:cNvPr id="9" name="Object 6">
+            <a:extLst>
+              <a:ext uri="{FF2B5EF4-FFF2-40B4-BE49-F238E27FC236}">
+                <a16:creationId xmlns:a16="http://schemas.microsoft.com/office/drawing/2014/main" id="{115831F9-6524-AB4A-AB97-3ED63E13E2B1}"/>
+              </a:ext>
+            </a:extLst>
+          </p:cNvPr>
+          <p:cNvGraphicFramePr>
+            <a:graphicFrameLocks noChangeAspect="1"/>
+          </p:cNvGraphicFramePr>
+          <p:nvPr>
+            <p:extLst>
+              <p:ext uri="{D42A27DB-BD31-4B8C-83A1-F6EECF244321}">
+                <p14:modId xmlns:p14="http://schemas.microsoft.com/office/powerpoint/2010/main" val="3983781947"/>
+              </p:ext>
+            </p:extLst>
+          </p:nvPr>
+        </p:nvGraphicFramePr>
+        <p:xfrm>
+          <a:off x="4217828" y="2271786"/>
+          <a:ext cx="2278062" cy="847725"/>
+        </p:xfrm>
+        <a:graphic>
+          <a:graphicData uri="http://schemas.openxmlformats.org/presentationml/2006/ole">
+            <mc:AlternateContent xmlns:mc="http://schemas.openxmlformats.org/markup-compatibility/2006">
+              <mc:Choice xmlns:v="urn:schemas-microsoft-com:vml" Requires="v">
+                <p:oleObj spid="_x0000_s16393" name="Equation" r:id="rId9" imgW="990360" imgH="368280" progId="Equation.DSMT4">
+                  <p:embed/>
+                </p:oleObj>
+              </mc:Choice>
+              <mc:Fallback>
+                <p:oleObj name="Equation" r:id="rId9" imgW="990360" imgH="368280" progId="Equation.DSMT4">
+                  <p:embed/>
+                  <p:pic>
+                    <p:nvPicPr>
+                      <p:cNvPr id="34" name="Object 6">
+                        <a:extLst>
+                          <a:ext uri="{FF2B5EF4-FFF2-40B4-BE49-F238E27FC236}">
+                            <a16:creationId xmlns:a16="http://schemas.microsoft.com/office/drawing/2014/main" id="{BB6C23B3-91D8-4CE9-A7F1-C3F3673D4449}"/>
+                          </a:ext>
+                        </a:extLst>
+                      </p:cNvPr>
+                      <p:cNvPicPr>
+                        <a:picLocks noChangeAspect="1" noChangeArrowheads="1"/>
+                      </p:cNvPicPr>
+                      <p:nvPr/>
+                    </p:nvPicPr>
+                    <p:blipFill>
+                      <a:blip r:embed="rId10"/>
+                      <a:srcRect/>
+                      <a:stretch>
+                        <a:fillRect/>
+                      </a:stretch>
+                    </p:blipFill>
+                    <p:spPr bwMode="auto">
+                      <a:xfrm>
+                        <a:off x="4217828" y="2271786"/>
+                        <a:ext cx="2278062" cy="847725"/>
+                      </a:xfrm>
+                      <a:prstGeom prst="rect">
+                        <a:avLst/>
+                      </a:prstGeom>
+                      <a:noFill/>
+                      <a:extLst>
+                        <a:ext uri="{909E8E84-426E-40DD-AFC4-6F175D3DCCD1}">
+                          <a14:hiddenFill xmlns:a14="http://schemas.microsoft.com/office/drawing/2010/main">
+                            <a:solidFill>
+                              <a:srgbClr val="FFFFFF"/>
+                            </a:solidFill>
+                          </a14:hiddenFill>
+                        </a:ext>
+                      </a:extLst>
+                    </p:spPr>
+                  </p:pic>
+                </p:oleObj>
+              </mc:Fallback>
+            </mc:AlternateContent>
+          </a:graphicData>
+        </a:graphic>
+      </p:graphicFrame>
+      <p:graphicFrame>
+        <p:nvGraphicFramePr>
+          <p:cNvPr id="10" name="Object 6">
+            <a:extLst>
+              <a:ext uri="{FF2B5EF4-FFF2-40B4-BE49-F238E27FC236}">
+                <a16:creationId xmlns:a16="http://schemas.microsoft.com/office/drawing/2014/main" id="{EFEF079A-FDC7-1344-A69A-1985504A0645}"/>
+              </a:ext>
+            </a:extLst>
+          </p:cNvPr>
+          <p:cNvGraphicFramePr>
+            <a:graphicFrameLocks noChangeAspect="1"/>
+          </p:cNvGraphicFramePr>
+          <p:nvPr>
+            <p:extLst>
+              <p:ext uri="{D42A27DB-BD31-4B8C-83A1-F6EECF244321}">
+                <p14:modId xmlns:p14="http://schemas.microsoft.com/office/powerpoint/2010/main" val="2436489611"/>
+              </p:ext>
+            </p:extLst>
+          </p:nvPr>
+        </p:nvGraphicFramePr>
+        <p:xfrm>
+          <a:off x="6495891" y="2313437"/>
+          <a:ext cx="642937" cy="409575"/>
+        </p:xfrm>
+        <a:graphic>
+          <a:graphicData uri="http://schemas.openxmlformats.org/presentationml/2006/ole">
+            <mc:AlternateContent xmlns:mc="http://schemas.openxmlformats.org/markup-compatibility/2006">
+              <mc:Choice xmlns:v="urn:schemas-microsoft-com:vml" Requires="v">
+                <p:oleObj spid="_x0000_s16394" name="Equation" r:id="rId11" imgW="279360" imgH="177480" progId="Equation.DSMT4">
+                  <p:embed/>
+                </p:oleObj>
+              </mc:Choice>
+              <mc:Fallback>
+                <p:oleObj name="Equation" r:id="rId11" imgW="279360" imgH="177480" progId="Equation.DSMT4">
+                  <p:embed/>
+                  <p:pic>
+                    <p:nvPicPr>
+                      <p:cNvPr id="35" name="Object 6">
+                        <a:extLst>
+                          <a:ext uri="{FF2B5EF4-FFF2-40B4-BE49-F238E27FC236}">
+                            <a16:creationId xmlns:a16="http://schemas.microsoft.com/office/drawing/2014/main" id="{41C024F6-CA28-4154-84CB-26D4D4C6CF90}"/>
+                          </a:ext>
+                        </a:extLst>
+                      </p:cNvPr>
+                      <p:cNvPicPr>
+                        <a:picLocks noChangeAspect="1" noChangeArrowheads="1"/>
+                      </p:cNvPicPr>
+                      <p:nvPr/>
+                    </p:nvPicPr>
+                    <p:blipFill>
+                      <a:blip r:embed="rId12"/>
+                      <a:srcRect/>
+                      <a:stretch>
+                        <a:fillRect/>
+                      </a:stretch>
+                    </p:blipFill>
+                    <p:spPr bwMode="auto">
+                      <a:xfrm>
+                        <a:off x="6495891" y="2313437"/>
+                        <a:ext cx="642937" cy="409575"/>
+                      </a:xfrm>
+                      <a:prstGeom prst="rect">
+                        <a:avLst/>
+                      </a:prstGeom>
+                      <a:noFill/>
+                      <a:extLst>
+                        <a:ext uri="{909E8E84-426E-40DD-AFC4-6F175D3DCCD1}">
+                          <a14:hiddenFill xmlns:a14="http://schemas.microsoft.com/office/drawing/2010/main">
+                            <a:solidFill>
+                              <a:srgbClr val="FFFFFF"/>
+                            </a:solidFill>
+                          </a14:hiddenFill>
+                        </a:ext>
+                      </a:extLst>
+                    </p:spPr>
+                  </p:pic>
+                </p:oleObj>
+              </mc:Fallback>
+            </mc:AlternateContent>
+          </a:graphicData>
+        </a:graphic>
+      </p:graphicFrame>
+    </p:spTree>
+    <p:extLst>
+      <p:ext uri="{BB962C8B-B14F-4D97-AF65-F5344CB8AC3E}">
+        <p14:creationId xmlns:p14="http://schemas.microsoft.com/office/powerpoint/2010/main" val="3998545170"/>
+      </p:ext>
+    </p:extLst>
+  </p:cSld>
+  <p:clrMapOvr>
+    <a:masterClrMapping/>
+  </p:clrMapOvr>
+  <p:transition spd="slow">
+    <p:split orient="vert"/>
+  </p:transition>
+  <p:timing>
+    <p:tnLst>
+      <p:par>
+        <p:cTn id="1" dur="indefinite" restart="never" nodeType="tmRoot">
+          <p:childTnLst>
+            <p:seq concurrent="1" nextAc="seek">
+              <p:cTn id="2" dur="indefinite" nodeType="mainSeq">
+                <p:childTnLst>
+                  <p:par>
+                    <p:cTn id="3" fill="hold">
+                      <p:stCondLst>
+                        <p:cond delay="indefinite"/>
+                      </p:stCondLst>
+                      <p:childTnLst>
+                        <p:par>
+                          <p:cTn id="4" fill="hold">
+                            <p:stCondLst>
+                              <p:cond delay="0"/>
+                            </p:stCondLst>
+                            <p:childTnLst>
+                              <p:par>
+                                <p:cTn id="5" presetID="22" presetClass="entr" presetSubtype="8" fill="hold" nodeType="clickEffect">
+                                  <p:stCondLst>
+                                    <p:cond delay="0"/>
+                                  </p:stCondLst>
+                                  <p:childTnLst>
+                                    <p:set>
+                                      <p:cBhvr>
+                                        <p:cTn id="6" dur="1" fill="hold">
+                                          <p:stCondLst>
+                                            <p:cond delay="0"/>
+                                          </p:stCondLst>
+                                        </p:cTn>
+                                        <p:tgtEl>
+                                          <p:spTgt spid="2"/>
+                                        </p:tgtEl>
+                                        <p:attrNameLst>
+                                          <p:attrName>style.visibility</p:attrName>
+                                        </p:attrNameLst>
+                                      </p:cBhvr>
+                                      <p:to>
+                                        <p:strVal val="visible"/>
+                                      </p:to>
+                                    </p:set>
+                                    <p:animEffect transition="in" filter="wipe(left)">
+                                      <p:cBhvr>
+                                        <p:cTn id="7" dur="500"/>
+                                        <p:tgtEl>
+                                          <p:spTgt spid="2"/>
+                                        </p:tgtEl>
+                                      </p:cBhvr>
+                                    </p:animEffect>
+                                  </p:childTnLst>
+                                </p:cTn>
+                              </p:par>
+                            </p:childTnLst>
+                          </p:cTn>
+                        </p:par>
+                      </p:childTnLst>
+                    </p:cTn>
+                  </p:par>
+                  <p:par>
+                    <p:cTn id="8" fill="hold">
+                      <p:stCondLst>
+                        <p:cond delay="indefinite"/>
+                      </p:stCondLst>
+                      <p:childTnLst>
+                        <p:par>
+                          <p:cTn id="9" fill="hold">
+                            <p:stCondLst>
+                              <p:cond delay="0"/>
+                            </p:stCondLst>
+                            <p:childTnLst>
+                              <p:par>
+                                <p:cTn id="10" presetID="22" presetClass="entr" presetSubtype="8" fill="hold" nodeType="clickEffect">
+                                  <p:stCondLst>
+                                    <p:cond delay="0"/>
+                                  </p:stCondLst>
+                                  <p:childTnLst>
+                                    <p:set>
+                                      <p:cBhvr>
+                                        <p:cTn id="11" dur="1" fill="hold">
+                                          <p:stCondLst>
+                                            <p:cond delay="0"/>
+                                          </p:stCondLst>
+                                        </p:cTn>
+                                        <p:tgtEl>
+                                          <p:spTgt spid="9"/>
+                                        </p:tgtEl>
+                                        <p:attrNameLst>
+                                          <p:attrName>style.visibility</p:attrName>
+                                        </p:attrNameLst>
+                                      </p:cBhvr>
+                                      <p:to>
+                                        <p:strVal val="visible"/>
+                                      </p:to>
+                                    </p:set>
+                                    <p:animEffect transition="in" filter="wipe(left)">
+                                      <p:cBhvr>
+                                        <p:cTn id="12" dur="500"/>
+                                        <p:tgtEl>
+                                          <p:spTgt spid="9"/>
+                                        </p:tgtEl>
+                                      </p:cBhvr>
+                                    </p:animEffect>
+                                  </p:childTnLst>
+                                </p:cTn>
+                              </p:par>
+                            </p:childTnLst>
+                          </p:cTn>
+                        </p:par>
+                      </p:childTnLst>
+                    </p:cTn>
+                  </p:par>
+                  <p:par>
+                    <p:cTn id="13" fill="hold">
+                      <p:stCondLst>
+                        <p:cond delay="indefinite"/>
+                      </p:stCondLst>
+                      <p:childTnLst>
+                        <p:par>
+                          <p:cTn id="14" fill="hold">
+                            <p:stCondLst>
+                              <p:cond delay="0"/>
+                            </p:stCondLst>
+                            <p:childTnLst>
+                              <p:par>
+                                <p:cTn id="15" presetID="22" presetClass="entr" presetSubtype="8" fill="hold" nodeType="clickEffect">
+                                  <p:stCondLst>
+                                    <p:cond delay="0"/>
+                                  </p:stCondLst>
+                                  <p:childTnLst>
+                                    <p:set>
+                                      <p:cBhvr>
+                                        <p:cTn id="16" dur="1" fill="hold">
+                                          <p:stCondLst>
+                                            <p:cond delay="0"/>
+                                          </p:stCondLst>
+                                        </p:cTn>
+                                        <p:tgtEl>
+                                          <p:spTgt spid="10"/>
+                                        </p:tgtEl>
+                                        <p:attrNameLst>
+                                          <p:attrName>style.visibility</p:attrName>
+                                        </p:attrNameLst>
+                                      </p:cBhvr>
+                                      <p:to>
+                                        <p:strVal val="visible"/>
+                                      </p:to>
+                                    </p:set>
+                                    <p:animEffect transition="in" filter="wipe(left)">
+                                      <p:cBhvr>
+                                        <p:cTn id="17" dur="500"/>
+                                        <p:tgtEl>
+                                          <p:spTgt spid="10"/>
+                                        </p:tgtEl>
+                                      </p:cBhvr>
+                                    </p:animEffect>
+                                  </p:childTnLst>
+                                </p:cTn>
+                              </p:par>
+                            </p:childTnLst>
+                          </p:cTn>
+                        </p:par>
+                      </p:childTnLst>
+                    </p:cTn>
+                  </p:par>
+                  <p:par>
+                    <p:cTn id="18" fill="hold">
+                      <p:stCondLst>
+                        <p:cond delay="indefinite"/>
+                      </p:stCondLst>
+                      <p:childTnLst>
+                        <p:par>
+                          <p:cTn id="19" fill="hold">
+                            <p:stCondLst>
+                              <p:cond delay="0"/>
+                            </p:stCondLst>
+                            <p:childTnLst>
+                              <p:par>
+                                <p:cTn id="20" presetID="22" presetClass="entr" presetSubtype="8" fill="hold" nodeType="clickEffect">
+                                  <p:stCondLst>
+                                    <p:cond delay="0"/>
+                                  </p:stCondLst>
+                                  <p:childTnLst>
+                                    <p:set>
+                                      <p:cBhvr>
+                                        <p:cTn id="21" dur="1" fill="hold">
+                                          <p:stCondLst>
+                                            <p:cond delay="0"/>
+                                          </p:stCondLst>
+                                        </p:cTn>
+                                        <p:tgtEl>
+                                          <p:spTgt spid="3"/>
+                                        </p:tgtEl>
+                                        <p:attrNameLst>
+                                          <p:attrName>style.visibility</p:attrName>
+                                        </p:attrNameLst>
+                                      </p:cBhvr>
+                                      <p:to>
+                                        <p:strVal val="visible"/>
+                                      </p:to>
+                                    </p:set>
+                                    <p:animEffect transition="in" filter="wipe(left)">
+                                      <p:cBhvr>
+                                        <p:cTn id="22" dur="500"/>
+                                        <p:tgtEl>
+                                          <p:spTgt spid="3"/>
+                                        </p:tgtEl>
+                                      </p:cBhvr>
+                                    </p:animEffect>
+                                  </p:childTnLst>
+                                </p:cTn>
+                              </p:par>
+                            </p:childTnLst>
+                          </p:cTn>
+                        </p:par>
+                      </p:childTnLst>
+                    </p:cTn>
+                  </p:par>
+                  <p:par>
+                    <p:cTn id="23" fill="hold">
+                      <p:stCondLst>
+                        <p:cond delay="indefinite"/>
+                      </p:stCondLst>
+                      <p:childTnLst>
+                        <p:par>
+                          <p:cTn id="24" fill="hold">
+                            <p:stCondLst>
+                              <p:cond delay="0"/>
+                            </p:stCondLst>
+                            <p:childTnLst>
+                              <p:par>
+                                <p:cTn id="25" presetID="22" presetClass="entr" presetSubtype="8" fill="hold" nodeType="clickEffect">
+                                  <p:stCondLst>
+                                    <p:cond delay="0"/>
+                                  </p:stCondLst>
+                                  <p:childTnLst>
+                                    <p:set>
+                                      <p:cBhvr>
+                                        <p:cTn id="26" dur="1" fill="hold">
+                                          <p:stCondLst>
+                                            <p:cond delay="0"/>
+                                          </p:stCondLst>
+                                        </p:cTn>
+                                        <p:tgtEl>
+                                          <p:spTgt spid="4"/>
+                                        </p:tgtEl>
+                                        <p:attrNameLst>
+                                          <p:attrName>style.visibility</p:attrName>
+                                        </p:attrNameLst>
+                                      </p:cBhvr>
+                                      <p:to>
+                                        <p:strVal val="visible"/>
+                                      </p:to>
+                                    </p:set>
+                                    <p:animEffect transition="in" filter="wipe(left)">
+                                      <p:cBhvr>
+                                        <p:cTn id="27" dur="500"/>
+                                        <p:tgtEl>
+                                          <p:spTgt spid="4"/>
+                                        </p:tgtEl>
+                                      </p:cBhvr>
+                                    </p:animEffect>
+                                  </p:childTnLst>
+                                </p:cTn>
+                              </p:par>
+                            </p:childTnLst>
+                          </p:cTn>
+                        </p:par>
+                      </p:childTnLst>
+                    </p:cTn>
+                  </p:par>
+                </p:childTnLst>
+              </p:cTn>
+              <p:prevCondLst>
+                <p:cond evt="onPrev" delay="0">
+                  <p:tgtEl>
+                    <p:sldTgt/>
+                  </p:tgtEl>
+                </p:cond>
+              </p:prevCondLst>
+              <p:nextCondLst>
+                <p:cond evt="onNext" delay="0">
+                  <p:tgtEl>
+                    <p:sldTgt/>
+                  </p:tgtEl>
+                </p:cond>
+              </p:nextCondLst>
+            </p:seq>
+          </p:childTnLst>
+        </p:cTn>
+      </p:par>
+    </p:tnLst>
+  </p:timing>
+</p:sld>
+</file>
+
+<file path=ppt/slides/slide19.xml><?xml version="1.0" encoding="utf-8"?>
 <p:sld xmlns:a="http://schemas.openxmlformats.org/drawingml/2006/main" xmlns:r="http://schemas.openxmlformats.org/officeDocument/2006/relationships" xmlns:p="http://schemas.openxmlformats.org/presentationml/2006/main" showMasterSp="0">
   <p:cSld>
     <p:bg>
@@ -36249,7 +39168,7 @@
           <a:graphicData uri="http://schemas.openxmlformats.org/presentationml/2006/ole">
             <mc:AlternateContent xmlns:mc="http://schemas.openxmlformats.org/markup-compatibility/2006">
               <mc:Choice xmlns:v="urn:schemas-microsoft-com:vml" Requires="v">
-                <p:oleObj spid="_x0000_s1026" name="Equation" r:id="rId4" imgW="2171520" imgH="799920" progId="Equation.DSMT4">
+                <p:oleObj spid="_x0000_s1028" name="Equation" r:id="rId4" imgW="2171520" imgH="799920" progId="Equation.DSMT4">
                   <p:embed/>
                 </p:oleObj>
               </mc:Choice>
@@ -37262,7 +40181,7 @@
           <a:graphicData uri="http://schemas.openxmlformats.org/presentationml/2006/ole">
             <mc:AlternateContent xmlns:mc="http://schemas.openxmlformats.org/markup-compatibility/2006">
               <mc:Choice xmlns:v="urn:schemas-microsoft-com:vml" Requires="v">
-                <p:oleObj spid="_x0000_s2051" name="Equation" r:id="rId3" imgW="1587240" imgH="799920" progId="Equation.DSMT4">
+                <p:oleObj spid="_x0000_s2055" name="Equation" r:id="rId3" imgW="1587240" imgH="799920" progId="Equation.DSMT4">
                   <p:embed/>
                 </p:oleObj>
               </mc:Choice>
@@ -37331,7 +40250,7 @@
           <a:graphicData uri="http://schemas.openxmlformats.org/presentationml/2006/ole">
             <mc:AlternateContent xmlns:mc="http://schemas.openxmlformats.org/markup-compatibility/2006">
               <mc:Choice xmlns:v="urn:schemas-microsoft-com:vml" Requires="v">
-                <p:oleObj spid="_x0000_s2052" name="Equation" r:id="rId5" imgW="5669343" imgH="1726982" progId="Equation.DSMT4">
+                <p:oleObj spid="_x0000_s2056" name="Equation" r:id="rId5" imgW="5669343" imgH="1726982" progId="Equation.DSMT4">
                   <p:embed/>
                 </p:oleObj>
               </mc:Choice>
@@ -38227,7 +41146,7 @@
           <a:graphicData uri="http://schemas.openxmlformats.org/presentationml/2006/ole">
             <mc:AlternateContent xmlns:mc="http://schemas.openxmlformats.org/markup-compatibility/2006">
               <mc:Choice xmlns:v="urn:schemas-microsoft-com:vml" Requires="v">
-                <p:oleObj spid="_x0000_s3079" name="Equation" r:id="rId3" imgW="596880" imgH="393480" progId="Equation.DSMT4">
+                <p:oleObj spid="_x0000_s3091" name="Equation" r:id="rId3" imgW="596880" imgH="393480" progId="Equation.DSMT4">
                   <p:embed/>
                 </p:oleObj>
               </mc:Choice>
@@ -38422,7 +41341,7 @@
           <a:graphicData uri="http://schemas.openxmlformats.org/presentationml/2006/ole">
             <mc:AlternateContent xmlns:mc="http://schemas.openxmlformats.org/markup-compatibility/2006">
               <mc:Choice xmlns:v="urn:schemas-microsoft-com:vml" Requires="v">
-                <p:oleObj spid="_x0000_s3080" name="Equation" r:id="rId5" imgW="5323357" imgH="820109" progId="Equation.DSMT4">
+                <p:oleObj spid="_x0000_s3092" name="Equation" r:id="rId5" imgW="5323357" imgH="820109" progId="Equation.DSMT4">
                   <p:embed/>
                 </p:oleObj>
               </mc:Choice>
@@ -38805,7 +41724,7 @@
           <a:graphicData uri="http://schemas.openxmlformats.org/presentationml/2006/ole">
             <mc:AlternateContent xmlns:mc="http://schemas.openxmlformats.org/markup-compatibility/2006">
               <mc:Choice xmlns:v="urn:schemas-microsoft-com:vml" Requires="v">
-                <p:oleObj spid="_x0000_s3081" name="Equation" r:id="rId7" imgW="622080" imgH="393480" progId="Equation.DSMT4">
+                <p:oleObj spid="_x0000_s3093" name="Equation" r:id="rId7" imgW="622080" imgH="393480" progId="Equation.DSMT4">
                   <p:embed/>
                 </p:oleObj>
               </mc:Choice>
@@ -38874,7 +41793,7 @@
           <a:graphicData uri="http://schemas.openxmlformats.org/presentationml/2006/ole">
             <mc:AlternateContent xmlns:mc="http://schemas.openxmlformats.org/markup-compatibility/2006">
               <mc:Choice xmlns:v="urn:schemas-microsoft-com:vml" Requires="v">
-                <p:oleObj spid="_x0000_s3082" name="Equation" r:id="rId9" imgW="622080" imgH="406080" progId="Equation.DSMT4">
+                <p:oleObj spid="_x0000_s3094" name="Equation" r:id="rId9" imgW="622080" imgH="406080" progId="Equation.DSMT4">
                   <p:embed/>
                 </p:oleObj>
               </mc:Choice>
@@ -38943,7 +41862,7 @@
           <a:graphicData uri="http://schemas.openxmlformats.org/presentationml/2006/ole">
             <mc:AlternateContent xmlns:mc="http://schemas.openxmlformats.org/markup-compatibility/2006">
               <mc:Choice xmlns:v="urn:schemas-microsoft-com:vml" Requires="v">
-                <p:oleObj spid="_x0000_s3083" name="Equation" r:id="rId11" imgW="5366200" imgH="460457" progId="Equation.DSMT4">
+                <p:oleObj spid="_x0000_s3095" name="Equation" r:id="rId11" imgW="5366200" imgH="460457" progId="Equation.DSMT4">
                   <p:embed/>
                 </p:oleObj>
               </mc:Choice>
@@ -39012,7 +41931,7 @@
           <a:graphicData uri="http://schemas.openxmlformats.org/presentationml/2006/ole">
             <mc:AlternateContent xmlns:mc="http://schemas.openxmlformats.org/markup-compatibility/2006">
               <mc:Choice xmlns:v="urn:schemas-microsoft-com:vml" Requires="v">
-                <p:oleObj spid="_x0000_s3084" name="Equation" r:id="rId13" imgW="177480" imgH="101520" progId="Equation.DSMT4">
+                <p:oleObj spid="_x0000_s3096" name="Equation" r:id="rId13" imgW="177480" imgH="101520" progId="Equation.DSMT4">
                   <p:embed/>
                 </p:oleObj>
               </mc:Choice>
@@ -40472,7 +43391,7 @@
           <a:graphicData uri="http://schemas.openxmlformats.org/presentationml/2006/ole">
             <mc:AlternateContent xmlns:mc="http://schemas.openxmlformats.org/markup-compatibility/2006">
               <mc:Choice xmlns:v="urn:schemas-microsoft-com:vml" Requires="v">
-                <p:oleObj spid="_x0000_s4102" name="Equation" r:id="rId4" imgW="5366200" imgH="460457" progId="Equation.DSMT4">
+                <p:oleObj spid="_x0000_s4112" name="Equation" r:id="rId4" imgW="5366200" imgH="460457" progId="Equation.DSMT4">
                   <p:embed/>
                 </p:oleObj>
               </mc:Choice>
@@ -40751,7 +43670,7 @@
           <a:graphicData uri="http://schemas.openxmlformats.org/presentationml/2006/ole">
             <mc:AlternateContent xmlns:mc="http://schemas.openxmlformats.org/markup-compatibility/2006">
               <mc:Choice xmlns:v="urn:schemas-microsoft-com:vml" Requires="v">
-                <p:oleObj spid="_x0000_s4103" name="Equation" r:id="rId6" imgW="1638000" imgH="228600" progId="Equation.DSMT4">
+                <p:oleObj spid="_x0000_s4113" name="Equation" r:id="rId6" imgW="1638000" imgH="228600" progId="Equation.DSMT4">
                   <p:embed/>
                 </p:oleObj>
               </mc:Choice>
@@ -40904,7 +43823,7 @@
           <a:graphicData uri="http://schemas.openxmlformats.org/presentationml/2006/ole">
             <mc:AlternateContent xmlns:mc="http://schemas.openxmlformats.org/markup-compatibility/2006">
               <mc:Choice xmlns:v="urn:schemas-microsoft-com:vml" Requires="v">
-                <p:oleObj spid="_x0000_s4104" name="Equation" r:id="rId8" imgW="4813200" imgH="228600" progId="Equation.DSMT4">
+                <p:oleObj spid="_x0000_s4114" name="Equation" r:id="rId8" imgW="4813200" imgH="228600" progId="Equation.DSMT4">
                   <p:embed/>
                 </p:oleObj>
               </mc:Choice>
@@ -40980,7 +43899,7 @@
           <a:graphicData uri="http://schemas.openxmlformats.org/presentationml/2006/ole">
             <mc:AlternateContent xmlns:mc="http://schemas.openxmlformats.org/markup-compatibility/2006">
               <mc:Choice xmlns:v="urn:schemas-microsoft-com:vml" Requires="v">
-                <p:oleObj spid="_x0000_s4105" name="Equation" r:id="rId10" imgW="4711680" imgH="457200" progId="Equation.DSMT4">
+                <p:oleObj spid="_x0000_s4115" name="Equation" r:id="rId10" imgW="4711680" imgH="457200" progId="Equation.DSMT4">
                   <p:embed/>
                 </p:oleObj>
               </mc:Choice>
@@ -41056,7 +43975,7 @@
           <a:graphicData uri="http://schemas.openxmlformats.org/presentationml/2006/ole">
             <mc:AlternateContent xmlns:mc="http://schemas.openxmlformats.org/markup-compatibility/2006">
               <mc:Choice xmlns:v="urn:schemas-microsoft-com:vml" Requires="v">
-                <p:oleObj spid="_x0000_s4106" name="Equation" r:id="rId12" imgW="431640" imgH="228600" progId="Equation.DSMT4">
+                <p:oleObj spid="_x0000_s4116" name="Equation" r:id="rId12" imgW="431640" imgH="228600" progId="Equation.DSMT4">
                   <p:embed/>
                 </p:oleObj>
               </mc:Choice>
@@ -41900,7 +44819,7 @@
           <a:graphicData uri="http://schemas.openxmlformats.org/presentationml/2006/ole">
             <mc:AlternateContent xmlns:mc="http://schemas.openxmlformats.org/markup-compatibility/2006">
               <mc:Choice xmlns:v="urn:schemas-microsoft-com:vml" Requires="v">
-                <p:oleObj spid="_x0000_s5124" name="Equation" r:id="rId3" imgW="3390840" imgH="469800" progId="Equation.DSMT4">
+                <p:oleObj spid="_x0000_s5130" name="Equation" r:id="rId3" imgW="3390840" imgH="469800" progId="Equation.DSMT4">
                   <p:embed/>
                 </p:oleObj>
               </mc:Choice>
@@ -41995,7 +44914,7 @@
           <a:graphicData uri="http://schemas.openxmlformats.org/presentationml/2006/ole">
             <mc:AlternateContent xmlns:mc="http://schemas.openxmlformats.org/markup-compatibility/2006">
               <mc:Choice xmlns:v="urn:schemas-microsoft-com:vml" Requires="v">
-                <p:oleObj spid="_x0000_s5125" name="Equation" r:id="rId5" imgW="1536480" imgH="419040" progId="Equation.DSMT4">
+                <p:oleObj spid="_x0000_s5131" name="Equation" r:id="rId5" imgW="1536480" imgH="419040" progId="Equation.DSMT4">
                   <p:embed/>
                 </p:oleObj>
               </mc:Choice>
@@ -42317,7 +45236,7 @@
           <a:graphicData uri="http://schemas.openxmlformats.org/presentationml/2006/ole">
             <mc:AlternateContent xmlns:mc="http://schemas.openxmlformats.org/markup-compatibility/2006">
               <mc:Choice xmlns:v="urn:schemas-microsoft-com:vml" Requires="v">
-                <p:oleObj spid="_x0000_s5126" name="Equation" r:id="rId7" imgW="723600" imgH="469800" progId="Equation.DSMT4">
+                <p:oleObj spid="_x0000_s5132" name="Equation" r:id="rId7" imgW="723600" imgH="469800" progId="Equation.DSMT4">
                   <p:embed/>
                 </p:oleObj>
               </mc:Choice>
@@ -44036,7 +46955,7 @@
           <a:graphicData uri="http://schemas.openxmlformats.org/presentationml/2006/ole">
             <mc:AlternateContent xmlns:mc="http://schemas.openxmlformats.org/markup-compatibility/2006">
               <mc:Choice xmlns:v="urn:schemas-microsoft-com:vml" Requires="v">
-                <p:oleObj spid="_x0000_s6146" name="Equation" r:id="rId5" imgW="1993680" imgH="799920" progId="Equation.DSMT4">
+                <p:oleObj spid="_x0000_s6148" name="Equation" r:id="rId5" imgW="1993680" imgH="799920" progId="Equation.DSMT4">
                   <p:embed/>
                 </p:oleObj>
               </mc:Choice>
